--- a/Documentation/Blockchain-Based-Voting-System.pptx
+++ b/Documentation/Blockchain-Based-Voting-System.pptx
@@ -2,10 +2,10 @@
 <file path=ppt/presentation.xml><?xml version="1.0" encoding="utf-8"?>
 <p:presentation xmlns:a="http://schemas.openxmlformats.org/drawingml/2006/main" xmlns:r="http://schemas.openxmlformats.org/officeDocument/2006/relationships" xmlns:p="http://schemas.openxmlformats.org/presentationml/2006/main" embedTrueTypeFonts="1" saveSubsetFonts="1" autoCompressPictures="0">
   <p:sldMasterIdLst>
-    <p:sldMasterId id="2147483648" r:id="rId1"/>
+    <p:sldMasterId id="2147483652" r:id="rId1"/>
   </p:sldMasterIdLst>
   <p:notesMasterIdLst>
-    <p:notesMasterId r:id="rId12"/>
+    <p:notesMasterId r:id="rId13"/>
   </p:notesMasterIdLst>
   <p:sldIdLst>
     <p:sldId id="256" r:id="rId2"/>
@@ -18,25 +18,32 @@
     <p:sldId id="263" r:id="rId9"/>
     <p:sldId id="264" r:id="rId10"/>
     <p:sldId id="265" r:id="rId11"/>
+    <p:sldId id="266" r:id="rId12"/>
   </p:sldIdLst>
   <p:sldSz cx="12192000" cy="6858000"/>
   <p:notesSz cx="6858000" cy="12192000"/>
   <p:embeddedFontLst>
     <p:embeddedFont>
+      <p:font typeface="Host Grotesk Medium" panose="020B0604020202020204" charset="0"/>
+      <p:regular r:id="rId14"/>
+    </p:embeddedFont>
+    <p:embeddedFont>
       <p:font typeface="Bodoni Moda" panose="020B0604020202020204" charset="0"/>
-      <p:regular r:id="rId13"/>
+      <p:regular r:id="rId15"/>
+    </p:embeddedFont>
+    <p:embeddedFont>
+      <p:font typeface="Host Grotesk Bold" panose="020B0604020202020204" charset="0"/>
+      <p:regular r:id="rId16"/>
+    </p:embeddedFont>
+    <p:embeddedFont>
+      <p:font typeface="Garamond" panose="02020404030301010803" pitchFamily="18" charset="0"/>
+      <p:regular r:id="rId17"/>
+      <p:bold r:id="rId18"/>
+      <p:italic r:id="rId19"/>
     </p:embeddedFont>
     <p:embeddedFont>
       <p:font typeface="Host Grotesk" panose="020B0604020202020204" charset="0"/>
-      <p:regular r:id="rId14"/>
-    </p:embeddedFont>
-    <p:embeddedFont>
-      <p:font typeface="Host Grotesk Bold" panose="020B0604020202020204" charset="0"/>
-      <p:regular r:id="rId15"/>
-    </p:embeddedFont>
-    <p:embeddedFont>
-      <p:font typeface="Host Grotesk Medium" panose="020B0604020202020204" charset="0"/>
-      <p:regular r:id="rId16"/>
+      <p:regular r:id="rId20"/>
     </p:embeddedFont>
   </p:embeddedFontLst>
   <p:defaultTextStyle>
@@ -432,6 +439,90 @@
 </p:notes>
 </file>
 
+<file path=ppt/notesSlides/notesSlide11.xml><?xml version="1.0" encoding="utf-8"?>
+<p:notes xmlns:a="http://schemas.openxmlformats.org/drawingml/2006/main" xmlns:r="http://schemas.openxmlformats.org/officeDocument/2006/relationships" xmlns:p="http://schemas.openxmlformats.org/presentationml/2006/main">
+  <p:cSld>
+    <p:spTree>
+      <p:nvGrpSpPr>
+        <p:cNvPr id="1" name=""/>
+        <p:cNvGrpSpPr/>
+        <p:nvPr/>
+      </p:nvGrpSpPr>
+      <p:grpSpPr>
+        <a:xfrm>
+          <a:off x="0" y="0"/>
+          <a:ext cx="0" cy="0"/>
+          <a:chOff x="0" y="0"/>
+          <a:chExt cx="0" cy="0"/>
+        </a:xfrm>
+      </p:grpSpPr>
+      <p:sp>
+        <p:nvSpPr>
+          <p:cNvPr id="2" name="Slide Image Placeholder 1"/>
+          <p:cNvSpPr>
+            <a:spLocks noGrp="1" noRot="1" noChangeAspect="1"/>
+          </p:cNvSpPr>
+          <p:nvPr>
+            <p:ph type="sldImg"/>
+          </p:nvPr>
+        </p:nvSpPr>
+        <p:spPr/>
+      </p:sp>
+      <p:sp>
+        <p:nvSpPr>
+          <p:cNvPr id="3" name="Notes Placeholder 2"/>
+          <p:cNvSpPr>
+            <a:spLocks noGrp="1"/>
+          </p:cNvSpPr>
+          <p:nvPr>
+            <p:ph type="body" idx="1"/>
+          </p:nvPr>
+        </p:nvSpPr>
+        <p:spPr/>
+        <p:txBody>
+          <a:bodyPr/>
+          <a:lstStyle/>
+          <a:p>
+            <a:endParaRPr lang="en-US" dirty="0"/>
+          </a:p>
+        </p:txBody>
+      </p:sp>
+      <p:sp>
+        <p:nvSpPr>
+          <p:cNvPr id="4" name="Slide Number Placeholder 3"/>
+          <p:cNvSpPr>
+            <a:spLocks noGrp="1"/>
+          </p:cNvSpPr>
+          <p:nvPr>
+            <p:ph type="sldNum" sz="quarter" idx="10"/>
+          </p:nvPr>
+        </p:nvSpPr>
+        <p:spPr/>
+        <p:txBody>
+          <a:bodyPr/>
+          <a:lstStyle/>
+          <a:p>
+            <a:fld id="{F7021451-1387-4CA6-816F-3879F97B5CBC}" type="slidenum">
+              <a:rPr lang="en-US"/>
+              <a:t>11</a:t>
+            </a:fld>
+            <a:endParaRPr lang="en-US"/>
+          </a:p>
+        </p:txBody>
+      </p:sp>
+    </p:spTree>
+    <p:extLst>
+      <p:ext uri="{BB962C8B-B14F-4D97-AF65-F5344CB8AC3E}">
+        <p14:creationId xmlns:p14="http://schemas.microsoft.com/office/powerpoint/2010/main" val="1619052590"/>
+      </p:ext>
+    </p:extLst>
+  </p:cSld>
+  <p:clrMapOvr>
+    <a:masterClrMapping/>
+  </p:clrMapOvr>
+</p:notes>
+</file>
+
 <file path=ppt/notesSlides/notesSlide2.xml><?xml version="1.0" encoding="utf-8"?>
 <p:notes xmlns:a="http://schemas.openxmlformats.org/drawingml/2006/main" xmlns:r="http://schemas.openxmlformats.org/officeDocument/2006/relationships" xmlns:p="http://schemas.openxmlformats.org/presentationml/2006/main">
   <p:cSld>
@@ -1105,13 +1196,8 @@
 </file>
 
 <file path=ppt/slideLayouts/slideLayout1.xml><?xml version="1.0" encoding="utf-8"?>
-<p:sldLayout xmlns:a="http://schemas.openxmlformats.org/drawingml/2006/main" xmlns:r="http://schemas.openxmlformats.org/officeDocument/2006/relationships" xmlns:p="http://schemas.openxmlformats.org/presentationml/2006/main" preserve="1">
-  <p:cSld name="DEFAULT">
-    <p:bg>
-      <p:bgRef idx="1001">
-        <a:schemeClr val="bg1"/>
-      </p:bgRef>
-    </p:bg>
+<p:sldLayout xmlns:a="http://schemas.openxmlformats.org/drawingml/2006/main" xmlns:r="http://schemas.openxmlformats.org/officeDocument/2006/relationships" xmlns:p="http://schemas.openxmlformats.org/presentationml/2006/main" showMasterSp="0" type="title" preserve="1">
+  <p:cSld name="Title Slide">
     <p:spTree>
       <p:nvGrpSpPr>
         <p:cNvPr id="1" name=""/>
@@ -1126,16 +1212,2959 @@
           <a:chExt cx="0" cy="0"/>
         </a:xfrm>
       </p:grpSpPr>
+      <p:grpSp>
+        <p:nvGrpSpPr>
+          <p:cNvPr id="7" name="Group 6"/>
+          <p:cNvGrpSpPr/>
+          <p:nvPr/>
+        </p:nvGrpSpPr>
+        <p:grpSpPr>
+          <a:xfrm>
+            <a:off x="-16934" y="0"/>
+            <a:ext cx="12231160" cy="6856214"/>
+            <a:chOff x="-16934" y="0"/>
+            <a:chExt cx="12231160" cy="6856214"/>
+          </a:xfrm>
+        </p:grpSpPr>
+        <p:pic>
+          <p:nvPicPr>
+            <p:cNvPr id="16" name="Picture 15" descr="HD-PanelTitleR1.png"/>
+            <p:cNvPicPr>
+              <a:picLocks noChangeAspect="1"/>
+            </p:cNvPicPr>
+            <p:nvPr/>
+          </p:nvPicPr>
+          <p:blipFill>
+            <a:blip r:embed="rId2">
+              <a:extLst>
+                <a:ext uri="{28A0092B-C50C-407E-A947-70E740481C1C}">
+                  <a14:useLocalDpi xmlns:a14="http://schemas.microsoft.com/office/drawing/2010/main" val="0"/>
+                </a:ext>
+              </a:extLst>
+            </a:blip>
+            <a:stretch>
+              <a:fillRect/>
+            </a:stretch>
+          </p:blipFill>
+          <p:spPr>
+            <a:xfrm>
+              <a:off x="0" y="0"/>
+              <a:ext cx="12188825" cy="6856214"/>
+            </a:xfrm>
+            <a:prstGeom prst="rect">
+              <a:avLst/>
+            </a:prstGeom>
+          </p:spPr>
+        </p:pic>
+        <p:sp>
+          <p:nvSpPr>
+            <p:cNvPr id="26" name="Rectangle 25"/>
+            <p:cNvSpPr/>
+            <p:nvPr/>
+          </p:nvSpPr>
+          <p:spPr>
+            <a:xfrm>
+              <a:off x="2328332" y="1540931"/>
+              <a:ext cx="7543802" cy="3835401"/>
+            </a:xfrm>
+            <a:prstGeom prst="rect">
+              <a:avLst/>
+            </a:prstGeom>
+            <a:noFill/>
+            <a:ln w="15875">
+              <a:miter lim="800000"/>
+            </a:ln>
+          </p:spPr>
+          <p:style>
+            <a:lnRef idx="1">
+              <a:schemeClr val="accent1"/>
+            </a:lnRef>
+            <a:fillRef idx="3">
+              <a:schemeClr val="accent1"/>
+            </a:fillRef>
+            <a:effectRef idx="2">
+              <a:schemeClr val="accent1"/>
+            </a:effectRef>
+            <a:fontRef idx="minor">
+              <a:schemeClr val="lt1"/>
+            </a:fontRef>
+          </p:style>
+        </p:sp>
+        <p:pic>
+          <p:nvPicPr>
+            <p:cNvPr id="17" name="Picture 16" descr="HDRibbonTitle-UniformTrim.png"/>
+            <p:cNvPicPr>
+              <a:picLocks noChangeAspect="1"/>
+            </p:cNvPicPr>
+            <p:nvPr/>
+          </p:nvPicPr>
+          <p:blipFill rotWithShape="1">
+            <a:blip r:embed="rId3">
+              <a:extLst>
+                <a:ext uri="{28A0092B-C50C-407E-A947-70E740481C1C}">
+                  <a14:useLocalDpi xmlns:a14="http://schemas.microsoft.com/office/drawing/2010/main" val="0"/>
+                </a:ext>
+              </a:extLst>
+            </a:blip>
+            <a:srcRect/>
+            <a:stretch/>
+          </p:blipFill>
+          <p:spPr>
+            <a:xfrm>
+              <a:off x="-16934" y="3147609"/>
+              <a:ext cx="2478024" cy="612648"/>
+            </a:xfrm>
+            <a:prstGeom prst="rect">
+              <a:avLst/>
+            </a:prstGeom>
+          </p:spPr>
+        </p:pic>
+        <p:pic>
+          <p:nvPicPr>
+            <p:cNvPr id="20" name="Picture 19" descr="HDRibbonTitle-UniformTrim.png"/>
+            <p:cNvPicPr>
+              <a:picLocks noChangeAspect="1"/>
+            </p:cNvPicPr>
+            <p:nvPr/>
+          </p:nvPicPr>
+          <p:blipFill rotWithShape="1">
+            <a:blip r:embed="rId3">
+              <a:extLst>
+                <a:ext uri="{28A0092B-C50C-407E-A947-70E740481C1C}">
+                  <a14:useLocalDpi xmlns:a14="http://schemas.microsoft.com/office/drawing/2010/main" val="0"/>
+                </a:ext>
+              </a:extLst>
+            </a:blip>
+            <a:srcRect/>
+            <a:stretch/>
+          </p:blipFill>
+          <p:spPr>
+            <a:xfrm>
+              <a:off x="9736202" y="3147609"/>
+              <a:ext cx="2478024" cy="612648"/>
+            </a:xfrm>
+            <a:prstGeom prst="rect">
+              <a:avLst/>
+            </a:prstGeom>
+          </p:spPr>
+        </p:pic>
+      </p:grpSp>
+      <p:sp>
+        <p:nvSpPr>
+          <p:cNvPr id="2" name="Title 1"/>
+          <p:cNvSpPr>
+            <a:spLocks noGrp="1"/>
+          </p:cNvSpPr>
+          <p:nvPr>
+            <p:ph type="ctrTitle"/>
+          </p:nvPr>
+        </p:nvSpPr>
+        <p:spPr>
+          <a:xfrm>
+            <a:off x="2692398" y="1871131"/>
+            <a:ext cx="6815669" cy="1515533"/>
+          </a:xfrm>
+        </p:spPr>
+        <p:txBody>
+          <a:bodyPr anchor="b">
+            <a:noAutofit/>
+          </a:bodyPr>
+          <a:lstStyle>
+            <a:lvl1pPr algn="ctr">
+              <a:defRPr sz="5400">
+                <a:effectLst/>
+              </a:defRPr>
+            </a:lvl1pPr>
+          </a:lstStyle>
+          <a:p>
+            <a:r>
+              <a:rPr lang="en-US" smtClean="0"/>
+              <a:t>Click to edit Master title style</a:t>
+            </a:r>
+            <a:endParaRPr lang="en-US" dirty="0"/>
+          </a:p>
+        </p:txBody>
+      </p:sp>
+      <p:sp>
+        <p:nvSpPr>
+          <p:cNvPr id="3" name="Subtitle 2"/>
+          <p:cNvSpPr>
+            <a:spLocks noGrp="1"/>
+          </p:cNvSpPr>
+          <p:nvPr>
+            <p:ph type="subTitle" idx="1"/>
+          </p:nvPr>
+        </p:nvSpPr>
+        <p:spPr>
+          <a:xfrm>
+            <a:off x="2692398" y="3657597"/>
+            <a:ext cx="6815669" cy="1320802"/>
+          </a:xfrm>
+        </p:spPr>
+        <p:txBody>
+          <a:bodyPr anchor="t">
+            <a:normAutofit/>
+          </a:bodyPr>
+          <a:lstStyle>
+            <a:lvl1pPr marL="0" indent="0" algn="ctr">
+              <a:buNone/>
+              <a:defRPr sz="2100">
+                <a:solidFill>
+                  <a:schemeClr val="tx1"/>
+                </a:solidFill>
+              </a:defRPr>
+            </a:lvl1pPr>
+            <a:lvl2pPr marL="457200" indent="0" algn="ctr">
+              <a:buNone/>
+              <a:defRPr>
+                <a:solidFill>
+                  <a:schemeClr val="tx1">
+                    <a:tint val="75000"/>
+                  </a:schemeClr>
+                </a:solidFill>
+              </a:defRPr>
+            </a:lvl2pPr>
+            <a:lvl3pPr marL="914400" indent="0" algn="ctr">
+              <a:buNone/>
+              <a:defRPr>
+                <a:solidFill>
+                  <a:schemeClr val="tx1">
+                    <a:tint val="75000"/>
+                  </a:schemeClr>
+                </a:solidFill>
+              </a:defRPr>
+            </a:lvl3pPr>
+            <a:lvl4pPr marL="1371600" indent="0" algn="ctr">
+              <a:buNone/>
+              <a:defRPr>
+                <a:solidFill>
+                  <a:schemeClr val="tx1">
+                    <a:tint val="75000"/>
+                  </a:schemeClr>
+                </a:solidFill>
+              </a:defRPr>
+            </a:lvl4pPr>
+            <a:lvl5pPr marL="1828800" indent="0" algn="ctr">
+              <a:buNone/>
+              <a:defRPr>
+                <a:solidFill>
+                  <a:schemeClr val="tx1">
+                    <a:tint val="75000"/>
+                  </a:schemeClr>
+                </a:solidFill>
+              </a:defRPr>
+            </a:lvl5pPr>
+            <a:lvl6pPr marL="2286000" indent="0" algn="ctr">
+              <a:buNone/>
+              <a:defRPr>
+                <a:solidFill>
+                  <a:schemeClr val="tx1">
+                    <a:tint val="75000"/>
+                  </a:schemeClr>
+                </a:solidFill>
+              </a:defRPr>
+            </a:lvl6pPr>
+            <a:lvl7pPr marL="2743200" indent="0" algn="ctr">
+              <a:buNone/>
+              <a:defRPr>
+                <a:solidFill>
+                  <a:schemeClr val="tx1">
+                    <a:tint val="75000"/>
+                  </a:schemeClr>
+                </a:solidFill>
+              </a:defRPr>
+            </a:lvl7pPr>
+            <a:lvl8pPr marL="3200400" indent="0" algn="ctr">
+              <a:buNone/>
+              <a:defRPr>
+                <a:solidFill>
+                  <a:schemeClr val="tx1">
+                    <a:tint val="75000"/>
+                  </a:schemeClr>
+                </a:solidFill>
+              </a:defRPr>
+            </a:lvl8pPr>
+            <a:lvl9pPr marL="3657600" indent="0" algn="ctr">
+              <a:buNone/>
+              <a:defRPr>
+                <a:solidFill>
+                  <a:schemeClr val="tx1">
+                    <a:tint val="75000"/>
+                  </a:schemeClr>
+                </a:solidFill>
+              </a:defRPr>
+            </a:lvl9pPr>
+          </a:lstStyle>
+          <a:p>
+            <a:r>
+              <a:rPr lang="en-US" smtClean="0"/>
+              <a:t>Click to edit Master subtitle style</a:t>
+            </a:r>
+            <a:endParaRPr lang="en-US" dirty="0"/>
+          </a:p>
+        </p:txBody>
+      </p:sp>
+      <p:sp>
+        <p:nvSpPr>
+          <p:cNvPr id="4" name="Date Placeholder 3"/>
+          <p:cNvSpPr>
+            <a:spLocks noGrp="1"/>
+          </p:cNvSpPr>
+          <p:nvPr>
+            <p:ph type="dt" sz="half" idx="10"/>
+          </p:nvPr>
+        </p:nvSpPr>
+        <p:spPr>
+          <a:xfrm>
+            <a:off x="7983232" y="5037663"/>
+            <a:ext cx="897467" cy="279400"/>
+          </a:xfrm>
+        </p:spPr>
+        <p:txBody>
+          <a:bodyPr/>
+          <a:lstStyle/>
+          <a:p>
+            <a:fld id="{B61BEF0D-F0BB-DE4B-95CE-6DB70DBA9567}" type="datetimeFigureOut">
+              <a:rPr lang="en-US" dirty="0"/>
+              <a:pPr/>
+              <a:t>10/3/2026</a:t>
+            </a:fld>
+            <a:endParaRPr lang="en-US" dirty="0"/>
+          </a:p>
+        </p:txBody>
+      </p:sp>
+      <p:sp>
+        <p:nvSpPr>
+          <p:cNvPr id="5" name="Footer Placeholder 4"/>
+          <p:cNvSpPr>
+            <a:spLocks noGrp="1"/>
+          </p:cNvSpPr>
+          <p:nvPr>
+            <p:ph type="ftr" sz="quarter" idx="11"/>
+          </p:nvPr>
+        </p:nvSpPr>
+        <p:spPr>
+          <a:xfrm>
+            <a:off x="2692397" y="5037663"/>
+            <a:ext cx="5214635" cy="279400"/>
+          </a:xfrm>
+        </p:spPr>
+        <p:txBody>
+          <a:bodyPr/>
+          <a:lstStyle/>
+          <a:p>
+            <a:endParaRPr lang="en-US" dirty="0"/>
+          </a:p>
+        </p:txBody>
+      </p:sp>
+      <p:sp>
+        <p:nvSpPr>
+          <p:cNvPr id="6" name="Slide Number Placeholder 5"/>
+          <p:cNvSpPr>
+            <a:spLocks noGrp="1"/>
+          </p:cNvSpPr>
+          <p:nvPr>
+            <p:ph type="sldNum" sz="quarter" idx="12"/>
+          </p:nvPr>
+        </p:nvSpPr>
+        <p:spPr>
+          <a:xfrm>
+            <a:off x="8956900" y="5037663"/>
+            <a:ext cx="551167" cy="279400"/>
+          </a:xfrm>
+        </p:spPr>
+        <p:txBody>
+          <a:bodyPr/>
+          <a:lstStyle/>
+          <a:p>
+            <a:fld id="{D57F1E4F-1CFF-5643-939E-217C01CDF565}" type="slidenum">
+              <a:rPr lang="en-US" dirty="0"/>
+              <a:pPr/>
+              <a:t>‹#›</a:t>
+            </a:fld>
+            <a:endParaRPr lang="en-US" dirty="0"/>
+          </a:p>
+        </p:txBody>
+      </p:sp>
+      <p:cxnSp>
+        <p:nvCxnSpPr>
+          <p:cNvPr id="15" name="Straight Connector 14"/>
+          <p:cNvCxnSpPr/>
+          <p:nvPr/>
+        </p:nvCxnSpPr>
+        <p:spPr>
+          <a:xfrm>
+            <a:off x="2692399" y="3522131"/>
+            <a:ext cx="6815668" cy="0"/>
+          </a:xfrm>
+          <a:prstGeom prst="line">
+            <a:avLst/>
+          </a:prstGeom>
+        </p:spPr>
+        <p:style>
+          <a:lnRef idx="2">
+            <a:schemeClr val="accent1"/>
+          </a:lnRef>
+          <a:fillRef idx="0">
+            <a:schemeClr val="accent1"/>
+          </a:fillRef>
+          <a:effectRef idx="1">
+            <a:schemeClr val="accent1"/>
+          </a:effectRef>
+          <a:fontRef idx="minor">
+            <a:schemeClr val="tx1"/>
+          </a:fontRef>
+        </p:style>
+      </p:cxnSp>
     </p:spTree>
+    <p:extLst>
+      <p:ext uri="{BB962C8B-B14F-4D97-AF65-F5344CB8AC3E}">
+        <p14:creationId xmlns:p14="http://schemas.microsoft.com/office/powerpoint/2010/main" val="1817282326"/>
+      </p:ext>
+    </p:extLst>
   </p:cSld>
   <p:clrMapOvr>
     <a:masterClrMapping/>
   </p:clrMapOvr>
+  <p:hf sldNum="0" hdr="0" ftr="0" dt="0"/>
 </p:sldLayout>
 </file>
 
-<file path=ppt/slideLayouts/slideLayout2.xml><?xml version="1.0" encoding="utf-8"?>
+<file path=ppt/slideLayouts/slideLayout10.xml><?xml version="1.0" encoding="utf-8"?>
 <p:sldLayout xmlns:a="http://schemas.openxmlformats.org/drawingml/2006/main" xmlns:r="http://schemas.openxmlformats.org/officeDocument/2006/relationships" xmlns:p="http://schemas.openxmlformats.org/presentationml/2006/main" preserve="1">
+  <p:cSld name="Panoramic Picture with Caption">
+    <p:spTree>
+      <p:nvGrpSpPr>
+        <p:cNvPr id="1" name=""/>
+        <p:cNvGrpSpPr/>
+        <p:nvPr/>
+      </p:nvGrpSpPr>
+      <p:grpSpPr>
+        <a:xfrm>
+          <a:off x="0" y="0"/>
+          <a:ext cx="0" cy="0"/>
+          <a:chOff x="0" y="0"/>
+          <a:chExt cx="0" cy="0"/>
+        </a:xfrm>
+      </p:grpSpPr>
+      <p:sp>
+        <p:nvSpPr>
+          <p:cNvPr id="2" name="Title 1"/>
+          <p:cNvSpPr>
+            <a:spLocks noGrp="1"/>
+          </p:cNvSpPr>
+          <p:nvPr>
+            <p:ph type="title"/>
+          </p:nvPr>
+        </p:nvSpPr>
+        <p:spPr>
+          <a:xfrm>
+            <a:off x="1295401" y="4815415"/>
+            <a:ext cx="9609666" cy="566738"/>
+          </a:xfrm>
+        </p:spPr>
+        <p:txBody>
+          <a:bodyPr anchor="b">
+            <a:normAutofit/>
+          </a:bodyPr>
+          <a:lstStyle>
+            <a:lvl1pPr algn="ctr">
+              <a:defRPr sz="2400" b="0"/>
+            </a:lvl1pPr>
+          </a:lstStyle>
+          <a:p>
+            <a:r>
+              <a:rPr lang="en-US" smtClean="0"/>
+              <a:t>Click to edit Master title style</a:t>
+            </a:r>
+            <a:endParaRPr lang="en-US" dirty="0"/>
+          </a:p>
+        </p:txBody>
+      </p:sp>
+      <p:sp>
+        <p:nvSpPr>
+          <p:cNvPr id="3" name="Picture Placeholder 2"/>
+          <p:cNvSpPr>
+            <a:spLocks noGrp="1" noChangeAspect="1"/>
+          </p:cNvSpPr>
+          <p:nvPr>
+            <p:ph type="pic" idx="1"/>
+          </p:nvPr>
+        </p:nvSpPr>
+        <p:spPr>
+          <a:xfrm>
+            <a:off x="1041427" y="1041399"/>
+            <a:ext cx="10105972" cy="3335869"/>
+          </a:xfrm>
+          <a:prstGeom prst="roundRect">
+            <a:avLst>
+              <a:gd name="adj" fmla="val 0"/>
+            </a:avLst>
+          </a:prstGeom>
+          <a:ln w="57150" cmpd="thickThin">
+            <a:solidFill>
+              <a:schemeClr val="tx1">
+                <a:lumMod val="50000"/>
+                <a:lumOff val="50000"/>
+              </a:schemeClr>
+            </a:solidFill>
+            <a:miter lim="800000"/>
+          </a:ln>
+          <a:effectLst>
+            <a:innerShdw blurRad="57150" dist="38100" dir="14460000">
+              <a:srgbClr val="000000">
+                <a:alpha val="70000"/>
+              </a:srgbClr>
+            </a:innerShdw>
+          </a:effectLst>
+        </p:spPr>
+        <p:txBody>
+          <a:bodyPr anchor="t">
+            <a:normAutofit/>
+          </a:bodyPr>
+          <a:lstStyle>
+            <a:lvl1pPr marL="0" indent="0" algn="ctr">
+              <a:buNone/>
+              <a:defRPr sz="1600"/>
+            </a:lvl1pPr>
+            <a:lvl2pPr marL="457200" indent="0">
+              <a:buNone/>
+              <a:defRPr sz="1600"/>
+            </a:lvl2pPr>
+            <a:lvl3pPr marL="914400" indent="0">
+              <a:buNone/>
+              <a:defRPr sz="1600"/>
+            </a:lvl3pPr>
+            <a:lvl4pPr marL="1371600" indent="0">
+              <a:buNone/>
+              <a:defRPr sz="1600"/>
+            </a:lvl4pPr>
+            <a:lvl5pPr marL="1828800" indent="0">
+              <a:buNone/>
+              <a:defRPr sz="1600"/>
+            </a:lvl5pPr>
+            <a:lvl6pPr marL="2286000" indent="0">
+              <a:buNone/>
+              <a:defRPr sz="1600"/>
+            </a:lvl6pPr>
+            <a:lvl7pPr marL="2743200" indent="0">
+              <a:buNone/>
+              <a:defRPr sz="1600"/>
+            </a:lvl7pPr>
+            <a:lvl8pPr marL="3200400" indent="0">
+              <a:buNone/>
+              <a:defRPr sz="1600"/>
+            </a:lvl8pPr>
+            <a:lvl9pPr marL="3657600" indent="0">
+              <a:buNone/>
+              <a:defRPr sz="1600"/>
+            </a:lvl9pPr>
+          </a:lstStyle>
+          <a:p>
+            <a:r>
+              <a:rPr lang="en-US" smtClean="0"/>
+              <a:t>Click icon to add picture</a:t>
+            </a:r>
+            <a:endParaRPr lang="en-US" dirty="0"/>
+          </a:p>
+        </p:txBody>
+      </p:sp>
+      <p:sp>
+        <p:nvSpPr>
+          <p:cNvPr id="4" name="Text Placeholder 3"/>
+          <p:cNvSpPr>
+            <a:spLocks noGrp="1"/>
+          </p:cNvSpPr>
+          <p:nvPr>
+            <p:ph type="body" sz="half" idx="2"/>
+          </p:nvPr>
+        </p:nvSpPr>
+        <p:spPr>
+          <a:xfrm>
+            <a:off x="1295401" y="5382153"/>
+            <a:ext cx="9609666" cy="493712"/>
+          </a:xfrm>
+        </p:spPr>
+        <p:txBody>
+          <a:bodyPr>
+            <a:normAutofit/>
+          </a:bodyPr>
+          <a:lstStyle>
+            <a:lvl1pPr marL="0" indent="0" algn="ctr">
+              <a:buNone/>
+              <a:defRPr sz="1400"/>
+            </a:lvl1pPr>
+            <a:lvl2pPr marL="457200" indent="0">
+              <a:buNone/>
+              <a:defRPr sz="1200"/>
+            </a:lvl2pPr>
+            <a:lvl3pPr marL="914400" indent="0">
+              <a:buNone/>
+              <a:defRPr sz="1000"/>
+            </a:lvl3pPr>
+            <a:lvl4pPr marL="1371600" indent="0">
+              <a:buNone/>
+              <a:defRPr sz="900"/>
+            </a:lvl4pPr>
+            <a:lvl5pPr marL="1828800" indent="0">
+              <a:buNone/>
+              <a:defRPr sz="900"/>
+            </a:lvl5pPr>
+            <a:lvl6pPr marL="2286000" indent="0">
+              <a:buNone/>
+              <a:defRPr sz="900"/>
+            </a:lvl6pPr>
+            <a:lvl7pPr marL="2743200" indent="0">
+              <a:buNone/>
+              <a:defRPr sz="900"/>
+            </a:lvl7pPr>
+            <a:lvl8pPr marL="3200400" indent="0">
+              <a:buNone/>
+              <a:defRPr sz="900"/>
+            </a:lvl8pPr>
+            <a:lvl9pPr marL="3657600" indent="0">
+              <a:buNone/>
+              <a:defRPr sz="900"/>
+            </a:lvl9pPr>
+          </a:lstStyle>
+          <a:p>
+            <a:pPr lvl="0"/>
+            <a:r>
+              <a:rPr lang="en-US" smtClean="0"/>
+              <a:t>Click to edit Master text styles</a:t>
+            </a:r>
+          </a:p>
+        </p:txBody>
+      </p:sp>
+      <p:sp>
+        <p:nvSpPr>
+          <p:cNvPr id="5" name="Date Placeholder 4"/>
+          <p:cNvSpPr>
+            <a:spLocks noGrp="1"/>
+          </p:cNvSpPr>
+          <p:nvPr>
+            <p:ph type="dt" sz="half" idx="10"/>
+          </p:nvPr>
+        </p:nvSpPr>
+        <p:spPr/>
+        <p:txBody>
+          <a:bodyPr/>
+          <a:lstStyle/>
+          <a:p>
+            <a:fld id="{B61BEF0D-F0BB-DE4B-95CE-6DB70DBA9567}" type="datetimeFigureOut">
+              <a:rPr lang="en-US" dirty="0"/>
+              <a:pPr/>
+              <a:t>10/3/2026</a:t>
+            </a:fld>
+            <a:endParaRPr lang="en-US" dirty="0"/>
+          </a:p>
+        </p:txBody>
+      </p:sp>
+      <p:sp>
+        <p:nvSpPr>
+          <p:cNvPr id="6" name="Footer Placeholder 5"/>
+          <p:cNvSpPr>
+            <a:spLocks noGrp="1"/>
+          </p:cNvSpPr>
+          <p:nvPr>
+            <p:ph type="ftr" sz="quarter" idx="11"/>
+          </p:nvPr>
+        </p:nvSpPr>
+        <p:spPr/>
+        <p:txBody>
+          <a:bodyPr/>
+          <a:lstStyle/>
+          <a:p>
+            <a:endParaRPr lang="en-US" dirty="0"/>
+          </a:p>
+        </p:txBody>
+      </p:sp>
+      <p:sp>
+        <p:nvSpPr>
+          <p:cNvPr id="7" name="Slide Number Placeholder 6"/>
+          <p:cNvSpPr>
+            <a:spLocks noGrp="1"/>
+          </p:cNvSpPr>
+          <p:nvPr>
+            <p:ph type="sldNum" sz="quarter" idx="12"/>
+          </p:nvPr>
+        </p:nvSpPr>
+        <p:spPr/>
+        <p:txBody>
+          <a:bodyPr/>
+          <a:lstStyle/>
+          <a:p>
+            <a:fld id="{D57F1E4F-1CFF-5643-939E-217C01CDF565}" type="slidenum">
+              <a:rPr lang="en-US" dirty="0"/>
+              <a:pPr/>
+              <a:t>‹#›</a:t>
+            </a:fld>
+            <a:endParaRPr lang="en-US" dirty="0"/>
+          </a:p>
+        </p:txBody>
+      </p:sp>
+    </p:spTree>
+    <p:extLst>
+      <p:ext uri="{BB962C8B-B14F-4D97-AF65-F5344CB8AC3E}">
+        <p14:creationId xmlns:p14="http://schemas.microsoft.com/office/powerpoint/2010/main" val="3873393728"/>
+      </p:ext>
+    </p:extLst>
+  </p:cSld>
+  <p:clrMapOvr>
+    <a:masterClrMapping/>
+  </p:clrMapOvr>
+  <p:hf sldNum="0" hdr="0" ftr="0" dt="0"/>
+</p:sldLayout>
+</file>
+
+<file path=ppt/slideLayouts/slideLayout11.xml><?xml version="1.0" encoding="utf-8"?>
+<p:sldLayout xmlns:a="http://schemas.openxmlformats.org/drawingml/2006/main" xmlns:r="http://schemas.openxmlformats.org/officeDocument/2006/relationships" xmlns:p="http://schemas.openxmlformats.org/presentationml/2006/main" preserve="1">
+  <p:cSld name="Title and Caption">
+    <p:spTree>
+      <p:nvGrpSpPr>
+        <p:cNvPr id="1" name=""/>
+        <p:cNvGrpSpPr/>
+        <p:nvPr/>
+      </p:nvGrpSpPr>
+      <p:grpSpPr>
+        <a:xfrm>
+          <a:off x="0" y="0"/>
+          <a:ext cx="0" cy="0"/>
+          <a:chOff x="0" y="0"/>
+          <a:chExt cx="0" cy="0"/>
+        </a:xfrm>
+      </p:grpSpPr>
+      <p:sp>
+        <p:nvSpPr>
+          <p:cNvPr id="2" name="Title 1"/>
+          <p:cNvSpPr>
+            <a:spLocks noGrp="1"/>
+          </p:cNvSpPr>
+          <p:nvPr>
+            <p:ph type="title"/>
+          </p:nvPr>
+        </p:nvSpPr>
+        <p:spPr>
+          <a:xfrm>
+            <a:off x="1303868" y="982132"/>
+            <a:ext cx="9592732" cy="2954868"/>
+          </a:xfrm>
+        </p:spPr>
+        <p:txBody>
+          <a:bodyPr anchor="ctr">
+            <a:normAutofit/>
+          </a:bodyPr>
+          <a:lstStyle>
+            <a:lvl1pPr algn="ctr">
+              <a:defRPr sz="3200" b="0" cap="none"/>
+            </a:lvl1pPr>
+          </a:lstStyle>
+          <a:p>
+            <a:r>
+              <a:rPr lang="en-US" smtClean="0"/>
+              <a:t>Click to edit Master title style</a:t>
+            </a:r>
+            <a:endParaRPr lang="en-US" dirty="0"/>
+          </a:p>
+        </p:txBody>
+      </p:sp>
+      <p:sp>
+        <p:nvSpPr>
+          <p:cNvPr id="3" name="Text Placeholder 2"/>
+          <p:cNvSpPr>
+            <a:spLocks noGrp="1"/>
+          </p:cNvSpPr>
+          <p:nvPr>
+            <p:ph type="body" idx="1"/>
+          </p:nvPr>
+        </p:nvSpPr>
+        <p:spPr>
+          <a:xfrm>
+            <a:off x="1303868" y="4343399"/>
+            <a:ext cx="9592732" cy="1532467"/>
+          </a:xfrm>
+        </p:spPr>
+        <p:txBody>
+          <a:bodyPr anchor="ctr">
+            <a:normAutofit/>
+          </a:bodyPr>
+          <a:lstStyle>
+            <a:lvl1pPr marL="0" indent="0" algn="ctr">
+              <a:buNone/>
+              <a:defRPr sz="2000">
+                <a:solidFill>
+                  <a:schemeClr val="tx1"/>
+                </a:solidFill>
+              </a:defRPr>
+            </a:lvl1pPr>
+            <a:lvl2pPr marL="457200" indent="0">
+              <a:buNone/>
+              <a:defRPr sz="1800">
+                <a:solidFill>
+                  <a:schemeClr val="tx1">
+                    <a:tint val="75000"/>
+                  </a:schemeClr>
+                </a:solidFill>
+              </a:defRPr>
+            </a:lvl2pPr>
+            <a:lvl3pPr marL="914400" indent="0">
+              <a:buNone/>
+              <a:defRPr sz="1600">
+                <a:solidFill>
+                  <a:schemeClr val="tx1">
+                    <a:tint val="75000"/>
+                  </a:schemeClr>
+                </a:solidFill>
+              </a:defRPr>
+            </a:lvl3pPr>
+            <a:lvl4pPr marL="1371600" indent="0">
+              <a:buNone/>
+              <a:defRPr sz="1400">
+                <a:solidFill>
+                  <a:schemeClr val="tx1">
+                    <a:tint val="75000"/>
+                  </a:schemeClr>
+                </a:solidFill>
+              </a:defRPr>
+            </a:lvl4pPr>
+            <a:lvl5pPr marL="1828800" indent="0">
+              <a:buNone/>
+              <a:defRPr sz="1400">
+                <a:solidFill>
+                  <a:schemeClr val="tx1">
+                    <a:tint val="75000"/>
+                  </a:schemeClr>
+                </a:solidFill>
+              </a:defRPr>
+            </a:lvl5pPr>
+            <a:lvl6pPr marL="2286000" indent="0">
+              <a:buNone/>
+              <a:defRPr sz="1400">
+                <a:solidFill>
+                  <a:schemeClr val="tx1">
+                    <a:tint val="75000"/>
+                  </a:schemeClr>
+                </a:solidFill>
+              </a:defRPr>
+            </a:lvl6pPr>
+            <a:lvl7pPr marL="2743200" indent="0">
+              <a:buNone/>
+              <a:defRPr sz="1400">
+                <a:solidFill>
+                  <a:schemeClr val="tx1">
+                    <a:tint val="75000"/>
+                  </a:schemeClr>
+                </a:solidFill>
+              </a:defRPr>
+            </a:lvl7pPr>
+            <a:lvl8pPr marL="3200400" indent="0">
+              <a:buNone/>
+              <a:defRPr sz="1400">
+                <a:solidFill>
+                  <a:schemeClr val="tx1">
+                    <a:tint val="75000"/>
+                  </a:schemeClr>
+                </a:solidFill>
+              </a:defRPr>
+            </a:lvl8pPr>
+            <a:lvl9pPr marL="3657600" indent="0">
+              <a:buNone/>
+              <a:defRPr sz="1400">
+                <a:solidFill>
+                  <a:schemeClr val="tx1">
+                    <a:tint val="75000"/>
+                  </a:schemeClr>
+                </a:solidFill>
+              </a:defRPr>
+            </a:lvl9pPr>
+          </a:lstStyle>
+          <a:p>
+            <a:pPr lvl="0"/>
+            <a:r>
+              <a:rPr lang="en-US" smtClean="0"/>
+              <a:t>Click to edit Master text styles</a:t>
+            </a:r>
+          </a:p>
+        </p:txBody>
+      </p:sp>
+      <p:sp>
+        <p:nvSpPr>
+          <p:cNvPr id="4" name="Date Placeholder 3"/>
+          <p:cNvSpPr>
+            <a:spLocks noGrp="1"/>
+          </p:cNvSpPr>
+          <p:nvPr>
+            <p:ph type="dt" sz="half" idx="10"/>
+          </p:nvPr>
+        </p:nvSpPr>
+        <p:spPr/>
+        <p:txBody>
+          <a:bodyPr/>
+          <a:lstStyle/>
+          <a:p>
+            <a:fld id="{B61BEF0D-F0BB-DE4B-95CE-6DB70DBA9567}" type="datetimeFigureOut">
+              <a:rPr lang="en-US" dirty="0"/>
+              <a:pPr/>
+              <a:t>10/3/2026</a:t>
+            </a:fld>
+            <a:endParaRPr lang="en-US" dirty="0"/>
+          </a:p>
+        </p:txBody>
+      </p:sp>
+      <p:sp>
+        <p:nvSpPr>
+          <p:cNvPr id="5" name="Footer Placeholder 4"/>
+          <p:cNvSpPr>
+            <a:spLocks noGrp="1"/>
+          </p:cNvSpPr>
+          <p:nvPr>
+            <p:ph type="ftr" sz="quarter" idx="11"/>
+          </p:nvPr>
+        </p:nvSpPr>
+        <p:spPr/>
+        <p:txBody>
+          <a:bodyPr/>
+          <a:lstStyle/>
+          <a:p>
+            <a:endParaRPr lang="en-US" dirty="0"/>
+          </a:p>
+        </p:txBody>
+      </p:sp>
+      <p:sp>
+        <p:nvSpPr>
+          <p:cNvPr id="6" name="Slide Number Placeholder 5"/>
+          <p:cNvSpPr>
+            <a:spLocks noGrp="1"/>
+          </p:cNvSpPr>
+          <p:nvPr>
+            <p:ph type="sldNum" sz="quarter" idx="12"/>
+          </p:nvPr>
+        </p:nvSpPr>
+        <p:spPr/>
+        <p:txBody>
+          <a:bodyPr/>
+          <a:lstStyle/>
+          <a:p>
+            <a:fld id="{D57F1E4F-1CFF-5643-939E-217C01CDF565}" type="slidenum">
+              <a:rPr lang="en-US" dirty="0"/>
+              <a:pPr/>
+              <a:t>‹#›</a:t>
+            </a:fld>
+            <a:endParaRPr lang="en-US" dirty="0"/>
+          </a:p>
+        </p:txBody>
+      </p:sp>
+      <p:cxnSp>
+        <p:nvCxnSpPr>
+          <p:cNvPr id="15" name="Straight Connector 14"/>
+          <p:cNvCxnSpPr/>
+          <p:nvPr/>
+        </p:nvCxnSpPr>
+        <p:spPr>
+          <a:xfrm>
+            <a:off x="1396169" y="4140199"/>
+            <a:ext cx="9407298" cy="0"/>
+          </a:xfrm>
+          <a:prstGeom prst="line">
+            <a:avLst/>
+          </a:prstGeom>
+          <a:ln w="15875"/>
+        </p:spPr>
+        <p:style>
+          <a:lnRef idx="2">
+            <a:schemeClr val="accent1"/>
+          </a:lnRef>
+          <a:fillRef idx="0">
+            <a:schemeClr val="accent1"/>
+          </a:fillRef>
+          <a:effectRef idx="1">
+            <a:schemeClr val="accent1"/>
+          </a:effectRef>
+          <a:fontRef idx="minor">
+            <a:schemeClr val="tx1"/>
+          </a:fontRef>
+        </p:style>
+      </p:cxnSp>
+    </p:spTree>
+    <p:extLst>
+      <p:ext uri="{BB962C8B-B14F-4D97-AF65-F5344CB8AC3E}">
+        <p14:creationId xmlns:p14="http://schemas.microsoft.com/office/powerpoint/2010/main" val="3645157555"/>
+      </p:ext>
+    </p:extLst>
+  </p:cSld>
+  <p:clrMapOvr>
+    <a:masterClrMapping/>
+  </p:clrMapOvr>
+  <p:hf sldNum="0" hdr="0" ftr="0" dt="0"/>
+</p:sldLayout>
+</file>
+
+<file path=ppt/slideLayouts/slideLayout12.xml><?xml version="1.0" encoding="utf-8"?>
+<p:sldLayout xmlns:a="http://schemas.openxmlformats.org/drawingml/2006/main" xmlns:r="http://schemas.openxmlformats.org/officeDocument/2006/relationships" xmlns:p="http://schemas.openxmlformats.org/presentationml/2006/main" preserve="1">
+  <p:cSld name="Quote with Caption">
+    <p:spTree>
+      <p:nvGrpSpPr>
+        <p:cNvPr id="1" name=""/>
+        <p:cNvGrpSpPr/>
+        <p:nvPr/>
+      </p:nvGrpSpPr>
+      <p:grpSpPr>
+        <a:xfrm>
+          <a:off x="0" y="0"/>
+          <a:ext cx="0" cy="0"/>
+          <a:chOff x="0" y="0"/>
+          <a:chExt cx="0" cy="0"/>
+        </a:xfrm>
+      </p:grpSpPr>
+      <p:sp>
+        <p:nvSpPr>
+          <p:cNvPr id="2" name="Title 1"/>
+          <p:cNvSpPr>
+            <a:spLocks noGrp="1"/>
+          </p:cNvSpPr>
+          <p:nvPr>
+            <p:ph type="title"/>
+          </p:nvPr>
+        </p:nvSpPr>
+        <p:spPr>
+          <a:xfrm>
+            <a:off x="1446213" y="982132"/>
+            <a:ext cx="9296398" cy="2370668"/>
+          </a:xfrm>
+        </p:spPr>
+        <p:txBody>
+          <a:bodyPr anchor="ctr">
+            <a:normAutofit/>
+          </a:bodyPr>
+          <a:lstStyle>
+            <a:lvl1pPr algn="ctr">
+              <a:defRPr sz="3200" b="0" cap="none">
+                <a:solidFill>
+                  <a:schemeClr val="tx1"/>
+                </a:solidFill>
+              </a:defRPr>
+            </a:lvl1pPr>
+          </a:lstStyle>
+          <a:p>
+            <a:r>
+              <a:rPr lang="en-US" smtClean="0"/>
+              <a:t>Click to edit Master title style</a:t>
+            </a:r>
+            <a:endParaRPr lang="en-US" dirty="0"/>
+          </a:p>
+        </p:txBody>
+      </p:sp>
+      <p:sp>
+        <p:nvSpPr>
+          <p:cNvPr id="10" name="Text Placeholder 9"/>
+          <p:cNvSpPr>
+            <a:spLocks noGrp="1"/>
+          </p:cNvSpPr>
+          <p:nvPr>
+            <p:ph type="body" sz="quarter" idx="13"/>
+          </p:nvPr>
+        </p:nvSpPr>
+        <p:spPr>
+          <a:xfrm>
+            <a:off x="1674812" y="3352800"/>
+            <a:ext cx="8839202" cy="584200"/>
+          </a:xfrm>
+        </p:spPr>
+        <p:txBody>
+          <a:bodyPr anchor="ctr">
+            <a:normAutofit/>
+          </a:bodyPr>
+          <a:lstStyle>
+            <a:lvl1pPr marL="0" indent="0" algn="r">
+              <a:buFontTx/>
+              <a:buNone/>
+              <a:defRPr sz="2000"/>
+            </a:lvl1pPr>
+            <a:lvl2pPr marL="457200" indent="0">
+              <a:buFontTx/>
+              <a:buNone/>
+              <a:defRPr/>
+            </a:lvl2pPr>
+            <a:lvl3pPr marL="914400" indent="0">
+              <a:buFontTx/>
+              <a:buNone/>
+              <a:defRPr/>
+            </a:lvl3pPr>
+            <a:lvl4pPr marL="1371600" indent="0">
+              <a:buFontTx/>
+              <a:buNone/>
+              <a:defRPr/>
+            </a:lvl4pPr>
+            <a:lvl5pPr marL="1828800" indent="0">
+              <a:buFontTx/>
+              <a:buNone/>
+              <a:defRPr/>
+            </a:lvl5pPr>
+          </a:lstStyle>
+          <a:p>
+            <a:pPr lvl="0"/>
+            <a:r>
+              <a:rPr lang="en-US" smtClean="0"/>
+              <a:t>Click to edit Master text styles</a:t>
+            </a:r>
+          </a:p>
+        </p:txBody>
+      </p:sp>
+      <p:sp>
+        <p:nvSpPr>
+          <p:cNvPr id="3" name="Text Placeholder 2"/>
+          <p:cNvSpPr>
+            <a:spLocks noGrp="1"/>
+          </p:cNvSpPr>
+          <p:nvPr>
+            <p:ph type="body" idx="1"/>
+          </p:nvPr>
+        </p:nvSpPr>
+        <p:spPr>
+          <a:xfrm>
+            <a:off x="1295401" y="4343399"/>
+            <a:ext cx="9609666" cy="1532467"/>
+          </a:xfrm>
+        </p:spPr>
+        <p:txBody>
+          <a:bodyPr anchor="ctr">
+            <a:normAutofit/>
+          </a:bodyPr>
+          <a:lstStyle>
+            <a:lvl1pPr marL="0" indent="0" algn="ctr">
+              <a:buNone/>
+              <a:defRPr sz="2000">
+                <a:solidFill>
+                  <a:schemeClr val="tx1"/>
+                </a:solidFill>
+              </a:defRPr>
+            </a:lvl1pPr>
+            <a:lvl2pPr marL="457200" indent="0">
+              <a:buNone/>
+              <a:defRPr sz="1800">
+                <a:solidFill>
+                  <a:schemeClr val="tx1">
+                    <a:tint val="75000"/>
+                  </a:schemeClr>
+                </a:solidFill>
+              </a:defRPr>
+            </a:lvl2pPr>
+            <a:lvl3pPr marL="914400" indent="0">
+              <a:buNone/>
+              <a:defRPr sz="1600">
+                <a:solidFill>
+                  <a:schemeClr val="tx1">
+                    <a:tint val="75000"/>
+                  </a:schemeClr>
+                </a:solidFill>
+              </a:defRPr>
+            </a:lvl3pPr>
+            <a:lvl4pPr marL="1371600" indent="0">
+              <a:buNone/>
+              <a:defRPr sz="1400">
+                <a:solidFill>
+                  <a:schemeClr val="tx1">
+                    <a:tint val="75000"/>
+                  </a:schemeClr>
+                </a:solidFill>
+              </a:defRPr>
+            </a:lvl4pPr>
+            <a:lvl5pPr marL="1828800" indent="0">
+              <a:buNone/>
+              <a:defRPr sz="1400">
+                <a:solidFill>
+                  <a:schemeClr val="tx1">
+                    <a:tint val="75000"/>
+                  </a:schemeClr>
+                </a:solidFill>
+              </a:defRPr>
+            </a:lvl5pPr>
+            <a:lvl6pPr marL="2286000" indent="0">
+              <a:buNone/>
+              <a:defRPr sz="1400">
+                <a:solidFill>
+                  <a:schemeClr val="tx1">
+                    <a:tint val="75000"/>
+                  </a:schemeClr>
+                </a:solidFill>
+              </a:defRPr>
+            </a:lvl6pPr>
+            <a:lvl7pPr marL="2743200" indent="0">
+              <a:buNone/>
+              <a:defRPr sz="1400">
+                <a:solidFill>
+                  <a:schemeClr val="tx1">
+                    <a:tint val="75000"/>
+                  </a:schemeClr>
+                </a:solidFill>
+              </a:defRPr>
+            </a:lvl7pPr>
+            <a:lvl8pPr marL="3200400" indent="0">
+              <a:buNone/>
+              <a:defRPr sz="1400">
+                <a:solidFill>
+                  <a:schemeClr val="tx1">
+                    <a:tint val="75000"/>
+                  </a:schemeClr>
+                </a:solidFill>
+              </a:defRPr>
+            </a:lvl8pPr>
+            <a:lvl9pPr marL="3657600" indent="0">
+              <a:buNone/>
+              <a:defRPr sz="1400">
+                <a:solidFill>
+                  <a:schemeClr val="tx1">
+                    <a:tint val="75000"/>
+                  </a:schemeClr>
+                </a:solidFill>
+              </a:defRPr>
+            </a:lvl9pPr>
+          </a:lstStyle>
+          <a:p>
+            <a:pPr lvl="0"/>
+            <a:r>
+              <a:rPr lang="en-US" smtClean="0"/>
+              <a:t>Click to edit Master text styles</a:t>
+            </a:r>
+          </a:p>
+        </p:txBody>
+      </p:sp>
+      <p:sp>
+        <p:nvSpPr>
+          <p:cNvPr id="4" name="Date Placeholder 3"/>
+          <p:cNvSpPr>
+            <a:spLocks noGrp="1"/>
+          </p:cNvSpPr>
+          <p:nvPr>
+            <p:ph type="dt" sz="half" idx="10"/>
+          </p:nvPr>
+        </p:nvSpPr>
+        <p:spPr/>
+        <p:txBody>
+          <a:bodyPr/>
+          <a:lstStyle/>
+          <a:p>
+            <a:fld id="{B61BEF0D-F0BB-DE4B-95CE-6DB70DBA9567}" type="datetimeFigureOut">
+              <a:rPr lang="en-US" dirty="0"/>
+              <a:pPr/>
+              <a:t>10/3/2026</a:t>
+            </a:fld>
+            <a:endParaRPr lang="en-US" dirty="0"/>
+          </a:p>
+        </p:txBody>
+      </p:sp>
+      <p:sp>
+        <p:nvSpPr>
+          <p:cNvPr id="5" name="Footer Placeholder 4"/>
+          <p:cNvSpPr>
+            <a:spLocks noGrp="1"/>
+          </p:cNvSpPr>
+          <p:nvPr>
+            <p:ph type="ftr" sz="quarter" idx="11"/>
+          </p:nvPr>
+        </p:nvSpPr>
+        <p:spPr/>
+        <p:txBody>
+          <a:bodyPr/>
+          <a:lstStyle/>
+          <a:p>
+            <a:endParaRPr lang="en-US" dirty="0"/>
+          </a:p>
+        </p:txBody>
+      </p:sp>
+      <p:sp>
+        <p:nvSpPr>
+          <p:cNvPr id="6" name="Slide Number Placeholder 5"/>
+          <p:cNvSpPr>
+            <a:spLocks noGrp="1"/>
+          </p:cNvSpPr>
+          <p:nvPr>
+            <p:ph type="sldNum" sz="quarter" idx="12"/>
+          </p:nvPr>
+        </p:nvSpPr>
+        <p:spPr/>
+        <p:txBody>
+          <a:bodyPr/>
+          <a:lstStyle/>
+          <a:p>
+            <a:fld id="{D57F1E4F-1CFF-5643-939E-217C01CDF565}" type="slidenum">
+              <a:rPr lang="en-US" dirty="0"/>
+              <a:pPr/>
+              <a:t>‹#›</a:t>
+            </a:fld>
+            <a:endParaRPr lang="en-US" dirty="0"/>
+          </a:p>
+        </p:txBody>
+      </p:sp>
+      <p:sp>
+        <p:nvSpPr>
+          <p:cNvPr id="14" name="TextBox 13"/>
+          <p:cNvSpPr txBox="1"/>
+          <p:nvPr/>
+        </p:nvSpPr>
+        <p:spPr>
+          <a:xfrm>
+            <a:off x="862013" y="879961"/>
+            <a:ext cx="609600" cy="584776"/>
+          </a:xfrm>
+          <a:prstGeom prst="rect">
+            <a:avLst/>
+          </a:prstGeom>
+        </p:spPr>
+        <p:txBody>
+          <a:bodyPr vert="horz" lIns="91440" tIns="45720" rIns="91440" bIns="45720" rtlCol="0" anchor="ctr">
+            <a:noAutofit/>
+          </a:bodyPr>
+          <a:lstStyle/>
+          <a:p>
+            <a:pPr lvl="0"/>
+            <a:r>
+              <a:rPr lang="en-US" sz="8000" dirty="0">
+                <a:solidFill>
+                  <a:schemeClr val="tx1"/>
+                </a:solidFill>
+                <a:effectLst/>
+              </a:rPr>
+              <a:t>“</a:t>
+            </a:r>
+          </a:p>
+        </p:txBody>
+      </p:sp>
+      <p:sp>
+        <p:nvSpPr>
+          <p:cNvPr id="15" name="TextBox 14"/>
+          <p:cNvSpPr txBox="1"/>
+          <p:nvPr/>
+        </p:nvSpPr>
+        <p:spPr>
+          <a:xfrm>
+            <a:off x="10600267" y="2827870"/>
+            <a:ext cx="609600" cy="584776"/>
+          </a:xfrm>
+          <a:prstGeom prst="rect">
+            <a:avLst/>
+          </a:prstGeom>
+        </p:spPr>
+        <p:txBody>
+          <a:bodyPr vert="horz" lIns="91440" tIns="45720" rIns="91440" bIns="45720" rtlCol="0" anchor="ctr">
+            <a:noAutofit/>
+          </a:bodyPr>
+          <a:lstStyle/>
+          <a:p>
+            <a:pPr lvl="0" algn="r"/>
+            <a:r>
+              <a:rPr lang="en-US" sz="8000" dirty="0">
+                <a:solidFill>
+                  <a:schemeClr val="tx1"/>
+                </a:solidFill>
+                <a:effectLst/>
+              </a:rPr>
+              <a:t>”</a:t>
+            </a:r>
+          </a:p>
+        </p:txBody>
+      </p:sp>
+      <p:cxnSp>
+        <p:nvCxnSpPr>
+          <p:cNvPr id="19" name="Straight Connector 18"/>
+          <p:cNvCxnSpPr/>
+          <p:nvPr/>
+        </p:nvCxnSpPr>
+        <p:spPr>
+          <a:xfrm>
+            <a:off x="1396169" y="4140199"/>
+            <a:ext cx="9407298" cy="0"/>
+          </a:xfrm>
+          <a:prstGeom prst="line">
+            <a:avLst/>
+          </a:prstGeom>
+          <a:ln w="15875"/>
+        </p:spPr>
+        <p:style>
+          <a:lnRef idx="2">
+            <a:schemeClr val="accent1"/>
+          </a:lnRef>
+          <a:fillRef idx="0">
+            <a:schemeClr val="accent1"/>
+          </a:fillRef>
+          <a:effectRef idx="1">
+            <a:schemeClr val="accent1"/>
+          </a:effectRef>
+          <a:fontRef idx="minor">
+            <a:schemeClr val="tx1"/>
+          </a:fontRef>
+        </p:style>
+      </p:cxnSp>
+    </p:spTree>
+    <p:extLst>
+      <p:ext uri="{BB962C8B-B14F-4D97-AF65-F5344CB8AC3E}">
+        <p14:creationId xmlns:p14="http://schemas.microsoft.com/office/powerpoint/2010/main" val="3698208194"/>
+      </p:ext>
+    </p:extLst>
+  </p:cSld>
+  <p:clrMapOvr>
+    <a:masterClrMapping/>
+  </p:clrMapOvr>
+  <p:hf sldNum="0" hdr="0" ftr="0" dt="0"/>
+</p:sldLayout>
+</file>
+
+<file path=ppt/slideLayouts/slideLayout13.xml><?xml version="1.0" encoding="utf-8"?>
+<p:sldLayout xmlns:a="http://schemas.openxmlformats.org/drawingml/2006/main" xmlns:r="http://schemas.openxmlformats.org/officeDocument/2006/relationships" xmlns:p="http://schemas.openxmlformats.org/presentationml/2006/main" preserve="1">
+  <p:cSld name="Name Card">
+    <p:spTree>
+      <p:nvGrpSpPr>
+        <p:cNvPr id="1" name=""/>
+        <p:cNvGrpSpPr/>
+        <p:nvPr/>
+      </p:nvGrpSpPr>
+      <p:grpSpPr>
+        <a:xfrm>
+          <a:off x="0" y="0"/>
+          <a:ext cx="0" cy="0"/>
+          <a:chOff x="0" y="0"/>
+          <a:chExt cx="0" cy="0"/>
+        </a:xfrm>
+      </p:grpSpPr>
+      <p:sp>
+        <p:nvSpPr>
+          <p:cNvPr id="2" name="Title 1"/>
+          <p:cNvSpPr>
+            <a:spLocks noGrp="1"/>
+          </p:cNvSpPr>
+          <p:nvPr>
+            <p:ph type="title"/>
+          </p:nvPr>
+        </p:nvSpPr>
+        <p:spPr>
+          <a:xfrm>
+            <a:off x="1295402" y="3308581"/>
+            <a:ext cx="9609668" cy="1468800"/>
+          </a:xfrm>
+        </p:spPr>
+        <p:txBody>
+          <a:bodyPr anchor="b">
+            <a:normAutofit/>
+          </a:bodyPr>
+          <a:lstStyle>
+            <a:lvl1pPr algn="l">
+              <a:defRPr sz="3200" b="0" cap="none"/>
+            </a:lvl1pPr>
+          </a:lstStyle>
+          <a:p>
+            <a:r>
+              <a:rPr lang="en-US" smtClean="0"/>
+              <a:t>Click to edit Master title style</a:t>
+            </a:r>
+            <a:endParaRPr lang="en-US" dirty="0"/>
+          </a:p>
+        </p:txBody>
+      </p:sp>
+      <p:sp>
+        <p:nvSpPr>
+          <p:cNvPr id="3" name="Text Placeholder 2"/>
+          <p:cNvSpPr>
+            <a:spLocks noGrp="1"/>
+          </p:cNvSpPr>
+          <p:nvPr>
+            <p:ph type="body" idx="1"/>
+          </p:nvPr>
+        </p:nvSpPr>
+        <p:spPr>
+          <a:xfrm>
+            <a:off x="1295401" y="4777381"/>
+            <a:ext cx="9609668" cy="860400"/>
+          </a:xfrm>
+        </p:spPr>
+        <p:txBody>
+          <a:bodyPr anchor="t">
+            <a:normAutofit/>
+          </a:bodyPr>
+          <a:lstStyle>
+            <a:lvl1pPr marL="0" indent="0" algn="l">
+              <a:buNone/>
+              <a:defRPr sz="2000">
+                <a:solidFill>
+                  <a:schemeClr val="tx1"/>
+                </a:solidFill>
+              </a:defRPr>
+            </a:lvl1pPr>
+            <a:lvl2pPr marL="457200" indent="0">
+              <a:buNone/>
+              <a:defRPr sz="1800">
+                <a:solidFill>
+                  <a:schemeClr val="tx1">
+                    <a:tint val="75000"/>
+                  </a:schemeClr>
+                </a:solidFill>
+              </a:defRPr>
+            </a:lvl2pPr>
+            <a:lvl3pPr marL="914400" indent="0">
+              <a:buNone/>
+              <a:defRPr sz="1600">
+                <a:solidFill>
+                  <a:schemeClr val="tx1">
+                    <a:tint val="75000"/>
+                  </a:schemeClr>
+                </a:solidFill>
+              </a:defRPr>
+            </a:lvl3pPr>
+            <a:lvl4pPr marL="1371600" indent="0">
+              <a:buNone/>
+              <a:defRPr sz="1400">
+                <a:solidFill>
+                  <a:schemeClr val="tx1">
+                    <a:tint val="75000"/>
+                  </a:schemeClr>
+                </a:solidFill>
+              </a:defRPr>
+            </a:lvl4pPr>
+            <a:lvl5pPr marL="1828800" indent="0">
+              <a:buNone/>
+              <a:defRPr sz="1400">
+                <a:solidFill>
+                  <a:schemeClr val="tx1">
+                    <a:tint val="75000"/>
+                  </a:schemeClr>
+                </a:solidFill>
+              </a:defRPr>
+            </a:lvl5pPr>
+            <a:lvl6pPr marL="2286000" indent="0">
+              <a:buNone/>
+              <a:defRPr sz="1400">
+                <a:solidFill>
+                  <a:schemeClr val="tx1">
+                    <a:tint val="75000"/>
+                  </a:schemeClr>
+                </a:solidFill>
+              </a:defRPr>
+            </a:lvl6pPr>
+            <a:lvl7pPr marL="2743200" indent="0">
+              <a:buNone/>
+              <a:defRPr sz="1400">
+                <a:solidFill>
+                  <a:schemeClr val="tx1">
+                    <a:tint val="75000"/>
+                  </a:schemeClr>
+                </a:solidFill>
+              </a:defRPr>
+            </a:lvl7pPr>
+            <a:lvl8pPr marL="3200400" indent="0">
+              <a:buNone/>
+              <a:defRPr sz="1400">
+                <a:solidFill>
+                  <a:schemeClr val="tx1">
+                    <a:tint val="75000"/>
+                  </a:schemeClr>
+                </a:solidFill>
+              </a:defRPr>
+            </a:lvl8pPr>
+            <a:lvl9pPr marL="3657600" indent="0">
+              <a:buNone/>
+              <a:defRPr sz="1400">
+                <a:solidFill>
+                  <a:schemeClr val="tx1">
+                    <a:tint val="75000"/>
+                  </a:schemeClr>
+                </a:solidFill>
+              </a:defRPr>
+            </a:lvl9pPr>
+          </a:lstStyle>
+          <a:p>
+            <a:pPr lvl="0"/>
+            <a:r>
+              <a:rPr lang="en-US" smtClean="0"/>
+              <a:t>Click to edit Master text styles</a:t>
+            </a:r>
+          </a:p>
+        </p:txBody>
+      </p:sp>
+      <p:sp>
+        <p:nvSpPr>
+          <p:cNvPr id="4" name="Date Placeholder 3"/>
+          <p:cNvSpPr>
+            <a:spLocks noGrp="1"/>
+          </p:cNvSpPr>
+          <p:nvPr>
+            <p:ph type="dt" sz="half" idx="10"/>
+          </p:nvPr>
+        </p:nvSpPr>
+        <p:spPr/>
+        <p:txBody>
+          <a:bodyPr/>
+          <a:lstStyle/>
+          <a:p>
+            <a:fld id="{B61BEF0D-F0BB-DE4B-95CE-6DB70DBA9567}" type="datetimeFigureOut">
+              <a:rPr lang="en-US" dirty="0"/>
+              <a:pPr/>
+              <a:t>10/3/2026</a:t>
+            </a:fld>
+            <a:endParaRPr lang="en-US" dirty="0"/>
+          </a:p>
+        </p:txBody>
+      </p:sp>
+      <p:sp>
+        <p:nvSpPr>
+          <p:cNvPr id="5" name="Footer Placeholder 4"/>
+          <p:cNvSpPr>
+            <a:spLocks noGrp="1"/>
+          </p:cNvSpPr>
+          <p:nvPr>
+            <p:ph type="ftr" sz="quarter" idx="11"/>
+          </p:nvPr>
+        </p:nvSpPr>
+        <p:spPr/>
+        <p:txBody>
+          <a:bodyPr/>
+          <a:lstStyle/>
+          <a:p>
+            <a:endParaRPr lang="en-US" dirty="0"/>
+          </a:p>
+        </p:txBody>
+      </p:sp>
+      <p:sp>
+        <p:nvSpPr>
+          <p:cNvPr id="6" name="Slide Number Placeholder 5"/>
+          <p:cNvSpPr>
+            <a:spLocks noGrp="1"/>
+          </p:cNvSpPr>
+          <p:nvPr>
+            <p:ph type="sldNum" sz="quarter" idx="12"/>
+          </p:nvPr>
+        </p:nvSpPr>
+        <p:spPr/>
+        <p:txBody>
+          <a:bodyPr/>
+          <a:lstStyle/>
+          <a:p>
+            <a:fld id="{D57F1E4F-1CFF-5643-939E-217C01CDF565}" type="slidenum">
+              <a:rPr lang="en-US" dirty="0"/>
+              <a:pPr/>
+              <a:t>‹#›</a:t>
+            </a:fld>
+            <a:endParaRPr lang="en-US" dirty="0"/>
+          </a:p>
+        </p:txBody>
+      </p:sp>
+    </p:spTree>
+    <p:extLst>
+      <p:ext uri="{BB962C8B-B14F-4D97-AF65-F5344CB8AC3E}">
+        <p14:creationId xmlns:p14="http://schemas.microsoft.com/office/powerpoint/2010/main" val="537686876"/>
+      </p:ext>
+    </p:extLst>
+  </p:cSld>
+  <p:clrMapOvr>
+    <a:masterClrMapping/>
+  </p:clrMapOvr>
+  <p:hf sldNum="0" hdr="0" ftr="0" dt="0"/>
+</p:sldLayout>
+</file>
+
+<file path=ppt/slideLayouts/slideLayout14.xml><?xml version="1.0" encoding="utf-8"?>
+<p:sldLayout xmlns:a="http://schemas.openxmlformats.org/drawingml/2006/main" xmlns:r="http://schemas.openxmlformats.org/officeDocument/2006/relationships" xmlns:p="http://schemas.openxmlformats.org/presentationml/2006/main" preserve="1">
+  <p:cSld name="Quote Name Card">
+    <p:spTree>
+      <p:nvGrpSpPr>
+        <p:cNvPr id="1" name=""/>
+        <p:cNvGrpSpPr/>
+        <p:nvPr/>
+      </p:nvGrpSpPr>
+      <p:grpSpPr>
+        <a:xfrm>
+          <a:off x="0" y="0"/>
+          <a:ext cx="0" cy="0"/>
+          <a:chOff x="0" y="0"/>
+          <a:chExt cx="0" cy="0"/>
+        </a:xfrm>
+      </p:grpSpPr>
+      <p:sp>
+        <p:nvSpPr>
+          <p:cNvPr id="2" name="Title 1"/>
+          <p:cNvSpPr>
+            <a:spLocks noGrp="1"/>
+          </p:cNvSpPr>
+          <p:nvPr>
+            <p:ph type="title"/>
+          </p:nvPr>
+        </p:nvSpPr>
+        <p:spPr>
+          <a:xfrm>
+            <a:off x="1446213" y="982132"/>
+            <a:ext cx="9296398" cy="2243668"/>
+          </a:xfrm>
+        </p:spPr>
+        <p:txBody>
+          <a:bodyPr anchor="ctr">
+            <a:normAutofit/>
+          </a:bodyPr>
+          <a:lstStyle>
+            <a:lvl1pPr algn="ctr">
+              <a:defRPr sz="3200" b="0" cap="none">
+                <a:solidFill>
+                  <a:schemeClr val="tx1"/>
+                </a:solidFill>
+              </a:defRPr>
+            </a:lvl1pPr>
+          </a:lstStyle>
+          <a:p>
+            <a:r>
+              <a:rPr lang="en-US" smtClean="0"/>
+              <a:t>Click to edit Master title style</a:t>
+            </a:r>
+            <a:endParaRPr lang="en-US" dirty="0"/>
+          </a:p>
+        </p:txBody>
+      </p:sp>
+      <p:sp>
+        <p:nvSpPr>
+          <p:cNvPr id="23" name="Text Placeholder 2"/>
+          <p:cNvSpPr>
+            <a:spLocks noGrp="1"/>
+          </p:cNvSpPr>
+          <p:nvPr>
+            <p:ph type="body" idx="13"/>
+          </p:nvPr>
+        </p:nvSpPr>
+        <p:spPr>
+          <a:xfrm>
+            <a:off x="1295401" y="3639312"/>
+            <a:ext cx="9609668" cy="886968"/>
+          </a:xfrm>
+        </p:spPr>
+        <p:txBody>
+          <a:bodyPr anchor="b">
+            <a:normAutofit/>
+          </a:bodyPr>
+          <a:lstStyle>
+            <a:lvl1pPr marL="0" indent="0" algn="l">
+              <a:spcBef>
+                <a:spcPts val="0"/>
+              </a:spcBef>
+              <a:buNone/>
+              <a:defRPr sz="2400">
+                <a:solidFill>
+                  <a:schemeClr val="tx1"/>
+                </a:solidFill>
+              </a:defRPr>
+            </a:lvl1pPr>
+            <a:lvl2pPr marL="457200" indent="0">
+              <a:buNone/>
+              <a:defRPr sz="1800">
+                <a:solidFill>
+                  <a:schemeClr val="tx1">
+                    <a:tint val="75000"/>
+                  </a:schemeClr>
+                </a:solidFill>
+              </a:defRPr>
+            </a:lvl2pPr>
+            <a:lvl3pPr marL="914400" indent="0">
+              <a:buNone/>
+              <a:defRPr sz="1600">
+                <a:solidFill>
+                  <a:schemeClr val="tx1">
+                    <a:tint val="75000"/>
+                  </a:schemeClr>
+                </a:solidFill>
+              </a:defRPr>
+            </a:lvl3pPr>
+            <a:lvl4pPr marL="1371600" indent="0">
+              <a:buNone/>
+              <a:defRPr sz="1400">
+                <a:solidFill>
+                  <a:schemeClr val="tx1">
+                    <a:tint val="75000"/>
+                  </a:schemeClr>
+                </a:solidFill>
+              </a:defRPr>
+            </a:lvl4pPr>
+            <a:lvl5pPr marL="1828800" indent="0">
+              <a:buNone/>
+              <a:defRPr sz="1400">
+                <a:solidFill>
+                  <a:schemeClr val="tx1">
+                    <a:tint val="75000"/>
+                  </a:schemeClr>
+                </a:solidFill>
+              </a:defRPr>
+            </a:lvl5pPr>
+            <a:lvl6pPr marL="2286000" indent="0">
+              <a:buNone/>
+              <a:defRPr sz="1400">
+                <a:solidFill>
+                  <a:schemeClr val="tx1">
+                    <a:tint val="75000"/>
+                  </a:schemeClr>
+                </a:solidFill>
+              </a:defRPr>
+            </a:lvl6pPr>
+            <a:lvl7pPr marL="2743200" indent="0">
+              <a:buNone/>
+              <a:defRPr sz="1400">
+                <a:solidFill>
+                  <a:schemeClr val="tx1">
+                    <a:tint val="75000"/>
+                  </a:schemeClr>
+                </a:solidFill>
+              </a:defRPr>
+            </a:lvl7pPr>
+            <a:lvl8pPr marL="3200400" indent="0">
+              <a:buNone/>
+              <a:defRPr sz="1400">
+                <a:solidFill>
+                  <a:schemeClr val="tx1">
+                    <a:tint val="75000"/>
+                  </a:schemeClr>
+                </a:solidFill>
+              </a:defRPr>
+            </a:lvl8pPr>
+            <a:lvl9pPr marL="3657600" indent="0">
+              <a:buNone/>
+              <a:defRPr sz="1400">
+                <a:solidFill>
+                  <a:schemeClr val="tx1">
+                    <a:tint val="75000"/>
+                  </a:schemeClr>
+                </a:solidFill>
+              </a:defRPr>
+            </a:lvl9pPr>
+          </a:lstStyle>
+          <a:p>
+            <a:pPr lvl="0"/>
+            <a:r>
+              <a:rPr lang="en-US" smtClean="0"/>
+              <a:t>Click to edit Master text styles</a:t>
+            </a:r>
+          </a:p>
+        </p:txBody>
+      </p:sp>
+      <p:sp>
+        <p:nvSpPr>
+          <p:cNvPr id="3" name="Text Placeholder 2"/>
+          <p:cNvSpPr>
+            <a:spLocks noGrp="1"/>
+          </p:cNvSpPr>
+          <p:nvPr>
+            <p:ph type="body" idx="1"/>
+          </p:nvPr>
+        </p:nvSpPr>
+        <p:spPr>
+          <a:xfrm>
+            <a:off x="1295401" y="4529667"/>
+            <a:ext cx="9609668" cy="1346200"/>
+          </a:xfrm>
+        </p:spPr>
+        <p:txBody>
+          <a:bodyPr anchor="t">
+            <a:normAutofit/>
+          </a:bodyPr>
+          <a:lstStyle>
+            <a:lvl1pPr marL="0" indent="0" algn="l">
+              <a:buNone/>
+              <a:defRPr sz="1800">
+                <a:solidFill>
+                  <a:schemeClr val="tx1"/>
+                </a:solidFill>
+              </a:defRPr>
+            </a:lvl1pPr>
+            <a:lvl2pPr marL="457200" indent="0">
+              <a:buNone/>
+              <a:defRPr sz="1800">
+                <a:solidFill>
+                  <a:schemeClr val="tx1">
+                    <a:tint val="75000"/>
+                  </a:schemeClr>
+                </a:solidFill>
+              </a:defRPr>
+            </a:lvl2pPr>
+            <a:lvl3pPr marL="914400" indent="0">
+              <a:buNone/>
+              <a:defRPr sz="1600">
+                <a:solidFill>
+                  <a:schemeClr val="tx1">
+                    <a:tint val="75000"/>
+                  </a:schemeClr>
+                </a:solidFill>
+              </a:defRPr>
+            </a:lvl3pPr>
+            <a:lvl4pPr marL="1371600" indent="0">
+              <a:buNone/>
+              <a:defRPr sz="1400">
+                <a:solidFill>
+                  <a:schemeClr val="tx1">
+                    <a:tint val="75000"/>
+                  </a:schemeClr>
+                </a:solidFill>
+              </a:defRPr>
+            </a:lvl4pPr>
+            <a:lvl5pPr marL="1828800" indent="0">
+              <a:buNone/>
+              <a:defRPr sz="1400">
+                <a:solidFill>
+                  <a:schemeClr val="tx1">
+                    <a:tint val="75000"/>
+                  </a:schemeClr>
+                </a:solidFill>
+              </a:defRPr>
+            </a:lvl5pPr>
+            <a:lvl6pPr marL="2286000" indent="0">
+              <a:buNone/>
+              <a:defRPr sz="1400">
+                <a:solidFill>
+                  <a:schemeClr val="tx1">
+                    <a:tint val="75000"/>
+                  </a:schemeClr>
+                </a:solidFill>
+              </a:defRPr>
+            </a:lvl6pPr>
+            <a:lvl7pPr marL="2743200" indent="0">
+              <a:buNone/>
+              <a:defRPr sz="1400">
+                <a:solidFill>
+                  <a:schemeClr val="tx1">
+                    <a:tint val="75000"/>
+                  </a:schemeClr>
+                </a:solidFill>
+              </a:defRPr>
+            </a:lvl7pPr>
+            <a:lvl8pPr marL="3200400" indent="0">
+              <a:buNone/>
+              <a:defRPr sz="1400">
+                <a:solidFill>
+                  <a:schemeClr val="tx1">
+                    <a:tint val="75000"/>
+                  </a:schemeClr>
+                </a:solidFill>
+              </a:defRPr>
+            </a:lvl8pPr>
+            <a:lvl9pPr marL="3657600" indent="0">
+              <a:buNone/>
+              <a:defRPr sz="1400">
+                <a:solidFill>
+                  <a:schemeClr val="tx1">
+                    <a:tint val="75000"/>
+                  </a:schemeClr>
+                </a:solidFill>
+              </a:defRPr>
+            </a:lvl9pPr>
+          </a:lstStyle>
+          <a:p>
+            <a:pPr lvl="0"/>
+            <a:r>
+              <a:rPr lang="en-US" smtClean="0"/>
+              <a:t>Click to edit Master text styles</a:t>
+            </a:r>
+          </a:p>
+        </p:txBody>
+      </p:sp>
+      <p:sp>
+        <p:nvSpPr>
+          <p:cNvPr id="4" name="Date Placeholder 3"/>
+          <p:cNvSpPr>
+            <a:spLocks noGrp="1"/>
+          </p:cNvSpPr>
+          <p:nvPr>
+            <p:ph type="dt" sz="half" idx="10"/>
+          </p:nvPr>
+        </p:nvSpPr>
+        <p:spPr/>
+        <p:txBody>
+          <a:bodyPr/>
+          <a:lstStyle/>
+          <a:p>
+            <a:fld id="{B61BEF0D-F0BB-DE4B-95CE-6DB70DBA9567}" type="datetimeFigureOut">
+              <a:rPr lang="en-US" dirty="0"/>
+              <a:pPr/>
+              <a:t>10/3/2026</a:t>
+            </a:fld>
+            <a:endParaRPr lang="en-US" dirty="0"/>
+          </a:p>
+        </p:txBody>
+      </p:sp>
+      <p:sp>
+        <p:nvSpPr>
+          <p:cNvPr id="5" name="Footer Placeholder 4"/>
+          <p:cNvSpPr>
+            <a:spLocks noGrp="1"/>
+          </p:cNvSpPr>
+          <p:nvPr>
+            <p:ph type="ftr" sz="quarter" idx="11"/>
+          </p:nvPr>
+        </p:nvSpPr>
+        <p:spPr/>
+        <p:txBody>
+          <a:bodyPr/>
+          <a:lstStyle/>
+          <a:p>
+            <a:endParaRPr lang="en-US" dirty="0"/>
+          </a:p>
+        </p:txBody>
+      </p:sp>
+      <p:sp>
+        <p:nvSpPr>
+          <p:cNvPr id="6" name="Slide Number Placeholder 5"/>
+          <p:cNvSpPr>
+            <a:spLocks noGrp="1"/>
+          </p:cNvSpPr>
+          <p:nvPr>
+            <p:ph type="sldNum" sz="quarter" idx="12"/>
+          </p:nvPr>
+        </p:nvSpPr>
+        <p:spPr/>
+        <p:txBody>
+          <a:bodyPr/>
+          <a:lstStyle/>
+          <a:p>
+            <a:fld id="{D57F1E4F-1CFF-5643-939E-217C01CDF565}" type="slidenum">
+              <a:rPr lang="en-US" dirty="0"/>
+              <a:pPr/>
+              <a:t>‹#›</a:t>
+            </a:fld>
+            <a:endParaRPr lang="en-US" dirty="0"/>
+          </a:p>
+        </p:txBody>
+      </p:sp>
+      <p:sp>
+        <p:nvSpPr>
+          <p:cNvPr id="12" name="TextBox 11"/>
+          <p:cNvSpPr txBox="1"/>
+          <p:nvPr/>
+        </p:nvSpPr>
+        <p:spPr>
+          <a:xfrm>
+            <a:off x="862013" y="879961"/>
+            <a:ext cx="609600" cy="584776"/>
+          </a:xfrm>
+          <a:prstGeom prst="rect">
+            <a:avLst/>
+          </a:prstGeom>
+        </p:spPr>
+        <p:txBody>
+          <a:bodyPr vert="horz" lIns="91440" tIns="45720" rIns="91440" bIns="45720" rtlCol="0" anchor="ctr">
+            <a:noAutofit/>
+          </a:bodyPr>
+          <a:lstStyle/>
+          <a:p>
+            <a:pPr lvl="0"/>
+            <a:r>
+              <a:rPr lang="en-US" sz="8000" dirty="0">
+                <a:solidFill>
+                  <a:schemeClr val="tx1"/>
+                </a:solidFill>
+                <a:effectLst/>
+              </a:rPr>
+              <a:t>“</a:t>
+            </a:r>
+          </a:p>
+        </p:txBody>
+      </p:sp>
+      <p:sp>
+        <p:nvSpPr>
+          <p:cNvPr id="13" name="TextBox 12"/>
+          <p:cNvSpPr txBox="1"/>
+          <p:nvPr/>
+        </p:nvSpPr>
+        <p:spPr>
+          <a:xfrm>
+            <a:off x="10600267" y="2599261"/>
+            <a:ext cx="609600" cy="584776"/>
+          </a:xfrm>
+          <a:prstGeom prst="rect">
+            <a:avLst/>
+          </a:prstGeom>
+        </p:spPr>
+        <p:txBody>
+          <a:bodyPr vert="horz" lIns="91440" tIns="45720" rIns="91440" bIns="45720" rtlCol="0" anchor="ctr">
+            <a:noAutofit/>
+          </a:bodyPr>
+          <a:lstStyle/>
+          <a:p>
+            <a:pPr lvl="0" algn="r"/>
+            <a:r>
+              <a:rPr lang="en-US" sz="8000" dirty="0">
+                <a:solidFill>
+                  <a:schemeClr val="tx1"/>
+                </a:solidFill>
+                <a:effectLst/>
+              </a:rPr>
+              <a:t>”</a:t>
+            </a:r>
+          </a:p>
+        </p:txBody>
+      </p:sp>
+      <p:cxnSp>
+        <p:nvCxnSpPr>
+          <p:cNvPr id="26" name="Straight Connector 25"/>
+          <p:cNvCxnSpPr/>
+          <p:nvPr/>
+        </p:nvCxnSpPr>
+        <p:spPr>
+          <a:xfrm>
+            <a:off x="1396169" y="3429000"/>
+            <a:ext cx="9407298" cy="0"/>
+          </a:xfrm>
+          <a:prstGeom prst="line">
+            <a:avLst/>
+          </a:prstGeom>
+          <a:ln w="15875"/>
+        </p:spPr>
+        <p:style>
+          <a:lnRef idx="2">
+            <a:schemeClr val="accent1"/>
+          </a:lnRef>
+          <a:fillRef idx="0">
+            <a:schemeClr val="accent1"/>
+          </a:fillRef>
+          <a:effectRef idx="1">
+            <a:schemeClr val="accent1"/>
+          </a:effectRef>
+          <a:fontRef idx="minor">
+            <a:schemeClr val="tx1"/>
+          </a:fontRef>
+        </p:style>
+      </p:cxnSp>
+    </p:spTree>
+    <p:extLst>
+      <p:ext uri="{BB962C8B-B14F-4D97-AF65-F5344CB8AC3E}">
+        <p14:creationId xmlns:p14="http://schemas.microsoft.com/office/powerpoint/2010/main" val="1514440802"/>
+      </p:ext>
+    </p:extLst>
+  </p:cSld>
+  <p:clrMapOvr>
+    <a:masterClrMapping/>
+  </p:clrMapOvr>
+  <p:hf sldNum="0" hdr="0" ftr="0" dt="0"/>
+</p:sldLayout>
+</file>
+
+<file path=ppt/slideLayouts/slideLayout15.xml><?xml version="1.0" encoding="utf-8"?>
+<p:sldLayout xmlns:a="http://schemas.openxmlformats.org/drawingml/2006/main" xmlns:r="http://schemas.openxmlformats.org/officeDocument/2006/relationships" xmlns:p="http://schemas.openxmlformats.org/presentationml/2006/main" preserve="1">
+  <p:cSld name="True or False">
+    <p:spTree>
+      <p:nvGrpSpPr>
+        <p:cNvPr id="1" name=""/>
+        <p:cNvGrpSpPr/>
+        <p:nvPr/>
+      </p:nvGrpSpPr>
+      <p:grpSpPr>
+        <a:xfrm>
+          <a:off x="0" y="0"/>
+          <a:ext cx="0" cy="0"/>
+          <a:chOff x="0" y="0"/>
+          <a:chExt cx="0" cy="0"/>
+        </a:xfrm>
+      </p:grpSpPr>
+      <p:sp>
+        <p:nvSpPr>
+          <p:cNvPr id="2" name="Title 1"/>
+          <p:cNvSpPr>
+            <a:spLocks noGrp="1"/>
+          </p:cNvSpPr>
+          <p:nvPr>
+            <p:ph type="title"/>
+          </p:nvPr>
+        </p:nvSpPr>
+        <p:spPr>
+          <a:xfrm>
+            <a:off x="1295401" y="982132"/>
+            <a:ext cx="9609666" cy="2243668"/>
+          </a:xfrm>
+        </p:spPr>
+        <p:txBody>
+          <a:bodyPr vert="horz" lIns="91440" tIns="45720" rIns="91440" bIns="45720" rtlCol="0" anchor="ctr">
+            <a:normAutofit/>
+          </a:bodyPr>
+          <a:lstStyle>
+            <a:lvl1pPr>
+              <a:defRPr lang="en-US" b="0" dirty="0"/>
+            </a:lvl1pPr>
+          </a:lstStyle>
+          <a:p>
+            <a:pPr marL="0" lvl="0"/>
+            <a:r>
+              <a:rPr lang="en-US" smtClean="0"/>
+              <a:t>Click to edit Master title style</a:t>
+            </a:r>
+            <a:endParaRPr lang="en-US" dirty="0"/>
+          </a:p>
+        </p:txBody>
+      </p:sp>
+      <p:sp>
+        <p:nvSpPr>
+          <p:cNvPr id="20" name="Text Placeholder 2"/>
+          <p:cNvSpPr>
+            <a:spLocks noGrp="1"/>
+          </p:cNvSpPr>
+          <p:nvPr>
+            <p:ph type="body" idx="13"/>
+          </p:nvPr>
+        </p:nvSpPr>
+        <p:spPr>
+          <a:xfrm>
+            <a:off x="1295401" y="3630168"/>
+            <a:ext cx="9609668" cy="841248"/>
+          </a:xfrm>
+        </p:spPr>
+        <p:txBody>
+          <a:bodyPr anchor="b">
+            <a:normAutofit/>
+          </a:bodyPr>
+          <a:lstStyle>
+            <a:lvl1pPr marL="0" indent="0" algn="l">
+              <a:spcBef>
+                <a:spcPts val="0"/>
+              </a:spcBef>
+              <a:buNone/>
+              <a:defRPr sz="2800">
+                <a:solidFill>
+                  <a:schemeClr val="tx1"/>
+                </a:solidFill>
+              </a:defRPr>
+            </a:lvl1pPr>
+            <a:lvl2pPr marL="457200" indent="0">
+              <a:buNone/>
+              <a:defRPr sz="1800">
+                <a:solidFill>
+                  <a:schemeClr val="tx1">
+                    <a:tint val="75000"/>
+                  </a:schemeClr>
+                </a:solidFill>
+              </a:defRPr>
+            </a:lvl2pPr>
+            <a:lvl3pPr marL="914400" indent="0">
+              <a:buNone/>
+              <a:defRPr sz="1600">
+                <a:solidFill>
+                  <a:schemeClr val="tx1">
+                    <a:tint val="75000"/>
+                  </a:schemeClr>
+                </a:solidFill>
+              </a:defRPr>
+            </a:lvl3pPr>
+            <a:lvl4pPr marL="1371600" indent="0">
+              <a:buNone/>
+              <a:defRPr sz="1400">
+                <a:solidFill>
+                  <a:schemeClr val="tx1">
+                    <a:tint val="75000"/>
+                  </a:schemeClr>
+                </a:solidFill>
+              </a:defRPr>
+            </a:lvl4pPr>
+            <a:lvl5pPr marL="1828800" indent="0">
+              <a:buNone/>
+              <a:defRPr sz="1400">
+                <a:solidFill>
+                  <a:schemeClr val="tx1">
+                    <a:tint val="75000"/>
+                  </a:schemeClr>
+                </a:solidFill>
+              </a:defRPr>
+            </a:lvl5pPr>
+            <a:lvl6pPr marL="2286000" indent="0">
+              <a:buNone/>
+              <a:defRPr sz="1400">
+                <a:solidFill>
+                  <a:schemeClr val="tx1">
+                    <a:tint val="75000"/>
+                  </a:schemeClr>
+                </a:solidFill>
+              </a:defRPr>
+            </a:lvl6pPr>
+            <a:lvl7pPr marL="2743200" indent="0">
+              <a:buNone/>
+              <a:defRPr sz="1400">
+                <a:solidFill>
+                  <a:schemeClr val="tx1">
+                    <a:tint val="75000"/>
+                  </a:schemeClr>
+                </a:solidFill>
+              </a:defRPr>
+            </a:lvl7pPr>
+            <a:lvl8pPr marL="3200400" indent="0">
+              <a:buNone/>
+              <a:defRPr sz="1400">
+                <a:solidFill>
+                  <a:schemeClr val="tx1">
+                    <a:tint val="75000"/>
+                  </a:schemeClr>
+                </a:solidFill>
+              </a:defRPr>
+            </a:lvl8pPr>
+            <a:lvl9pPr marL="3657600" indent="0">
+              <a:buNone/>
+              <a:defRPr sz="1400">
+                <a:solidFill>
+                  <a:schemeClr val="tx1">
+                    <a:tint val="75000"/>
+                  </a:schemeClr>
+                </a:solidFill>
+              </a:defRPr>
+            </a:lvl9pPr>
+          </a:lstStyle>
+          <a:p>
+            <a:pPr lvl="0"/>
+            <a:r>
+              <a:rPr lang="en-US" smtClean="0"/>
+              <a:t>Click to edit Master text styles</a:t>
+            </a:r>
+          </a:p>
+        </p:txBody>
+      </p:sp>
+      <p:sp>
+        <p:nvSpPr>
+          <p:cNvPr id="3" name="Text Placeholder 2"/>
+          <p:cNvSpPr>
+            <a:spLocks noGrp="1"/>
+          </p:cNvSpPr>
+          <p:nvPr>
+            <p:ph type="body" idx="1"/>
+          </p:nvPr>
+        </p:nvSpPr>
+        <p:spPr>
+          <a:xfrm>
+            <a:off x="1295400" y="4470399"/>
+            <a:ext cx="9609670" cy="1405467"/>
+          </a:xfrm>
+        </p:spPr>
+        <p:txBody>
+          <a:bodyPr anchor="t">
+            <a:normAutofit/>
+          </a:bodyPr>
+          <a:lstStyle>
+            <a:lvl1pPr marL="0" indent="0" algn="l">
+              <a:buNone/>
+              <a:defRPr sz="1800">
+                <a:solidFill>
+                  <a:schemeClr val="tx1"/>
+                </a:solidFill>
+              </a:defRPr>
+            </a:lvl1pPr>
+            <a:lvl2pPr marL="457200" indent="0">
+              <a:buNone/>
+              <a:defRPr sz="1800">
+                <a:solidFill>
+                  <a:schemeClr val="tx1">
+                    <a:tint val="75000"/>
+                  </a:schemeClr>
+                </a:solidFill>
+              </a:defRPr>
+            </a:lvl2pPr>
+            <a:lvl3pPr marL="914400" indent="0">
+              <a:buNone/>
+              <a:defRPr sz="1600">
+                <a:solidFill>
+                  <a:schemeClr val="tx1">
+                    <a:tint val="75000"/>
+                  </a:schemeClr>
+                </a:solidFill>
+              </a:defRPr>
+            </a:lvl3pPr>
+            <a:lvl4pPr marL="1371600" indent="0">
+              <a:buNone/>
+              <a:defRPr sz="1400">
+                <a:solidFill>
+                  <a:schemeClr val="tx1">
+                    <a:tint val="75000"/>
+                  </a:schemeClr>
+                </a:solidFill>
+              </a:defRPr>
+            </a:lvl4pPr>
+            <a:lvl5pPr marL="1828800" indent="0">
+              <a:buNone/>
+              <a:defRPr sz="1400">
+                <a:solidFill>
+                  <a:schemeClr val="tx1">
+                    <a:tint val="75000"/>
+                  </a:schemeClr>
+                </a:solidFill>
+              </a:defRPr>
+            </a:lvl5pPr>
+            <a:lvl6pPr marL="2286000" indent="0">
+              <a:buNone/>
+              <a:defRPr sz="1400">
+                <a:solidFill>
+                  <a:schemeClr val="tx1">
+                    <a:tint val="75000"/>
+                  </a:schemeClr>
+                </a:solidFill>
+              </a:defRPr>
+            </a:lvl6pPr>
+            <a:lvl7pPr marL="2743200" indent="0">
+              <a:buNone/>
+              <a:defRPr sz="1400">
+                <a:solidFill>
+                  <a:schemeClr val="tx1">
+                    <a:tint val="75000"/>
+                  </a:schemeClr>
+                </a:solidFill>
+              </a:defRPr>
+            </a:lvl7pPr>
+            <a:lvl8pPr marL="3200400" indent="0">
+              <a:buNone/>
+              <a:defRPr sz="1400">
+                <a:solidFill>
+                  <a:schemeClr val="tx1">
+                    <a:tint val="75000"/>
+                  </a:schemeClr>
+                </a:solidFill>
+              </a:defRPr>
+            </a:lvl8pPr>
+            <a:lvl9pPr marL="3657600" indent="0">
+              <a:buNone/>
+              <a:defRPr sz="1400">
+                <a:solidFill>
+                  <a:schemeClr val="tx1">
+                    <a:tint val="75000"/>
+                  </a:schemeClr>
+                </a:solidFill>
+              </a:defRPr>
+            </a:lvl9pPr>
+          </a:lstStyle>
+          <a:p>
+            <a:pPr lvl="0"/>
+            <a:r>
+              <a:rPr lang="en-US" smtClean="0"/>
+              <a:t>Click to edit Master text styles</a:t>
+            </a:r>
+          </a:p>
+        </p:txBody>
+      </p:sp>
+      <p:sp>
+        <p:nvSpPr>
+          <p:cNvPr id="4" name="Date Placeholder 3"/>
+          <p:cNvSpPr>
+            <a:spLocks noGrp="1"/>
+          </p:cNvSpPr>
+          <p:nvPr>
+            <p:ph type="dt" sz="half" idx="10"/>
+          </p:nvPr>
+        </p:nvSpPr>
+        <p:spPr/>
+        <p:txBody>
+          <a:bodyPr/>
+          <a:lstStyle/>
+          <a:p>
+            <a:fld id="{B61BEF0D-F0BB-DE4B-95CE-6DB70DBA9567}" type="datetimeFigureOut">
+              <a:rPr lang="en-US" dirty="0"/>
+              <a:pPr/>
+              <a:t>10/3/2026</a:t>
+            </a:fld>
+            <a:endParaRPr lang="en-US" dirty="0"/>
+          </a:p>
+        </p:txBody>
+      </p:sp>
+      <p:sp>
+        <p:nvSpPr>
+          <p:cNvPr id="5" name="Footer Placeholder 4"/>
+          <p:cNvSpPr>
+            <a:spLocks noGrp="1"/>
+          </p:cNvSpPr>
+          <p:nvPr>
+            <p:ph type="ftr" sz="quarter" idx="11"/>
+          </p:nvPr>
+        </p:nvSpPr>
+        <p:spPr/>
+        <p:txBody>
+          <a:bodyPr/>
+          <a:lstStyle/>
+          <a:p>
+            <a:endParaRPr lang="en-US" dirty="0"/>
+          </a:p>
+        </p:txBody>
+      </p:sp>
+      <p:sp>
+        <p:nvSpPr>
+          <p:cNvPr id="6" name="Slide Number Placeholder 5"/>
+          <p:cNvSpPr>
+            <a:spLocks noGrp="1"/>
+          </p:cNvSpPr>
+          <p:nvPr>
+            <p:ph type="sldNum" sz="quarter" idx="12"/>
+          </p:nvPr>
+        </p:nvSpPr>
+        <p:spPr/>
+        <p:txBody>
+          <a:bodyPr/>
+          <a:lstStyle/>
+          <a:p>
+            <a:fld id="{D57F1E4F-1CFF-5643-939E-217C01CDF565}" type="slidenum">
+              <a:rPr lang="en-US" dirty="0"/>
+              <a:pPr/>
+              <a:t>‹#›</a:t>
+            </a:fld>
+            <a:endParaRPr lang="en-US" dirty="0"/>
+          </a:p>
+        </p:txBody>
+      </p:sp>
+      <p:cxnSp>
+        <p:nvCxnSpPr>
+          <p:cNvPr id="15" name="Straight Connector 14"/>
+          <p:cNvCxnSpPr/>
+          <p:nvPr/>
+        </p:nvCxnSpPr>
+        <p:spPr>
+          <a:xfrm>
+            <a:off x="1396169" y="3429000"/>
+            <a:ext cx="9407298" cy="0"/>
+          </a:xfrm>
+          <a:prstGeom prst="line">
+            <a:avLst/>
+          </a:prstGeom>
+          <a:ln w="15875"/>
+        </p:spPr>
+        <p:style>
+          <a:lnRef idx="2">
+            <a:schemeClr val="accent1"/>
+          </a:lnRef>
+          <a:fillRef idx="0">
+            <a:schemeClr val="accent1"/>
+          </a:fillRef>
+          <a:effectRef idx="1">
+            <a:schemeClr val="accent1"/>
+          </a:effectRef>
+          <a:fontRef idx="minor">
+            <a:schemeClr val="tx1"/>
+          </a:fontRef>
+        </p:style>
+      </p:cxnSp>
+    </p:spTree>
+    <p:extLst>
+      <p:ext uri="{BB962C8B-B14F-4D97-AF65-F5344CB8AC3E}">
+        <p14:creationId xmlns:p14="http://schemas.microsoft.com/office/powerpoint/2010/main" val="2333433072"/>
+      </p:ext>
+    </p:extLst>
+  </p:cSld>
+  <p:clrMapOvr>
+    <a:masterClrMapping/>
+  </p:clrMapOvr>
+  <p:hf sldNum="0" hdr="0" ftr="0" dt="0"/>
+</p:sldLayout>
+</file>
+
+<file path=ppt/slideLayouts/slideLayout16.xml><?xml version="1.0" encoding="utf-8"?>
+<p:sldLayout xmlns:a="http://schemas.openxmlformats.org/drawingml/2006/main" xmlns:r="http://schemas.openxmlformats.org/officeDocument/2006/relationships" xmlns:p="http://schemas.openxmlformats.org/presentationml/2006/main" type="vertTx" preserve="1">
+  <p:cSld name="Title and Vertical Text">
+    <p:spTree>
+      <p:nvGrpSpPr>
+        <p:cNvPr id="1" name=""/>
+        <p:cNvGrpSpPr/>
+        <p:nvPr/>
+      </p:nvGrpSpPr>
+      <p:grpSpPr>
+        <a:xfrm>
+          <a:off x="0" y="0"/>
+          <a:ext cx="0" cy="0"/>
+          <a:chOff x="0" y="0"/>
+          <a:chExt cx="0" cy="0"/>
+        </a:xfrm>
+      </p:grpSpPr>
+      <p:sp>
+        <p:nvSpPr>
+          <p:cNvPr id="2" name="Title 1"/>
+          <p:cNvSpPr>
+            <a:spLocks noGrp="1"/>
+          </p:cNvSpPr>
+          <p:nvPr>
+            <p:ph type="title"/>
+          </p:nvPr>
+        </p:nvSpPr>
+        <p:spPr/>
+        <p:txBody>
+          <a:bodyPr/>
+          <a:lstStyle>
+            <a:lvl1pPr algn="ctr">
+              <a:defRPr/>
+            </a:lvl1pPr>
+          </a:lstStyle>
+          <a:p>
+            <a:r>
+              <a:rPr lang="en-US" smtClean="0"/>
+              <a:t>Click to edit Master title style</a:t>
+            </a:r>
+            <a:endParaRPr lang="en-US" dirty="0"/>
+          </a:p>
+        </p:txBody>
+      </p:sp>
+      <p:sp>
+        <p:nvSpPr>
+          <p:cNvPr id="3" name="Vertical Text Placeholder 2"/>
+          <p:cNvSpPr>
+            <a:spLocks noGrp="1"/>
+          </p:cNvSpPr>
+          <p:nvPr>
+            <p:ph type="body" orient="vert" idx="1"/>
+          </p:nvPr>
+        </p:nvSpPr>
+        <p:spPr/>
+        <p:txBody>
+          <a:bodyPr vert="eaVert" anchor="t"/>
+          <a:lstStyle/>
+          <a:p>
+            <a:pPr lvl="0"/>
+            <a:r>
+              <a:rPr lang="en-US" smtClean="0"/>
+              <a:t>Click to edit Master text styles</a:t>
+            </a:r>
+          </a:p>
+          <a:p>
+            <a:pPr lvl="1"/>
+            <a:r>
+              <a:rPr lang="en-US" smtClean="0"/>
+              <a:t>Second level</a:t>
+            </a:r>
+          </a:p>
+          <a:p>
+            <a:pPr lvl="2"/>
+            <a:r>
+              <a:rPr lang="en-US" smtClean="0"/>
+              <a:t>Third level</a:t>
+            </a:r>
+          </a:p>
+          <a:p>
+            <a:pPr lvl="3"/>
+            <a:r>
+              <a:rPr lang="en-US" smtClean="0"/>
+              <a:t>Fourth level</a:t>
+            </a:r>
+          </a:p>
+          <a:p>
+            <a:pPr lvl="4"/>
+            <a:r>
+              <a:rPr lang="en-US" smtClean="0"/>
+              <a:t>Fifth level</a:t>
+            </a:r>
+            <a:endParaRPr lang="en-US" dirty="0"/>
+          </a:p>
+        </p:txBody>
+      </p:sp>
+      <p:sp>
+        <p:nvSpPr>
+          <p:cNvPr id="4" name="Date Placeholder 3"/>
+          <p:cNvSpPr>
+            <a:spLocks noGrp="1"/>
+          </p:cNvSpPr>
+          <p:nvPr>
+            <p:ph type="dt" sz="half" idx="10"/>
+          </p:nvPr>
+        </p:nvSpPr>
+        <p:spPr/>
+        <p:txBody>
+          <a:bodyPr/>
+          <a:lstStyle/>
+          <a:p>
+            <a:fld id="{B61BEF0D-F0BB-DE4B-95CE-6DB70DBA9567}" type="datetimeFigureOut">
+              <a:rPr lang="en-US" dirty="0"/>
+              <a:pPr/>
+              <a:t>10/3/2026</a:t>
+            </a:fld>
+            <a:endParaRPr lang="en-US" dirty="0"/>
+          </a:p>
+        </p:txBody>
+      </p:sp>
+      <p:sp>
+        <p:nvSpPr>
+          <p:cNvPr id="5" name="Footer Placeholder 4"/>
+          <p:cNvSpPr>
+            <a:spLocks noGrp="1"/>
+          </p:cNvSpPr>
+          <p:nvPr>
+            <p:ph type="ftr" sz="quarter" idx="11"/>
+          </p:nvPr>
+        </p:nvSpPr>
+        <p:spPr/>
+        <p:txBody>
+          <a:bodyPr/>
+          <a:lstStyle/>
+          <a:p>
+            <a:endParaRPr lang="en-US" dirty="0"/>
+          </a:p>
+        </p:txBody>
+      </p:sp>
+      <p:sp>
+        <p:nvSpPr>
+          <p:cNvPr id="6" name="Slide Number Placeholder 5"/>
+          <p:cNvSpPr>
+            <a:spLocks noGrp="1"/>
+          </p:cNvSpPr>
+          <p:nvPr>
+            <p:ph type="sldNum" sz="quarter" idx="12"/>
+          </p:nvPr>
+        </p:nvSpPr>
+        <p:spPr/>
+        <p:txBody>
+          <a:bodyPr/>
+          <a:lstStyle/>
+          <a:p>
+            <a:fld id="{D57F1E4F-1CFF-5643-939E-217C01CDF565}" type="slidenum">
+              <a:rPr lang="en-US" dirty="0"/>
+              <a:pPr/>
+              <a:t>‹#›</a:t>
+            </a:fld>
+            <a:endParaRPr lang="en-US" dirty="0"/>
+          </a:p>
+        </p:txBody>
+      </p:sp>
+      <p:cxnSp>
+        <p:nvCxnSpPr>
+          <p:cNvPr id="14" name="Straight Connector 13"/>
+          <p:cNvCxnSpPr/>
+          <p:nvPr/>
+        </p:nvCxnSpPr>
+        <p:spPr>
+          <a:xfrm>
+            <a:off x="1396169" y="2421466"/>
+            <a:ext cx="9407298" cy="0"/>
+          </a:xfrm>
+          <a:prstGeom prst="line">
+            <a:avLst/>
+          </a:prstGeom>
+          <a:ln w="15875"/>
+        </p:spPr>
+        <p:style>
+          <a:lnRef idx="2">
+            <a:schemeClr val="accent1"/>
+          </a:lnRef>
+          <a:fillRef idx="0">
+            <a:schemeClr val="accent1"/>
+          </a:fillRef>
+          <a:effectRef idx="1">
+            <a:schemeClr val="accent1"/>
+          </a:effectRef>
+          <a:fontRef idx="minor">
+            <a:schemeClr val="tx1"/>
+          </a:fontRef>
+        </p:style>
+      </p:cxnSp>
+    </p:spTree>
+    <p:extLst>
+      <p:ext uri="{BB962C8B-B14F-4D97-AF65-F5344CB8AC3E}">
+        <p14:creationId xmlns:p14="http://schemas.microsoft.com/office/powerpoint/2010/main" val="2913741792"/>
+      </p:ext>
+    </p:extLst>
+  </p:cSld>
+  <p:clrMapOvr>
+    <a:masterClrMapping/>
+  </p:clrMapOvr>
+  <p:hf sldNum="0" hdr="0" ftr="0" dt="0"/>
+</p:sldLayout>
+</file>
+
+<file path=ppt/slideLayouts/slideLayout17.xml><?xml version="1.0" encoding="utf-8"?>
+<p:sldLayout xmlns:a="http://schemas.openxmlformats.org/drawingml/2006/main" xmlns:r="http://schemas.openxmlformats.org/officeDocument/2006/relationships" xmlns:p="http://schemas.openxmlformats.org/presentationml/2006/main" type="vertTitleAndTx" preserve="1">
+  <p:cSld name="Vertical Title and Text">
+    <p:spTree>
+      <p:nvGrpSpPr>
+        <p:cNvPr id="1" name=""/>
+        <p:cNvGrpSpPr/>
+        <p:nvPr/>
+      </p:nvGrpSpPr>
+      <p:grpSpPr>
+        <a:xfrm>
+          <a:off x="0" y="0"/>
+          <a:ext cx="0" cy="0"/>
+          <a:chOff x="0" y="0"/>
+          <a:chExt cx="0" cy="0"/>
+        </a:xfrm>
+      </p:grpSpPr>
+      <p:sp>
+        <p:nvSpPr>
+          <p:cNvPr id="2" name="Vertical Title 1"/>
+          <p:cNvSpPr>
+            <a:spLocks noGrp="1"/>
+          </p:cNvSpPr>
+          <p:nvPr>
+            <p:ph type="title" orient="vert"/>
+          </p:nvPr>
+        </p:nvSpPr>
+        <p:spPr>
+          <a:xfrm>
+            <a:off x="8999356" y="982131"/>
+            <a:ext cx="1890895" cy="4893735"/>
+          </a:xfrm>
+        </p:spPr>
+        <p:txBody>
+          <a:bodyPr vert="eaVert"/>
+          <a:lstStyle/>
+          <a:p>
+            <a:r>
+              <a:rPr lang="en-US" smtClean="0"/>
+              <a:t>Click to edit Master title style</a:t>
+            </a:r>
+            <a:endParaRPr lang="en-US" dirty="0"/>
+          </a:p>
+        </p:txBody>
+      </p:sp>
+      <p:sp>
+        <p:nvSpPr>
+          <p:cNvPr id="3" name="Vertical Text Placeholder 2"/>
+          <p:cNvSpPr>
+            <a:spLocks noGrp="1"/>
+          </p:cNvSpPr>
+          <p:nvPr>
+            <p:ph type="body" orient="vert" idx="1"/>
+          </p:nvPr>
+        </p:nvSpPr>
+        <p:spPr>
+          <a:xfrm>
+            <a:off x="1295398" y="982132"/>
+            <a:ext cx="7433025" cy="4893734"/>
+          </a:xfrm>
+        </p:spPr>
+        <p:txBody>
+          <a:bodyPr vert="eaVert" anchor="t"/>
+          <a:lstStyle/>
+          <a:p>
+            <a:pPr lvl="0"/>
+            <a:r>
+              <a:rPr lang="en-US" smtClean="0"/>
+              <a:t>Click to edit Master text styles</a:t>
+            </a:r>
+          </a:p>
+          <a:p>
+            <a:pPr lvl="1"/>
+            <a:r>
+              <a:rPr lang="en-US" smtClean="0"/>
+              <a:t>Second level</a:t>
+            </a:r>
+          </a:p>
+          <a:p>
+            <a:pPr lvl="2"/>
+            <a:r>
+              <a:rPr lang="en-US" smtClean="0"/>
+              <a:t>Third level</a:t>
+            </a:r>
+          </a:p>
+          <a:p>
+            <a:pPr lvl="3"/>
+            <a:r>
+              <a:rPr lang="en-US" smtClean="0"/>
+              <a:t>Fourth level</a:t>
+            </a:r>
+          </a:p>
+          <a:p>
+            <a:pPr lvl="4"/>
+            <a:r>
+              <a:rPr lang="en-US" smtClean="0"/>
+              <a:t>Fifth level</a:t>
+            </a:r>
+            <a:endParaRPr lang="en-US" dirty="0"/>
+          </a:p>
+        </p:txBody>
+      </p:sp>
+      <p:sp>
+        <p:nvSpPr>
+          <p:cNvPr id="4" name="Date Placeholder 3"/>
+          <p:cNvSpPr>
+            <a:spLocks noGrp="1"/>
+          </p:cNvSpPr>
+          <p:nvPr>
+            <p:ph type="dt" sz="half" idx="10"/>
+          </p:nvPr>
+        </p:nvSpPr>
+        <p:spPr/>
+        <p:txBody>
+          <a:bodyPr/>
+          <a:lstStyle/>
+          <a:p>
+            <a:fld id="{B61BEF0D-F0BB-DE4B-95CE-6DB70DBA9567}" type="datetimeFigureOut">
+              <a:rPr lang="en-US" dirty="0"/>
+              <a:pPr/>
+              <a:t>10/3/2026</a:t>
+            </a:fld>
+            <a:endParaRPr lang="en-US" dirty="0"/>
+          </a:p>
+        </p:txBody>
+      </p:sp>
+      <p:sp>
+        <p:nvSpPr>
+          <p:cNvPr id="5" name="Footer Placeholder 4"/>
+          <p:cNvSpPr>
+            <a:spLocks noGrp="1"/>
+          </p:cNvSpPr>
+          <p:nvPr>
+            <p:ph type="ftr" sz="quarter" idx="11"/>
+          </p:nvPr>
+        </p:nvSpPr>
+        <p:spPr/>
+        <p:txBody>
+          <a:bodyPr/>
+          <a:lstStyle/>
+          <a:p>
+            <a:endParaRPr lang="en-US" dirty="0"/>
+          </a:p>
+        </p:txBody>
+      </p:sp>
+      <p:sp>
+        <p:nvSpPr>
+          <p:cNvPr id="6" name="Slide Number Placeholder 5"/>
+          <p:cNvSpPr>
+            <a:spLocks noGrp="1"/>
+          </p:cNvSpPr>
+          <p:nvPr>
+            <p:ph type="sldNum" sz="quarter" idx="12"/>
+          </p:nvPr>
+        </p:nvSpPr>
+        <p:spPr/>
+        <p:txBody>
+          <a:bodyPr/>
+          <a:lstStyle/>
+          <a:p>
+            <a:fld id="{D57F1E4F-1CFF-5643-939E-217C01CDF565}" type="slidenum">
+              <a:rPr lang="en-US" dirty="0"/>
+              <a:pPr/>
+              <a:t>‹#›</a:t>
+            </a:fld>
+            <a:endParaRPr lang="en-US" dirty="0"/>
+          </a:p>
+        </p:txBody>
+      </p:sp>
+      <p:cxnSp>
+        <p:nvCxnSpPr>
+          <p:cNvPr id="14" name="Straight Connector 13"/>
+          <p:cNvCxnSpPr/>
+          <p:nvPr/>
+        </p:nvCxnSpPr>
+        <p:spPr>
+          <a:xfrm>
+            <a:off x="8863890" y="990600"/>
+            <a:ext cx="0" cy="4876800"/>
+          </a:xfrm>
+          <a:prstGeom prst="line">
+            <a:avLst/>
+          </a:prstGeom>
+          <a:ln w="15875"/>
+        </p:spPr>
+        <p:style>
+          <a:lnRef idx="2">
+            <a:schemeClr val="accent1"/>
+          </a:lnRef>
+          <a:fillRef idx="0">
+            <a:schemeClr val="accent1"/>
+          </a:fillRef>
+          <a:effectRef idx="1">
+            <a:schemeClr val="accent1"/>
+          </a:effectRef>
+          <a:fontRef idx="minor">
+            <a:schemeClr val="tx1"/>
+          </a:fontRef>
+        </p:style>
+      </p:cxnSp>
+    </p:spTree>
+    <p:extLst>
+      <p:ext uri="{BB962C8B-B14F-4D97-AF65-F5344CB8AC3E}">
+        <p14:creationId xmlns:p14="http://schemas.microsoft.com/office/powerpoint/2010/main" val="977742658"/>
+      </p:ext>
+    </p:extLst>
+  </p:cSld>
+  <p:clrMapOvr>
+    <a:masterClrMapping/>
+  </p:clrMapOvr>
+  <p:hf sldNum="0" hdr="0" ftr="0" dt="0"/>
+</p:sldLayout>
+</file>
+
+<file path=ppt/slideLayouts/slideLayout18.xml><?xml version="1.0" encoding="utf-8"?>
+<p:sldLayout xmlns:a="http://schemas.openxmlformats.org/drawingml/2006/main" xmlns:r="http://schemas.openxmlformats.org/officeDocument/2006/relationships" xmlns:p="http://schemas.openxmlformats.org/presentationml/2006/main">
   <p:cSld name="Slide master 1">
     <p:bg>
       <p:bgPr>
@@ -1159,33 +4188,12 @@
           <a:chExt cx="0" cy="0"/>
         </a:xfrm>
       </p:grpSpPr>
-      <p:pic>
-        <p:nvPicPr>
-          <p:cNvPr id="2" name="Image 0" descr="preencoded.png">
-            <a:hlinkClick r:id="rId2"/>
-          </p:cNvPr>
-          <p:cNvPicPr>
-            <a:picLocks noChangeAspect="1"/>
-          </p:cNvPicPr>
-          <p:nvPr/>
-        </p:nvPicPr>
-        <p:blipFill>
-          <a:blip r:embed="rId3"/>
-          <a:stretch>
-            <a:fillRect/>
-          </a:stretch>
-        </p:blipFill>
-        <p:spPr>
-          <a:xfrm>
-            <a:off x="11076875" y="6558991"/>
-            <a:ext cx="1071843" cy="256032"/>
-          </a:xfrm>
-          <a:prstGeom prst="rect">
-            <a:avLst/>
-          </a:prstGeom>
-        </p:spPr>
-      </p:pic>
     </p:spTree>
+    <p:extLst>
+      <p:ext uri="{BB962C8B-B14F-4D97-AF65-F5344CB8AC3E}">
+        <p14:creationId xmlns:p14="http://schemas.microsoft.com/office/powerpoint/2010/main" val="122682423"/>
+      </p:ext>
+    </p:extLst>
   </p:cSld>
   <p:clrMapOvr>
     <a:masterClrMapping/>
@@ -1193,8 +4201,8 @@
 </p:sldLayout>
 </file>
 
-<file path=ppt/slideLayouts/slideLayout3.xml><?xml version="1.0" encoding="utf-8"?>
-<p:sldLayout xmlns:a="http://schemas.openxmlformats.org/drawingml/2006/main" xmlns:r="http://schemas.openxmlformats.org/officeDocument/2006/relationships" xmlns:p="http://schemas.openxmlformats.org/presentationml/2006/main" preserve="1">
+<file path=ppt/slideLayouts/slideLayout19.xml><?xml version="1.0" encoding="utf-8"?>
+<p:sldLayout xmlns:a="http://schemas.openxmlformats.org/drawingml/2006/main" xmlns:r="http://schemas.openxmlformats.org/officeDocument/2006/relationships" xmlns:p="http://schemas.openxmlformats.org/presentationml/2006/main">
   <p:cSld name="Slide master 2">
     <p:bg>
       <p:bgPr>
@@ -1218,33 +4226,12 @@
           <a:chExt cx="0" cy="0"/>
         </a:xfrm>
       </p:grpSpPr>
-      <p:pic>
-        <p:nvPicPr>
-          <p:cNvPr id="2" name="Image 0" descr="preencoded.png">
-            <a:hlinkClick r:id="rId2"/>
-          </p:cNvPr>
-          <p:cNvPicPr>
-            <a:picLocks noChangeAspect="1"/>
-          </p:cNvPicPr>
-          <p:nvPr/>
-        </p:nvPicPr>
-        <p:blipFill>
-          <a:blip r:embed="rId3"/>
-          <a:stretch>
-            <a:fillRect/>
-          </a:stretch>
-        </p:blipFill>
-        <p:spPr>
-          <a:xfrm>
-            <a:off x="11076875" y="6558991"/>
-            <a:ext cx="1071843" cy="256032"/>
-          </a:xfrm>
-          <a:prstGeom prst="rect">
-            <a:avLst/>
-          </a:prstGeom>
-        </p:spPr>
-      </p:pic>
     </p:spTree>
+    <p:extLst>
+      <p:ext uri="{BB962C8B-B14F-4D97-AF65-F5344CB8AC3E}">
+        <p14:creationId xmlns:p14="http://schemas.microsoft.com/office/powerpoint/2010/main" val="1414013081"/>
+      </p:ext>
+    </p:extLst>
   </p:cSld>
   <p:clrMapOvr>
     <a:masterClrMapping/>
@@ -1252,11 +4239,2017 @@
 </p:sldLayout>
 </file>
 
+<file path=ppt/slideLayouts/slideLayout2.xml><?xml version="1.0" encoding="utf-8"?>
+<p:sldLayout xmlns:a="http://schemas.openxmlformats.org/drawingml/2006/main" xmlns:r="http://schemas.openxmlformats.org/officeDocument/2006/relationships" xmlns:p="http://schemas.openxmlformats.org/presentationml/2006/main" type="obj" preserve="1">
+  <p:cSld name="Title and Content">
+    <p:spTree>
+      <p:nvGrpSpPr>
+        <p:cNvPr id="1" name=""/>
+        <p:cNvGrpSpPr/>
+        <p:nvPr/>
+      </p:nvGrpSpPr>
+      <p:grpSpPr>
+        <a:xfrm>
+          <a:off x="0" y="0"/>
+          <a:ext cx="0" cy="0"/>
+          <a:chOff x="0" y="0"/>
+          <a:chExt cx="0" cy="0"/>
+        </a:xfrm>
+      </p:grpSpPr>
+      <p:cxnSp>
+        <p:nvCxnSpPr>
+          <p:cNvPr id="7" name="Straight Connector 6"/>
+          <p:cNvCxnSpPr/>
+          <p:nvPr/>
+        </p:nvCxnSpPr>
+        <p:spPr>
+          <a:xfrm>
+            <a:off x="1396169" y="2421466"/>
+            <a:ext cx="9407298" cy="0"/>
+          </a:xfrm>
+          <a:prstGeom prst="line">
+            <a:avLst/>
+          </a:prstGeom>
+          <a:ln w="15875"/>
+        </p:spPr>
+        <p:style>
+          <a:lnRef idx="2">
+            <a:schemeClr val="accent1"/>
+          </a:lnRef>
+          <a:fillRef idx="0">
+            <a:schemeClr val="accent1"/>
+          </a:fillRef>
+          <a:effectRef idx="1">
+            <a:schemeClr val="accent1"/>
+          </a:effectRef>
+          <a:fontRef idx="minor">
+            <a:schemeClr val="tx1"/>
+          </a:fontRef>
+        </p:style>
+      </p:cxnSp>
+      <p:sp>
+        <p:nvSpPr>
+          <p:cNvPr id="2" name="Title 1"/>
+          <p:cNvSpPr>
+            <a:spLocks noGrp="1"/>
+          </p:cNvSpPr>
+          <p:nvPr>
+            <p:ph type="title"/>
+          </p:nvPr>
+        </p:nvSpPr>
+        <p:spPr/>
+        <p:txBody>
+          <a:bodyPr/>
+          <a:lstStyle/>
+          <a:p>
+            <a:r>
+              <a:rPr lang="en-US" smtClean="0"/>
+              <a:t>Click to edit Master title style</a:t>
+            </a:r>
+            <a:endParaRPr lang="en-US" dirty="0"/>
+          </a:p>
+        </p:txBody>
+      </p:sp>
+      <p:sp>
+        <p:nvSpPr>
+          <p:cNvPr id="3" name="Content Placeholder 2"/>
+          <p:cNvSpPr>
+            <a:spLocks noGrp="1"/>
+          </p:cNvSpPr>
+          <p:nvPr>
+            <p:ph idx="1"/>
+          </p:nvPr>
+        </p:nvSpPr>
+        <p:spPr/>
+        <p:txBody>
+          <a:bodyPr/>
+          <a:lstStyle/>
+          <a:p>
+            <a:pPr lvl="0"/>
+            <a:r>
+              <a:rPr lang="en-US" smtClean="0"/>
+              <a:t>Click to edit Master text styles</a:t>
+            </a:r>
+          </a:p>
+          <a:p>
+            <a:pPr lvl="1"/>
+            <a:r>
+              <a:rPr lang="en-US" smtClean="0"/>
+              <a:t>Second level</a:t>
+            </a:r>
+          </a:p>
+          <a:p>
+            <a:pPr lvl="2"/>
+            <a:r>
+              <a:rPr lang="en-US" smtClean="0"/>
+              <a:t>Third level</a:t>
+            </a:r>
+          </a:p>
+          <a:p>
+            <a:pPr lvl="3"/>
+            <a:r>
+              <a:rPr lang="en-US" smtClean="0"/>
+              <a:t>Fourth level</a:t>
+            </a:r>
+          </a:p>
+          <a:p>
+            <a:pPr lvl="4"/>
+            <a:r>
+              <a:rPr lang="en-US" smtClean="0"/>
+              <a:t>Fifth level</a:t>
+            </a:r>
+            <a:endParaRPr lang="en-US" dirty="0"/>
+          </a:p>
+        </p:txBody>
+      </p:sp>
+      <p:sp>
+        <p:nvSpPr>
+          <p:cNvPr id="4" name="Date Placeholder 3"/>
+          <p:cNvSpPr>
+            <a:spLocks noGrp="1"/>
+          </p:cNvSpPr>
+          <p:nvPr>
+            <p:ph type="dt" sz="half" idx="10"/>
+          </p:nvPr>
+        </p:nvSpPr>
+        <p:spPr/>
+        <p:txBody>
+          <a:bodyPr/>
+          <a:lstStyle/>
+          <a:p>
+            <a:fld id="{52647F38-B617-4D2F-AE0A-013F0C4D2C57}" type="datetimeFigureOut">
+              <a:rPr lang="en-US" dirty="0"/>
+              <a:t>10/3/2026</a:t>
+            </a:fld>
+            <a:endParaRPr lang="en-US" dirty="0"/>
+          </a:p>
+        </p:txBody>
+      </p:sp>
+      <p:sp>
+        <p:nvSpPr>
+          <p:cNvPr id="5" name="Footer Placeholder 4"/>
+          <p:cNvSpPr>
+            <a:spLocks noGrp="1"/>
+          </p:cNvSpPr>
+          <p:nvPr>
+            <p:ph type="ftr" sz="quarter" idx="11"/>
+          </p:nvPr>
+        </p:nvSpPr>
+        <p:spPr/>
+        <p:txBody>
+          <a:bodyPr/>
+          <a:lstStyle/>
+          <a:p>
+            <a:endParaRPr lang="en-US" dirty="0"/>
+          </a:p>
+        </p:txBody>
+      </p:sp>
+      <p:sp>
+        <p:nvSpPr>
+          <p:cNvPr id="6" name="Slide Number Placeholder 5"/>
+          <p:cNvSpPr>
+            <a:spLocks noGrp="1"/>
+          </p:cNvSpPr>
+          <p:nvPr>
+            <p:ph type="sldNum" sz="quarter" idx="12"/>
+          </p:nvPr>
+        </p:nvSpPr>
+        <p:spPr/>
+        <p:txBody>
+          <a:bodyPr/>
+          <a:lstStyle/>
+          <a:p>
+            <a:fld id="{E97799C9-84D9-46D2-A11E-BCF8A720529D}" type="slidenum">
+              <a:rPr lang="en-US" dirty="0"/>
+              <a:t>‹#›</a:t>
+            </a:fld>
+            <a:endParaRPr lang="en-US" dirty="0"/>
+          </a:p>
+        </p:txBody>
+      </p:sp>
+    </p:spTree>
+    <p:extLst>
+      <p:ext uri="{BB962C8B-B14F-4D97-AF65-F5344CB8AC3E}">
+        <p14:creationId xmlns:p14="http://schemas.microsoft.com/office/powerpoint/2010/main" val="2532573117"/>
+      </p:ext>
+    </p:extLst>
+  </p:cSld>
+  <p:clrMapOvr>
+    <a:masterClrMapping/>
+  </p:clrMapOvr>
+  <p:hf sldNum="0" hdr="0" ftr="0" dt="0"/>
+</p:sldLayout>
+</file>
+
+<file path=ppt/slideLayouts/slideLayout3.xml><?xml version="1.0" encoding="utf-8"?>
+<p:sldLayout xmlns:a="http://schemas.openxmlformats.org/drawingml/2006/main" xmlns:r="http://schemas.openxmlformats.org/officeDocument/2006/relationships" xmlns:p="http://schemas.openxmlformats.org/presentationml/2006/main" type="secHead" preserve="1">
+  <p:cSld name="Section Header">
+    <p:spTree>
+      <p:nvGrpSpPr>
+        <p:cNvPr id="1" name=""/>
+        <p:cNvGrpSpPr/>
+        <p:nvPr/>
+      </p:nvGrpSpPr>
+      <p:grpSpPr>
+        <a:xfrm>
+          <a:off x="0" y="0"/>
+          <a:ext cx="0" cy="0"/>
+          <a:chOff x="0" y="0"/>
+          <a:chExt cx="0" cy="0"/>
+        </a:xfrm>
+      </p:grpSpPr>
+      <p:sp>
+        <p:nvSpPr>
+          <p:cNvPr id="2" name="Title 1"/>
+          <p:cNvSpPr>
+            <a:spLocks noGrp="1"/>
+          </p:cNvSpPr>
+          <p:nvPr>
+            <p:ph type="title"/>
+          </p:nvPr>
+        </p:nvSpPr>
+        <p:spPr>
+          <a:xfrm>
+            <a:off x="2015069" y="1752606"/>
+            <a:ext cx="8158688" cy="1822514"/>
+          </a:xfrm>
+        </p:spPr>
+        <p:txBody>
+          <a:bodyPr anchor="b">
+            <a:normAutofit/>
+          </a:bodyPr>
+          <a:lstStyle>
+            <a:lvl1pPr algn="ctr">
+              <a:defRPr sz="4400" b="0" cap="none"/>
+            </a:lvl1pPr>
+          </a:lstStyle>
+          <a:p>
+            <a:r>
+              <a:rPr lang="en-US" smtClean="0"/>
+              <a:t>Click to edit Master title style</a:t>
+            </a:r>
+            <a:endParaRPr lang="en-US" dirty="0"/>
+          </a:p>
+        </p:txBody>
+      </p:sp>
+      <p:sp>
+        <p:nvSpPr>
+          <p:cNvPr id="3" name="Text Placeholder 2"/>
+          <p:cNvSpPr>
+            <a:spLocks noGrp="1"/>
+          </p:cNvSpPr>
+          <p:nvPr>
+            <p:ph type="body" idx="1"/>
+          </p:nvPr>
+        </p:nvSpPr>
+        <p:spPr>
+          <a:xfrm>
+            <a:off x="2015067" y="3846051"/>
+            <a:ext cx="8158690" cy="954547"/>
+          </a:xfrm>
+        </p:spPr>
+        <p:txBody>
+          <a:bodyPr anchor="t">
+            <a:normAutofit/>
+          </a:bodyPr>
+          <a:lstStyle>
+            <a:lvl1pPr marL="0" indent="0" algn="ctr">
+              <a:buNone/>
+              <a:defRPr sz="2400">
+                <a:solidFill>
+                  <a:schemeClr val="tx1"/>
+                </a:solidFill>
+              </a:defRPr>
+            </a:lvl1pPr>
+            <a:lvl2pPr marL="457200" indent="0">
+              <a:buNone/>
+              <a:defRPr sz="1800">
+                <a:solidFill>
+                  <a:schemeClr val="tx1">
+                    <a:tint val="75000"/>
+                  </a:schemeClr>
+                </a:solidFill>
+              </a:defRPr>
+            </a:lvl2pPr>
+            <a:lvl3pPr marL="914400" indent="0">
+              <a:buNone/>
+              <a:defRPr sz="1600">
+                <a:solidFill>
+                  <a:schemeClr val="tx1">
+                    <a:tint val="75000"/>
+                  </a:schemeClr>
+                </a:solidFill>
+              </a:defRPr>
+            </a:lvl3pPr>
+            <a:lvl4pPr marL="1371600" indent="0">
+              <a:buNone/>
+              <a:defRPr sz="1400">
+                <a:solidFill>
+                  <a:schemeClr val="tx1">
+                    <a:tint val="75000"/>
+                  </a:schemeClr>
+                </a:solidFill>
+              </a:defRPr>
+            </a:lvl4pPr>
+            <a:lvl5pPr marL="1828800" indent="0">
+              <a:buNone/>
+              <a:defRPr sz="1400">
+                <a:solidFill>
+                  <a:schemeClr val="tx1">
+                    <a:tint val="75000"/>
+                  </a:schemeClr>
+                </a:solidFill>
+              </a:defRPr>
+            </a:lvl5pPr>
+            <a:lvl6pPr marL="2286000" indent="0">
+              <a:buNone/>
+              <a:defRPr sz="1400">
+                <a:solidFill>
+                  <a:schemeClr val="tx1">
+                    <a:tint val="75000"/>
+                  </a:schemeClr>
+                </a:solidFill>
+              </a:defRPr>
+            </a:lvl6pPr>
+            <a:lvl7pPr marL="2743200" indent="0">
+              <a:buNone/>
+              <a:defRPr sz="1400">
+                <a:solidFill>
+                  <a:schemeClr val="tx1">
+                    <a:tint val="75000"/>
+                  </a:schemeClr>
+                </a:solidFill>
+              </a:defRPr>
+            </a:lvl7pPr>
+            <a:lvl8pPr marL="3200400" indent="0">
+              <a:buNone/>
+              <a:defRPr sz="1400">
+                <a:solidFill>
+                  <a:schemeClr val="tx1">
+                    <a:tint val="75000"/>
+                  </a:schemeClr>
+                </a:solidFill>
+              </a:defRPr>
+            </a:lvl8pPr>
+            <a:lvl9pPr marL="3657600" indent="0">
+              <a:buNone/>
+              <a:defRPr sz="1400">
+                <a:solidFill>
+                  <a:schemeClr val="tx1">
+                    <a:tint val="75000"/>
+                  </a:schemeClr>
+                </a:solidFill>
+              </a:defRPr>
+            </a:lvl9pPr>
+          </a:lstStyle>
+          <a:p>
+            <a:pPr lvl="0"/>
+            <a:r>
+              <a:rPr lang="en-US" smtClean="0"/>
+              <a:t>Click to edit Master text styles</a:t>
+            </a:r>
+          </a:p>
+        </p:txBody>
+      </p:sp>
+      <p:sp>
+        <p:nvSpPr>
+          <p:cNvPr id="4" name="Date Placeholder 3"/>
+          <p:cNvSpPr>
+            <a:spLocks noGrp="1"/>
+          </p:cNvSpPr>
+          <p:nvPr>
+            <p:ph type="dt" sz="half" idx="10"/>
+          </p:nvPr>
+        </p:nvSpPr>
+        <p:spPr/>
+        <p:txBody>
+          <a:bodyPr/>
+          <a:lstStyle/>
+          <a:p>
+            <a:fld id="{B61BEF0D-F0BB-DE4B-95CE-6DB70DBA9567}" type="datetimeFigureOut">
+              <a:rPr lang="en-US" dirty="0"/>
+              <a:pPr/>
+              <a:t>10/3/2026</a:t>
+            </a:fld>
+            <a:endParaRPr lang="en-US" dirty="0"/>
+          </a:p>
+        </p:txBody>
+      </p:sp>
+      <p:sp>
+        <p:nvSpPr>
+          <p:cNvPr id="5" name="Footer Placeholder 4"/>
+          <p:cNvSpPr>
+            <a:spLocks noGrp="1"/>
+          </p:cNvSpPr>
+          <p:nvPr>
+            <p:ph type="ftr" sz="quarter" idx="11"/>
+          </p:nvPr>
+        </p:nvSpPr>
+        <p:spPr/>
+        <p:txBody>
+          <a:bodyPr/>
+          <a:lstStyle/>
+          <a:p>
+            <a:endParaRPr lang="en-US" dirty="0"/>
+          </a:p>
+        </p:txBody>
+      </p:sp>
+      <p:sp>
+        <p:nvSpPr>
+          <p:cNvPr id="6" name="Slide Number Placeholder 5"/>
+          <p:cNvSpPr>
+            <a:spLocks noGrp="1"/>
+          </p:cNvSpPr>
+          <p:nvPr>
+            <p:ph type="sldNum" sz="quarter" idx="12"/>
+          </p:nvPr>
+        </p:nvSpPr>
+        <p:spPr/>
+        <p:txBody>
+          <a:bodyPr/>
+          <a:lstStyle/>
+          <a:p>
+            <a:fld id="{D57F1E4F-1CFF-5643-939E-217C01CDF565}" type="slidenum">
+              <a:rPr lang="en-US" dirty="0"/>
+              <a:pPr/>
+              <a:t>‹#›</a:t>
+            </a:fld>
+            <a:endParaRPr lang="en-US" dirty="0"/>
+          </a:p>
+        </p:txBody>
+      </p:sp>
+      <p:cxnSp>
+        <p:nvCxnSpPr>
+          <p:cNvPr id="16" name="Straight Connector 15"/>
+          <p:cNvCxnSpPr/>
+          <p:nvPr/>
+        </p:nvCxnSpPr>
+        <p:spPr>
+          <a:xfrm>
+            <a:off x="2012723" y="3710585"/>
+            <a:ext cx="8163380" cy="0"/>
+          </a:xfrm>
+          <a:prstGeom prst="line">
+            <a:avLst/>
+          </a:prstGeom>
+          <a:ln w="15875"/>
+        </p:spPr>
+        <p:style>
+          <a:lnRef idx="2">
+            <a:schemeClr val="accent1"/>
+          </a:lnRef>
+          <a:fillRef idx="0">
+            <a:schemeClr val="accent1"/>
+          </a:fillRef>
+          <a:effectRef idx="1">
+            <a:schemeClr val="accent1"/>
+          </a:effectRef>
+          <a:fontRef idx="minor">
+            <a:schemeClr val="tx1"/>
+          </a:fontRef>
+        </p:style>
+      </p:cxnSp>
+    </p:spTree>
+    <p:extLst>
+      <p:ext uri="{BB962C8B-B14F-4D97-AF65-F5344CB8AC3E}">
+        <p14:creationId xmlns:p14="http://schemas.microsoft.com/office/powerpoint/2010/main" val="1080243458"/>
+      </p:ext>
+    </p:extLst>
+  </p:cSld>
+  <p:clrMapOvr>
+    <a:masterClrMapping/>
+  </p:clrMapOvr>
+  <p:hf sldNum="0" hdr="0" ftr="0" dt="0"/>
+</p:sldLayout>
+</file>
+
+<file path=ppt/slideLayouts/slideLayout4.xml><?xml version="1.0" encoding="utf-8"?>
+<p:sldLayout xmlns:a="http://schemas.openxmlformats.org/drawingml/2006/main" xmlns:r="http://schemas.openxmlformats.org/officeDocument/2006/relationships" xmlns:p="http://schemas.openxmlformats.org/presentationml/2006/main" type="twoObj" preserve="1">
+  <p:cSld name="Two Content">
+    <p:spTree>
+      <p:nvGrpSpPr>
+        <p:cNvPr id="1" name=""/>
+        <p:cNvGrpSpPr/>
+        <p:nvPr/>
+      </p:nvGrpSpPr>
+      <p:grpSpPr>
+        <a:xfrm>
+          <a:off x="0" y="0"/>
+          <a:ext cx="0" cy="0"/>
+          <a:chOff x="0" y="0"/>
+          <a:chExt cx="0" cy="0"/>
+        </a:xfrm>
+      </p:grpSpPr>
+      <p:cxnSp>
+        <p:nvCxnSpPr>
+          <p:cNvPr id="8" name="Straight Connector 7"/>
+          <p:cNvCxnSpPr/>
+          <p:nvPr/>
+        </p:nvCxnSpPr>
+        <p:spPr>
+          <a:xfrm>
+            <a:off x="1396169" y="2421466"/>
+            <a:ext cx="9407298" cy="0"/>
+          </a:xfrm>
+          <a:prstGeom prst="line">
+            <a:avLst/>
+          </a:prstGeom>
+          <a:ln w="15875"/>
+        </p:spPr>
+        <p:style>
+          <a:lnRef idx="2">
+            <a:schemeClr val="accent1"/>
+          </a:lnRef>
+          <a:fillRef idx="0">
+            <a:schemeClr val="accent1"/>
+          </a:fillRef>
+          <a:effectRef idx="1">
+            <a:schemeClr val="accent1"/>
+          </a:effectRef>
+          <a:fontRef idx="minor">
+            <a:schemeClr val="tx1"/>
+          </a:fontRef>
+        </p:style>
+      </p:cxnSp>
+      <p:sp>
+        <p:nvSpPr>
+          <p:cNvPr id="2" name="Title 1"/>
+          <p:cNvSpPr>
+            <a:spLocks noGrp="1"/>
+          </p:cNvSpPr>
+          <p:nvPr>
+            <p:ph type="title"/>
+          </p:nvPr>
+        </p:nvSpPr>
+        <p:spPr/>
+        <p:txBody>
+          <a:bodyPr/>
+          <a:lstStyle/>
+          <a:p>
+            <a:r>
+              <a:rPr lang="en-US" smtClean="0"/>
+              <a:t>Click to edit Master title style</a:t>
+            </a:r>
+            <a:endParaRPr lang="en-US" dirty="0"/>
+          </a:p>
+        </p:txBody>
+      </p:sp>
+      <p:sp>
+        <p:nvSpPr>
+          <p:cNvPr id="3" name="Content Placeholder 2"/>
+          <p:cNvSpPr>
+            <a:spLocks noGrp="1"/>
+          </p:cNvSpPr>
+          <p:nvPr>
+            <p:ph sz="half" idx="1"/>
+          </p:nvPr>
+        </p:nvSpPr>
+        <p:spPr>
+          <a:xfrm>
+            <a:off x="1298448" y="2560320"/>
+            <a:ext cx="4718304" cy="3310128"/>
+          </a:xfrm>
+        </p:spPr>
+        <p:txBody>
+          <a:bodyPr>
+            <a:normAutofit/>
+          </a:bodyPr>
+          <a:lstStyle/>
+          <a:p>
+            <a:pPr lvl="0"/>
+            <a:r>
+              <a:rPr lang="en-US" smtClean="0"/>
+              <a:t>Click to edit Master text styles</a:t>
+            </a:r>
+          </a:p>
+          <a:p>
+            <a:pPr lvl="1"/>
+            <a:r>
+              <a:rPr lang="en-US" smtClean="0"/>
+              <a:t>Second level</a:t>
+            </a:r>
+          </a:p>
+          <a:p>
+            <a:pPr lvl="2"/>
+            <a:r>
+              <a:rPr lang="en-US" smtClean="0"/>
+              <a:t>Third level</a:t>
+            </a:r>
+          </a:p>
+          <a:p>
+            <a:pPr lvl="3"/>
+            <a:r>
+              <a:rPr lang="en-US" smtClean="0"/>
+              <a:t>Fourth level</a:t>
+            </a:r>
+          </a:p>
+          <a:p>
+            <a:pPr lvl="4"/>
+            <a:r>
+              <a:rPr lang="en-US" smtClean="0"/>
+              <a:t>Fifth level</a:t>
+            </a:r>
+            <a:endParaRPr lang="en-US" dirty="0"/>
+          </a:p>
+        </p:txBody>
+      </p:sp>
+      <p:sp>
+        <p:nvSpPr>
+          <p:cNvPr id="4" name="Content Placeholder 3"/>
+          <p:cNvSpPr>
+            <a:spLocks noGrp="1"/>
+          </p:cNvSpPr>
+          <p:nvPr>
+            <p:ph sz="half" idx="2"/>
+          </p:nvPr>
+        </p:nvSpPr>
+        <p:spPr>
+          <a:xfrm>
+            <a:off x="6181344" y="2560320"/>
+            <a:ext cx="4718304" cy="3310128"/>
+          </a:xfrm>
+        </p:spPr>
+        <p:txBody>
+          <a:bodyPr>
+            <a:normAutofit/>
+          </a:bodyPr>
+          <a:lstStyle/>
+          <a:p>
+            <a:pPr lvl="0"/>
+            <a:r>
+              <a:rPr lang="en-US" smtClean="0"/>
+              <a:t>Click to edit Master text styles</a:t>
+            </a:r>
+          </a:p>
+          <a:p>
+            <a:pPr lvl="1"/>
+            <a:r>
+              <a:rPr lang="en-US" smtClean="0"/>
+              <a:t>Second level</a:t>
+            </a:r>
+          </a:p>
+          <a:p>
+            <a:pPr lvl="2"/>
+            <a:r>
+              <a:rPr lang="en-US" smtClean="0"/>
+              <a:t>Third level</a:t>
+            </a:r>
+          </a:p>
+          <a:p>
+            <a:pPr lvl="3"/>
+            <a:r>
+              <a:rPr lang="en-US" smtClean="0"/>
+              <a:t>Fourth level</a:t>
+            </a:r>
+          </a:p>
+          <a:p>
+            <a:pPr lvl="4"/>
+            <a:r>
+              <a:rPr lang="en-US" smtClean="0"/>
+              <a:t>Fifth level</a:t>
+            </a:r>
+            <a:endParaRPr lang="en-US" dirty="0"/>
+          </a:p>
+        </p:txBody>
+      </p:sp>
+      <p:sp>
+        <p:nvSpPr>
+          <p:cNvPr id="5" name="Date Placeholder 4"/>
+          <p:cNvSpPr>
+            <a:spLocks noGrp="1"/>
+          </p:cNvSpPr>
+          <p:nvPr>
+            <p:ph type="dt" sz="half" idx="10"/>
+          </p:nvPr>
+        </p:nvSpPr>
+        <p:spPr/>
+        <p:txBody>
+          <a:bodyPr/>
+          <a:lstStyle/>
+          <a:p>
+            <a:fld id="{05BFA754-D5C3-4E66-96A6-867B257F58DC}" type="datetimeFigureOut">
+              <a:rPr lang="en-US" dirty="0"/>
+              <a:t>10/3/2026</a:t>
+            </a:fld>
+            <a:endParaRPr lang="en-US" dirty="0"/>
+          </a:p>
+        </p:txBody>
+      </p:sp>
+      <p:sp>
+        <p:nvSpPr>
+          <p:cNvPr id="6" name="Footer Placeholder 5"/>
+          <p:cNvSpPr>
+            <a:spLocks noGrp="1"/>
+          </p:cNvSpPr>
+          <p:nvPr>
+            <p:ph type="ftr" sz="quarter" idx="11"/>
+          </p:nvPr>
+        </p:nvSpPr>
+        <p:spPr/>
+        <p:txBody>
+          <a:bodyPr/>
+          <a:lstStyle/>
+          <a:p>
+            <a:endParaRPr lang="en-US" dirty="0"/>
+          </a:p>
+        </p:txBody>
+      </p:sp>
+      <p:sp>
+        <p:nvSpPr>
+          <p:cNvPr id="7" name="Slide Number Placeholder 6"/>
+          <p:cNvSpPr>
+            <a:spLocks noGrp="1"/>
+          </p:cNvSpPr>
+          <p:nvPr>
+            <p:ph type="sldNum" sz="quarter" idx="12"/>
+          </p:nvPr>
+        </p:nvSpPr>
+        <p:spPr/>
+        <p:txBody>
+          <a:bodyPr/>
+          <a:lstStyle/>
+          <a:p>
+            <a:fld id="{5D84065D-F351-4B03-BD91-D8A6B8D4B362}" type="slidenum">
+              <a:rPr lang="en-US" dirty="0"/>
+              <a:t>‹#›</a:t>
+            </a:fld>
+            <a:endParaRPr lang="en-US" dirty="0"/>
+          </a:p>
+        </p:txBody>
+      </p:sp>
+    </p:spTree>
+    <p:extLst>
+      <p:ext uri="{BB962C8B-B14F-4D97-AF65-F5344CB8AC3E}">
+        <p14:creationId xmlns:p14="http://schemas.microsoft.com/office/powerpoint/2010/main" val="4176431045"/>
+      </p:ext>
+    </p:extLst>
+  </p:cSld>
+  <p:clrMapOvr>
+    <a:masterClrMapping/>
+  </p:clrMapOvr>
+  <p:hf sldNum="0" hdr="0" ftr="0" dt="0"/>
+</p:sldLayout>
+</file>
+
+<file path=ppt/slideLayouts/slideLayout5.xml><?xml version="1.0" encoding="utf-8"?>
+<p:sldLayout xmlns:a="http://schemas.openxmlformats.org/drawingml/2006/main" xmlns:r="http://schemas.openxmlformats.org/officeDocument/2006/relationships" xmlns:p="http://schemas.openxmlformats.org/presentationml/2006/main" type="twoTxTwoObj" preserve="1">
+  <p:cSld name="Comparison">
+    <p:spTree>
+      <p:nvGrpSpPr>
+        <p:cNvPr id="1" name=""/>
+        <p:cNvGrpSpPr/>
+        <p:nvPr/>
+      </p:nvGrpSpPr>
+      <p:grpSpPr>
+        <a:xfrm>
+          <a:off x="0" y="0"/>
+          <a:ext cx="0" cy="0"/>
+          <a:chOff x="0" y="0"/>
+          <a:chExt cx="0" cy="0"/>
+        </a:xfrm>
+      </p:grpSpPr>
+      <p:sp>
+        <p:nvSpPr>
+          <p:cNvPr id="2" name="Title 1"/>
+          <p:cNvSpPr>
+            <a:spLocks noGrp="1"/>
+          </p:cNvSpPr>
+          <p:nvPr>
+            <p:ph type="title"/>
+          </p:nvPr>
+        </p:nvSpPr>
+        <p:spPr/>
+        <p:txBody>
+          <a:bodyPr/>
+          <a:lstStyle>
+            <a:lvl1pPr>
+              <a:defRPr/>
+            </a:lvl1pPr>
+          </a:lstStyle>
+          <a:p>
+            <a:r>
+              <a:rPr lang="en-US" smtClean="0"/>
+              <a:t>Click to edit Master title style</a:t>
+            </a:r>
+            <a:endParaRPr lang="en-US" dirty="0"/>
+          </a:p>
+        </p:txBody>
+      </p:sp>
+      <p:sp>
+        <p:nvSpPr>
+          <p:cNvPr id="3" name="Text Placeholder 2"/>
+          <p:cNvSpPr>
+            <a:spLocks noGrp="1"/>
+          </p:cNvSpPr>
+          <p:nvPr>
+            <p:ph type="body" idx="1"/>
+          </p:nvPr>
+        </p:nvSpPr>
+        <p:spPr>
+          <a:xfrm>
+            <a:off x="1295400" y="2658533"/>
+            <a:ext cx="4718304" cy="576262"/>
+          </a:xfrm>
+        </p:spPr>
+        <p:txBody>
+          <a:bodyPr anchor="b">
+            <a:noAutofit/>
+          </a:bodyPr>
+          <a:lstStyle>
+            <a:lvl1pPr marL="0" indent="0">
+              <a:spcBef>
+                <a:spcPts val="672"/>
+              </a:spcBef>
+              <a:spcAft>
+                <a:spcPts val="600"/>
+              </a:spcAft>
+              <a:buNone/>
+              <a:defRPr sz="2800" b="0">
+                <a:solidFill>
+                  <a:schemeClr val="accent1"/>
+                </a:solidFill>
+              </a:defRPr>
+            </a:lvl1pPr>
+            <a:lvl2pPr marL="457200" indent="0">
+              <a:buNone/>
+              <a:defRPr sz="2000" b="1"/>
+            </a:lvl2pPr>
+            <a:lvl3pPr marL="914400" indent="0">
+              <a:buNone/>
+              <a:defRPr sz="1800" b="1"/>
+            </a:lvl3pPr>
+            <a:lvl4pPr marL="1371600" indent="0">
+              <a:buNone/>
+              <a:defRPr sz="1600" b="1"/>
+            </a:lvl4pPr>
+            <a:lvl5pPr marL="1828800" indent="0">
+              <a:buNone/>
+              <a:defRPr sz="1600" b="1"/>
+            </a:lvl5pPr>
+            <a:lvl6pPr marL="2286000" indent="0">
+              <a:buNone/>
+              <a:defRPr sz="1600" b="1"/>
+            </a:lvl6pPr>
+            <a:lvl7pPr marL="2743200" indent="0">
+              <a:buNone/>
+              <a:defRPr sz="1600" b="1"/>
+            </a:lvl7pPr>
+            <a:lvl8pPr marL="3200400" indent="0">
+              <a:buNone/>
+              <a:defRPr sz="1600" b="1"/>
+            </a:lvl8pPr>
+            <a:lvl9pPr marL="3657600" indent="0">
+              <a:buNone/>
+              <a:defRPr sz="1600" b="1"/>
+            </a:lvl9pPr>
+          </a:lstStyle>
+          <a:p>
+            <a:pPr lvl="0"/>
+            <a:r>
+              <a:rPr lang="en-US" smtClean="0"/>
+              <a:t>Click to edit Master text styles</a:t>
+            </a:r>
+          </a:p>
+        </p:txBody>
+      </p:sp>
+      <p:sp>
+        <p:nvSpPr>
+          <p:cNvPr id="4" name="Content Placeholder 3"/>
+          <p:cNvSpPr>
+            <a:spLocks noGrp="1"/>
+          </p:cNvSpPr>
+          <p:nvPr>
+            <p:ph sz="half" idx="2"/>
+          </p:nvPr>
+        </p:nvSpPr>
+        <p:spPr>
+          <a:xfrm>
+            <a:off x="1295400" y="3243262"/>
+            <a:ext cx="4718304" cy="2632605"/>
+          </a:xfrm>
+        </p:spPr>
+        <p:txBody>
+          <a:bodyPr anchor="t">
+            <a:normAutofit/>
+          </a:bodyPr>
+          <a:lstStyle/>
+          <a:p>
+            <a:pPr lvl="0"/>
+            <a:r>
+              <a:rPr lang="en-US" smtClean="0"/>
+              <a:t>Click to edit Master text styles</a:t>
+            </a:r>
+          </a:p>
+          <a:p>
+            <a:pPr lvl="1"/>
+            <a:r>
+              <a:rPr lang="en-US" smtClean="0"/>
+              <a:t>Second level</a:t>
+            </a:r>
+          </a:p>
+          <a:p>
+            <a:pPr lvl="2"/>
+            <a:r>
+              <a:rPr lang="en-US" smtClean="0"/>
+              <a:t>Third level</a:t>
+            </a:r>
+          </a:p>
+          <a:p>
+            <a:pPr lvl="3"/>
+            <a:r>
+              <a:rPr lang="en-US" smtClean="0"/>
+              <a:t>Fourth level</a:t>
+            </a:r>
+          </a:p>
+          <a:p>
+            <a:pPr lvl="4"/>
+            <a:r>
+              <a:rPr lang="en-US" smtClean="0"/>
+              <a:t>Fifth level</a:t>
+            </a:r>
+            <a:endParaRPr lang="en-US" dirty="0"/>
+          </a:p>
+        </p:txBody>
+      </p:sp>
+      <p:sp>
+        <p:nvSpPr>
+          <p:cNvPr id="5" name="Text Placeholder 4"/>
+          <p:cNvSpPr>
+            <a:spLocks noGrp="1"/>
+          </p:cNvSpPr>
+          <p:nvPr>
+            <p:ph type="body" sz="quarter" idx="3"/>
+          </p:nvPr>
+        </p:nvSpPr>
+        <p:spPr>
+          <a:xfrm>
+            <a:off x="6180670" y="2658533"/>
+            <a:ext cx="4718304" cy="576262"/>
+          </a:xfrm>
+        </p:spPr>
+        <p:txBody>
+          <a:bodyPr anchor="b">
+            <a:noAutofit/>
+          </a:bodyPr>
+          <a:lstStyle>
+            <a:lvl1pPr marL="0" indent="0">
+              <a:spcBef>
+                <a:spcPts val="672"/>
+              </a:spcBef>
+              <a:spcAft>
+                <a:spcPts val="600"/>
+              </a:spcAft>
+              <a:buNone/>
+              <a:defRPr sz="2800" b="0">
+                <a:solidFill>
+                  <a:schemeClr val="accent1"/>
+                </a:solidFill>
+              </a:defRPr>
+            </a:lvl1pPr>
+            <a:lvl2pPr marL="457200" indent="0">
+              <a:buNone/>
+              <a:defRPr sz="2000" b="1"/>
+            </a:lvl2pPr>
+            <a:lvl3pPr marL="914400" indent="0">
+              <a:buNone/>
+              <a:defRPr sz="1800" b="1"/>
+            </a:lvl3pPr>
+            <a:lvl4pPr marL="1371600" indent="0">
+              <a:buNone/>
+              <a:defRPr sz="1600" b="1"/>
+            </a:lvl4pPr>
+            <a:lvl5pPr marL="1828800" indent="0">
+              <a:buNone/>
+              <a:defRPr sz="1600" b="1"/>
+            </a:lvl5pPr>
+            <a:lvl6pPr marL="2286000" indent="0">
+              <a:buNone/>
+              <a:defRPr sz="1600" b="1"/>
+            </a:lvl6pPr>
+            <a:lvl7pPr marL="2743200" indent="0">
+              <a:buNone/>
+              <a:defRPr sz="1600" b="1"/>
+            </a:lvl7pPr>
+            <a:lvl8pPr marL="3200400" indent="0">
+              <a:buNone/>
+              <a:defRPr sz="1600" b="1"/>
+            </a:lvl8pPr>
+            <a:lvl9pPr marL="3657600" indent="0">
+              <a:buNone/>
+              <a:defRPr sz="1600" b="1"/>
+            </a:lvl9pPr>
+          </a:lstStyle>
+          <a:p>
+            <a:pPr lvl="0"/>
+            <a:r>
+              <a:rPr lang="en-US" smtClean="0"/>
+              <a:t>Click to edit Master text styles</a:t>
+            </a:r>
+          </a:p>
+        </p:txBody>
+      </p:sp>
+      <p:sp>
+        <p:nvSpPr>
+          <p:cNvPr id="6" name="Content Placeholder 5"/>
+          <p:cNvSpPr>
+            <a:spLocks noGrp="1"/>
+          </p:cNvSpPr>
+          <p:nvPr>
+            <p:ph sz="quarter" idx="4"/>
+          </p:nvPr>
+        </p:nvSpPr>
+        <p:spPr>
+          <a:xfrm>
+            <a:off x="6180670" y="3243262"/>
+            <a:ext cx="4718304" cy="2632605"/>
+          </a:xfrm>
+        </p:spPr>
+        <p:txBody>
+          <a:bodyPr anchor="t">
+            <a:normAutofit/>
+          </a:bodyPr>
+          <a:lstStyle/>
+          <a:p>
+            <a:pPr lvl="0"/>
+            <a:r>
+              <a:rPr lang="en-US" smtClean="0"/>
+              <a:t>Click to edit Master text styles</a:t>
+            </a:r>
+          </a:p>
+          <a:p>
+            <a:pPr lvl="1"/>
+            <a:r>
+              <a:rPr lang="en-US" smtClean="0"/>
+              <a:t>Second level</a:t>
+            </a:r>
+          </a:p>
+          <a:p>
+            <a:pPr lvl="2"/>
+            <a:r>
+              <a:rPr lang="en-US" smtClean="0"/>
+              <a:t>Third level</a:t>
+            </a:r>
+          </a:p>
+          <a:p>
+            <a:pPr lvl="3"/>
+            <a:r>
+              <a:rPr lang="en-US" smtClean="0"/>
+              <a:t>Fourth level</a:t>
+            </a:r>
+          </a:p>
+          <a:p>
+            <a:pPr lvl="4"/>
+            <a:r>
+              <a:rPr lang="en-US" smtClean="0"/>
+              <a:t>Fifth level</a:t>
+            </a:r>
+            <a:endParaRPr lang="en-US" dirty="0"/>
+          </a:p>
+        </p:txBody>
+      </p:sp>
+      <p:sp>
+        <p:nvSpPr>
+          <p:cNvPr id="7" name="Date Placeholder 6"/>
+          <p:cNvSpPr>
+            <a:spLocks noGrp="1"/>
+          </p:cNvSpPr>
+          <p:nvPr>
+            <p:ph type="dt" sz="half" idx="10"/>
+          </p:nvPr>
+        </p:nvSpPr>
+        <p:spPr/>
+        <p:txBody>
+          <a:bodyPr/>
+          <a:lstStyle/>
+          <a:p>
+            <a:fld id="{B61BEF0D-F0BB-DE4B-95CE-6DB70DBA9567}" type="datetimeFigureOut">
+              <a:rPr lang="en-US" dirty="0"/>
+              <a:pPr/>
+              <a:t>10/3/2026</a:t>
+            </a:fld>
+            <a:endParaRPr lang="en-US" dirty="0"/>
+          </a:p>
+        </p:txBody>
+      </p:sp>
+      <p:sp>
+        <p:nvSpPr>
+          <p:cNvPr id="8" name="Footer Placeholder 7"/>
+          <p:cNvSpPr>
+            <a:spLocks noGrp="1"/>
+          </p:cNvSpPr>
+          <p:nvPr>
+            <p:ph type="ftr" sz="quarter" idx="11"/>
+          </p:nvPr>
+        </p:nvSpPr>
+        <p:spPr/>
+        <p:txBody>
+          <a:bodyPr/>
+          <a:lstStyle/>
+          <a:p>
+            <a:endParaRPr lang="en-US" dirty="0"/>
+          </a:p>
+        </p:txBody>
+      </p:sp>
+      <p:sp>
+        <p:nvSpPr>
+          <p:cNvPr id="9" name="Slide Number Placeholder 8"/>
+          <p:cNvSpPr>
+            <a:spLocks noGrp="1"/>
+          </p:cNvSpPr>
+          <p:nvPr>
+            <p:ph type="sldNum" sz="quarter" idx="12"/>
+          </p:nvPr>
+        </p:nvSpPr>
+        <p:spPr/>
+        <p:txBody>
+          <a:bodyPr/>
+          <a:lstStyle/>
+          <a:p>
+            <a:fld id="{D57F1E4F-1CFF-5643-939E-217C01CDF565}" type="slidenum">
+              <a:rPr lang="en-US" dirty="0"/>
+              <a:pPr/>
+              <a:t>‹#›</a:t>
+            </a:fld>
+            <a:endParaRPr lang="en-US" dirty="0"/>
+          </a:p>
+        </p:txBody>
+      </p:sp>
+      <p:cxnSp>
+        <p:nvCxnSpPr>
+          <p:cNvPr id="18" name="Straight Connector 17"/>
+          <p:cNvCxnSpPr/>
+          <p:nvPr/>
+        </p:nvCxnSpPr>
+        <p:spPr>
+          <a:xfrm>
+            <a:off x="1396169" y="2421466"/>
+            <a:ext cx="9407298" cy="0"/>
+          </a:xfrm>
+          <a:prstGeom prst="line">
+            <a:avLst/>
+          </a:prstGeom>
+          <a:ln w="15875"/>
+        </p:spPr>
+        <p:style>
+          <a:lnRef idx="2">
+            <a:schemeClr val="accent1"/>
+          </a:lnRef>
+          <a:fillRef idx="0">
+            <a:schemeClr val="accent1"/>
+          </a:fillRef>
+          <a:effectRef idx="1">
+            <a:schemeClr val="accent1"/>
+          </a:effectRef>
+          <a:fontRef idx="minor">
+            <a:schemeClr val="tx1"/>
+          </a:fontRef>
+        </p:style>
+      </p:cxnSp>
+    </p:spTree>
+    <p:extLst>
+      <p:ext uri="{BB962C8B-B14F-4D97-AF65-F5344CB8AC3E}">
+        <p14:creationId xmlns:p14="http://schemas.microsoft.com/office/powerpoint/2010/main" val="2365576045"/>
+      </p:ext>
+    </p:extLst>
+  </p:cSld>
+  <p:clrMapOvr>
+    <a:masterClrMapping/>
+  </p:clrMapOvr>
+  <p:hf sldNum="0" hdr="0" ftr="0" dt="0"/>
+</p:sldLayout>
+</file>
+
+<file path=ppt/slideLayouts/slideLayout6.xml><?xml version="1.0" encoding="utf-8"?>
+<p:sldLayout xmlns:a="http://schemas.openxmlformats.org/drawingml/2006/main" xmlns:r="http://schemas.openxmlformats.org/officeDocument/2006/relationships" xmlns:p="http://schemas.openxmlformats.org/presentationml/2006/main" type="titleOnly" preserve="1">
+  <p:cSld name="Title Only">
+    <p:spTree>
+      <p:nvGrpSpPr>
+        <p:cNvPr id="1" name=""/>
+        <p:cNvGrpSpPr/>
+        <p:nvPr/>
+      </p:nvGrpSpPr>
+      <p:grpSpPr>
+        <a:xfrm>
+          <a:off x="0" y="0"/>
+          <a:ext cx="0" cy="0"/>
+          <a:chOff x="0" y="0"/>
+          <a:chExt cx="0" cy="0"/>
+        </a:xfrm>
+      </p:grpSpPr>
+      <p:sp>
+        <p:nvSpPr>
+          <p:cNvPr id="2" name="Title 1"/>
+          <p:cNvSpPr>
+            <a:spLocks noGrp="1"/>
+          </p:cNvSpPr>
+          <p:nvPr>
+            <p:ph type="title"/>
+          </p:nvPr>
+        </p:nvSpPr>
+        <p:spPr/>
+        <p:txBody>
+          <a:bodyPr/>
+          <a:lstStyle/>
+          <a:p>
+            <a:r>
+              <a:rPr lang="en-US" smtClean="0"/>
+              <a:t>Click to edit Master title style</a:t>
+            </a:r>
+            <a:endParaRPr lang="en-US" dirty="0"/>
+          </a:p>
+        </p:txBody>
+      </p:sp>
+      <p:sp>
+        <p:nvSpPr>
+          <p:cNvPr id="3" name="Date Placeholder 2"/>
+          <p:cNvSpPr>
+            <a:spLocks noGrp="1"/>
+          </p:cNvSpPr>
+          <p:nvPr>
+            <p:ph type="dt" sz="half" idx="10"/>
+          </p:nvPr>
+        </p:nvSpPr>
+        <p:spPr/>
+        <p:txBody>
+          <a:bodyPr/>
+          <a:lstStyle/>
+          <a:p>
+            <a:fld id="{B61BEF0D-F0BB-DE4B-95CE-6DB70DBA9567}" type="datetimeFigureOut">
+              <a:rPr lang="en-US" dirty="0"/>
+              <a:pPr/>
+              <a:t>10/3/2026</a:t>
+            </a:fld>
+            <a:endParaRPr lang="en-US" dirty="0"/>
+          </a:p>
+        </p:txBody>
+      </p:sp>
+      <p:sp>
+        <p:nvSpPr>
+          <p:cNvPr id="4" name="Footer Placeholder 3"/>
+          <p:cNvSpPr>
+            <a:spLocks noGrp="1"/>
+          </p:cNvSpPr>
+          <p:nvPr>
+            <p:ph type="ftr" sz="quarter" idx="11"/>
+          </p:nvPr>
+        </p:nvSpPr>
+        <p:spPr/>
+        <p:txBody>
+          <a:bodyPr/>
+          <a:lstStyle/>
+          <a:p>
+            <a:endParaRPr lang="en-US" dirty="0"/>
+          </a:p>
+        </p:txBody>
+      </p:sp>
+      <p:sp>
+        <p:nvSpPr>
+          <p:cNvPr id="5" name="Slide Number Placeholder 4"/>
+          <p:cNvSpPr>
+            <a:spLocks noGrp="1"/>
+          </p:cNvSpPr>
+          <p:nvPr>
+            <p:ph type="sldNum" sz="quarter" idx="12"/>
+          </p:nvPr>
+        </p:nvSpPr>
+        <p:spPr/>
+        <p:txBody>
+          <a:bodyPr/>
+          <a:lstStyle/>
+          <a:p>
+            <a:fld id="{D57F1E4F-1CFF-5643-939E-217C01CDF565}" type="slidenum">
+              <a:rPr lang="en-US" dirty="0"/>
+              <a:pPr/>
+              <a:t>‹#›</a:t>
+            </a:fld>
+            <a:endParaRPr lang="en-US" dirty="0"/>
+          </a:p>
+        </p:txBody>
+      </p:sp>
+      <p:cxnSp>
+        <p:nvCxnSpPr>
+          <p:cNvPr id="14" name="Straight Connector 13"/>
+          <p:cNvCxnSpPr/>
+          <p:nvPr/>
+        </p:nvCxnSpPr>
+        <p:spPr>
+          <a:xfrm>
+            <a:off x="1396169" y="2421466"/>
+            <a:ext cx="9407298" cy="0"/>
+          </a:xfrm>
+          <a:prstGeom prst="line">
+            <a:avLst/>
+          </a:prstGeom>
+          <a:ln w="15875"/>
+        </p:spPr>
+        <p:style>
+          <a:lnRef idx="2">
+            <a:schemeClr val="accent1"/>
+          </a:lnRef>
+          <a:fillRef idx="0">
+            <a:schemeClr val="accent1"/>
+          </a:fillRef>
+          <a:effectRef idx="1">
+            <a:schemeClr val="accent1"/>
+          </a:effectRef>
+          <a:fontRef idx="minor">
+            <a:schemeClr val="tx1"/>
+          </a:fontRef>
+        </p:style>
+      </p:cxnSp>
+    </p:spTree>
+    <p:extLst>
+      <p:ext uri="{BB962C8B-B14F-4D97-AF65-F5344CB8AC3E}">
+        <p14:creationId xmlns:p14="http://schemas.microsoft.com/office/powerpoint/2010/main" val="1603193782"/>
+      </p:ext>
+    </p:extLst>
+  </p:cSld>
+  <p:clrMapOvr>
+    <a:masterClrMapping/>
+  </p:clrMapOvr>
+  <p:hf sldNum="0" hdr="0" ftr="0" dt="0"/>
+</p:sldLayout>
+</file>
+
+<file path=ppt/slideLayouts/slideLayout7.xml><?xml version="1.0" encoding="utf-8"?>
+<p:sldLayout xmlns:a="http://schemas.openxmlformats.org/drawingml/2006/main" xmlns:r="http://schemas.openxmlformats.org/officeDocument/2006/relationships" xmlns:p="http://schemas.openxmlformats.org/presentationml/2006/main" type="blank" preserve="1">
+  <p:cSld name="Blank">
+    <p:spTree>
+      <p:nvGrpSpPr>
+        <p:cNvPr id="1" name=""/>
+        <p:cNvGrpSpPr/>
+        <p:nvPr/>
+      </p:nvGrpSpPr>
+      <p:grpSpPr>
+        <a:xfrm>
+          <a:off x="0" y="0"/>
+          <a:ext cx="0" cy="0"/>
+          <a:chOff x="0" y="0"/>
+          <a:chExt cx="0" cy="0"/>
+        </a:xfrm>
+      </p:grpSpPr>
+      <p:sp>
+        <p:nvSpPr>
+          <p:cNvPr id="2" name="Date Placeholder 1"/>
+          <p:cNvSpPr>
+            <a:spLocks noGrp="1"/>
+          </p:cNvSpPr>
+          <p:nvPr>
+            <p:ph type="dt" sz="half" idx="10"/>
+          </p:nvPr>
+        </p:nvSpPr>
+        <p:spPr/>
+        <p:txBody>
+          <a:bodyPr/>
+          <a:lstStyle/>
+          <a:p>
+            <a:fld id="{B61BEF0D-F0BB-DE4B-95CE-6DB70DBA9567}" type="datetimeFigureOut">
+              <a:rPr lang="en-US" dirty="0"/>
+              <a:pPr/>
+              <a:t>10/3/2026</a:t>
+            </a:fld>
+            <a:endParaRPr lang="en-US" dirty="0"/>
+          </a:p>
+        </p:txBody>
+      </p:sp>
+      <p:sp>
+        <p:nvSpPr>
+          <p:cNvPr id="3" name="Footer Placeholder 2"/>
+          <p:cNvSpPr>
+            <a:spLocks noGrp="1"/>
+          </p:cNvSpPr>
+          <p:nvPr>
+            <p:ph type="ftr" sz="quarter" idx="11"/>
+          </p:nvPr>
+        </p:nvSpPr>
+        <p:spPr/>
+        <p:txBody>
+          <a:bodyPr/>
+          <a:lstStyle/>
+          <a:p>
+            <a:endParaRPr lang="en-US" dirty="0"/>
+          </a:p>
+        </p:txBody>
+      </p:sp>
+      <p:sp>
+        <p:nvSpPr>
+          <p:cNvPr id="4" name="Slide Number Placeholder 3"/>
+          <p:cNvSpPr>
+            <a:spLocks noGrp="1"/>
+          </p:cNvSpPr>
+          <p:nvPr>
+            <p:ph type="sldNum" sz="quarter" idx="12"/>
+          </p:nvPr>
+        </p:nvSpPr>
+        <p:spPr/>
+        <p:txBody>
+          <a:bodyPr/>
+          <a:lstStyle/>
+          <a:p>
+            <a:fld id="{D57F1E4F-1CFF-5643-939E-217C01CDF565}" type="slidenum">
+              <a:rPr lang="en-US" dirty="0"/>
+              <a:pPr/>
+              <a:t>‹#›</a:t>
+            </a:fld>
+            <a:endParaRPr lang="en-US" dirty="0"/>
+          </a:p>
+        </p:txBody>
+      </p:sp>
+    </p:spTree>
+    <p:extLst>
+      <p:ext uri="{BB962C8B-B14F-4D97-AF65-F5344CB8AC3E}">
+        <p14:creationId xmlns:p14="http://schemas.microsoft.com/office/powerpoint/2010/main" val="3240533915"/>
+      </p:ext>
+    </p:extLst>
+  </p:cSld>
+  <p:clrMapOvr>
+    <a:masterClrMapping/>
+  </p:clrMapOvr>
+  <p:hf sldNum="0" hdr="0" ftr="0" dt="0"/>
+</p:sldLayout>
+</file>
+
+<file path=ppt/slideLayouts/slideLayout8.xml><?xml version="1.0" encoding="utf-8"?>
+<p:sldLayout xmlns:a="http://schemas.openxmlformats.org/drawingml/2006/main" xmlns:r="http://schemas.openxmlformats.org/officeDocument/2006/relationships" xmlns:p="http://schemas.openxmlformats.org/presentationml/2006/main" type="objTx" preserve="1">
+  <p:cSld name="Content with Caption">
+    <p:spTree>
+      <p:nvGrpSpPr>
+        <p:cNvPr id="1" name=""/>
+        <p:cNvGrpSpPr/>
+        <p:nvPr/>
+      </p:nvGrpSpPr>
+      <p:grpSpPr>
+        <a:xfrm>
+          <a:off x="0" y="0"/>
+          <a:ext cx="0" cy="0"/>
+          <a:chOff x="0" y="0"/>
+          <a:chExt cx="0" cy="0"/>
+        </a:xfrm>
+      </p:grpSpPr>
+      <p:sp>
+        <p:nvSpPr>
+          <p:cNvPr id="2" name="Title 1"/>
+          <p:cNvSpPr>
+            <a:spLocks noGrp="1"/>
+          </p:cNvSpPr>
+          <p:nvPr>
+            <p:ph type="title"/>
+          </p:nvPr>
+        </p:nvSpPr>
+        <p:spPr>
+          <a:xfrm>
+            <a:off x="1293811" y="1388534"/>
+            <a:ext cx="3718455" cy="1371600"/>
+          </a:xfrm>
+        </p:spPr>
+        <p:txBody>
+          <a:bodyPr anchor="b">
+            <a:normAutofit/>
+          </a:bodyPr>
+          <a:lstStyle>
+            <a:lvl1pPr algn="ctr">
+              <a:defRPr sz="2400" b="0"/>
+            </a:lvl1pPr>
+          </a:lstStyle>
+          <a:p>
+            <a:r>
+              <a:rPr lang="en-US" smtClean="0"/>
+              <a:t>Click to edit Master title style</a:t>
+            </a:r>
+            <a:endParaRPr lang="en-US" dirty="0"/>
+          </a:p>
+        </p:txBody>
+      </p:sp>
+      <p:sp>
+        <p:nvSpPr>
+          <p:cNvPr id="3" name="Content Placeholder 2"/>
+          <p:cNvSpPr>
+            <a:spLocks noGrp="1"/>
+          </p:cNvSpPr>
+          <p:nvPr>
+            <p:ph idx="1"/>
+          </p:nvPr>
+        </p:nvSpPr>
+        <p:spPr>
+          <a:xfrm>
+            <a:off x="5418668" y="982131"/>
+            <a:ext cx="5469466" cy="4893735"/>
+          </a:xfrm>
+        </p:spPr>
+        <p:txBody>
+          <a:bodyPr anchor="ctr">
+            <a:normAutofit/>
+          </a:bodyPr>
+          <a:lstStyle/>
+          <a:p>
+            <a:pPr lvl="0"/>
+            <a:r>
+              <a:rPr lang="en-US" smtClean="0"/>
+              <a:t>Click to edit Master text styles</a:t>
+            </a:r>
+          </a:p>
+          <a:p>
+            <a:pPr lvl="1"/>
+            <a:r>
+              <a:rPr lang="en-US" smtClean="0"/>
+              <a:t>Second level</a:t>
+            </a:r>
+          </a:p>
+          <a:p>
+            <a:pPr lvl="2"/>
+            <a:r>
+              <a:rPr lang="en-US" smtClean="0"/>
+              <a:t>Third level</a:t>
+            </a:r>
+          </a:p>
+          <a:p>
+            <a:pPr lvl="3"/>
+            <a:r>
+              <a:rPr lang="en-US" smtClean="0"/>
+              <a:t>Fourth level</a:t>
+            </a:r>
+          </a:p>
+          <a:p>
+            <a:pPr lvl="4"/>
+            <a:r>
+              <a:rPr lang="en-US" smtClean="0"/>
+              <a:t>Fifth level</a:t>
+            </a:r>
+            <a:endParaRPr lang="en-US" dirty="0"/>
+          </a:p>
+        </p:txBody>
+      </p:sp>
+      <p:sp>
+        <p:nvSpPr>
+          <p:cNvPr id="4" name="Text Placeholder 3"/>
+          <p:cNvSpPr>
+            <a:spLocks noGrp="1"/>
+          </p:cNvSpPr>
+          <p:nvPr>
+            <p:ph type="body" sz="half" idx="2"/>
+          </p:nvPr>
+        </p:nvSpPr>
+        <p:spPr>
+          <a:xfrm>
+            <a:off x="1293811" y="3031065"/>
+            <a:ext cx="3718455" cy="2438404"/>
+          </a:xfrm>
+        </p:spPr>
+        <p:txBody>
+          <a:bodyPr anchor="t">
+            <a:normAutofit/>
+          </a:bodyPr>
+          <a:lstStyle>
+            <a:lvl1pPr marL="0" indent="0" algn="ctr">
+              <a:buNone/>
+              <a:defRPr sz="1600"/>
+            </a:lvl1pPr>
+            <a:lvl2pPr marL="457200" indent="0">
+              <a:buNone/>
+              <a:defRPr sz="1200"/>
+            </a:lvl2pPr>
+            <a:lvl3pPr marL="914400" indent="0">
+              <a:buNone/>
+              <a:defRPr sz="1000"/>
+            </a:lvl3pPr>
+            <a:lvl4pPr marL="1371600" indent="0">
+              <a:buNone/>
+              <a:defRPr sz="900"/>
+            </a:lvl4pPr>
+            <a:lvl5pPr marL="1828800" indent="0">
+              <a:buNone/>
+              <a:defRPr sz="900"/>
+            </a:lvl5pPr>
+            <a:lvl6pPr marL="2286000" indent="0">
+              <a:buNone/>
+              <a:defRPr sz="900"/>
+            </a:lvl6pPr>
+            <a:lvl7pPr marL="2743200" indent="0">
+              <a:buNone/>
+              <a:defRPr sz="900"/>
+            </a:lvl7pPr>
+            <a:lvl8pPr marL="3200400" indent="0">
+              <a:buNone/>
+              <a:defRPr sz="900"/>
+            </a:lvl8pPr>
+            <a:lvl9pPr marL="3657600" indent="0">
+              <a:buNone/>
+              <a:defRPr sz="900"/>
+            </a:lvl9pPr>
+          </a:lstStyle>
+          <a:p>
+            <a:pPr lvl="0"/>
+            <a:r>
+              <a:rPr lang="en-US" smtClean="0"/>
+              <a:t>Click to edit Master text styles</a:t>
+            </a:r>
+          </a:p>
+        </p:txBody>
+      </p:sp>
+      <p:sp>
+        <p:nvSpPr>
+          <p:cNvPr id="5" name="Date Placeholder 4"/>
+          <p:cNvSpPr>
+            <a:spLocks noGrp="1"/>
+          </p:cNvSpPr>
+          <p:nvPr>
+            <p:ph type="dt" sz="half" idx="10"/>
+          </p:nvPr>
+        </p:nvSpPr>
+        <p:spPr/>
+        <p:txBody>
+          <a:bodyPr/>
+          <a:lstStyle/>
+          <a:p>
+            <a:fld id="{B61BEF0D-F0BB-DE4B-95CE-6DB70DBA9567}" type="datetimeFigureOut">
+              <a:rPr lang="en-US" dirty="0"/>
+              <a:pPr/>
+              <a:t>10/3/2026</a:t>
+            </a:fld>
+            <a:endParaRPr lang="en-US" dirty="0"/>
+          </a:p>
+        </p:txBody>
+      </p:sp>
+      <p:sp>
+        <p:nvSpPr>
+          <p:cNvPr id="6" name="Footer Placeholder 5"/>
+          <p:cNvSpPr>
+            <a:spLocks noGrp="1"/>
+          </p:cNvSpPr>
+          <p:nvPr>
+            <p:ph type="ftr" sz="quarter" idx="11"/>
+          </p:nvPr>
+        </p:nvSpPr>
+        <p:spPr/>
+        <p:txBody>
+          <a:bodyPr/>
+          <a:lstStyle/>
+          <a:p>
+            <a:endParaRPr lang="en-US" dirty="0"/>
+          </a:p>
+        </p:txBody>
+      </p:sp>
+      <p:sp>
+        <p:nvSpPr>
+          <p:cNvPr id="7" name="Slide Number Placeholder 6"/>
+          <p:cNvSpPr>
+            <a:spLocks noGrp="1"/>
+          </p:cNvSpPr>
+          <p:nvPr>
+            <p:ph type="sldNum" sz="quarter" idx="12"/>
+          </p:nvPr>
+        </p:nvSpPr>
+        <p:spPr/>
+        <p:txBody>
+          <a:bodyPr/>
+          <a:lstStyle/>
+          <a:p>
+            <a:fld id="{D57F1E4F-1CFF-5643-939E-217C01CDF565}" type="slidenum">
+              <a:rPr lang="en-US" dirty="0"/>
+              <a:pPr/>
+              <a:t>‹#›</a:t>
+            </a:fld>
+            <a:endParaRPr lang="en-US" dirty="0"/>
+          </a:p>
+        </p:txBody>
+      </p:sp>
+      <p:cxnSp>
+        <p:nvCxnSpPr>
+          <p:cNvPr id="16" name="Straight Connector 15"/>
+          <p:cNvCxnSpPr/>
+          <p:nvPr/>
+        </p:nvCxnSpPr>
+        <p:spPr>
+          <a:xfrm>
+            <a:off x="1396169" y="2912533"/>
+            <a:ext cx="3514498" cy="0"/>
+          </a:xfrm>
+          <a:prstGeom prst="line">
+            <a:avLst/>
+          </a:prstGeom>
+          <a:ln w="15875"/>
+        </p:spPr>
+        <p:style>
+          <a:lnRef idx="2">
+            <a:schemeClr val="accent1"/>
+          </a:lnRef>
+          <a:fillRef idx="0">
+            <a:schemeClr val="accent1"/>
+          </a:fillRef>
+          <a:effectRef idx="1">
+            <a:schemeClr val="accent1"/>
+          </a:effectRef>
+          <a:fontRef idx="minor">
+            <a:schemeClr val="tx1"/>
+          </a:fontRef>
+        </p:style>
+      </p:cxnSp>
+    </p:spTree>
+    <p:extLst>
+      <p:ext uri="{BB962C8B-B14F-4D97-AF65-F5344CB8AC3E}">
+        <p14:creationId xmlns:p14="http://schemas.microsoft.com/office/powerpoint/2010/main" val="1545161546"/>
+      </p:ext>
+    </p:extLst>
+  </p:cSld>
+  <p:clrMapOvr>
+    <a:masterClrMapping/>
+  </p:clrMapOvr>
+  <p:hf sldNum="0" hdr="0" ftr="0" dt="0"/>
+</p:sldLayout>
+</file>
+
+<file path=ppt/slideLayouts/slideLayout9.xml><?xml version="1.0" encoding="utf-8"?>
+<p:sldLayout xmlns:a="http://schemas.openxmlformats.org/drawingml/2006/main" xmlns:r="http://schemas.openxmlformats.org/officeDocument/2006/relationships" xmlns:p="http://schemas.openxmlformats.org/presentationml/2006/main" type="picTx" preserve="1">
+  <p:cSld name="Picture with Caption">
+    <p:spTree>
+      <p:nvGrpSpPr>
+        <p:cNvPr id="1" name=""/>
+        <p:cNvGrpSpPr/>
+        <p:nvPr/>
+      </p:nvGrpSpPr>
+      <p:grpSpPr>
+        <a:xfrm>
+          <a:off x="0" y="0"/>
+          <a:ext cx="0" cy="0"/>
+          <a:chOff x="0" y="0"/>
+          <a:chExt cx="0" cy="0"/>
+        </a:xfrm>
+      </p:grpSpPr>
+      <p:sp>
+        <p:nvSpPr>
+          <p:cNvPr id="2" name="Title 1"/>
+          <p:cNvSpPr>
+            <a:spLocks noGrp="1"/>
+          </p:cNvSpPr>
+          <p:nvPr>
+            <p:ph type="title"/>
+          </p:nvPr>
+        </p:nvSpPr>
+        <p:spPr>
+          <a:xfrm>
+            <a:off x="1295399" y="1883832"/>
+            <a:ext cx="6241816" cy="1371600"/>
+          </a:xfrm>
+        </p:spPr>
+        <p:txBody>
+          <a:bodyPr anchor="b">
+            <a:normAutofit/>
+          </a:bodyPr>
+          <a:lstStyle>
+            <a:lvl1pPr algn="ctr">
+              <a:defRPr sz="2800" b="0"/>
+            </a:lvl1pPr>
+          </a:lstStyle>
+          <a:p>
+            <a:r>
+              <a:rPr lang="en-US" smtClean="0"/>
+              <a:t>Click to edit Master title style</a:t>
+            </a:r>
+            <a:endParaRPr lang="en-US" dirty="0"/>
+          </a:p>
+        </p:txBody>
+      </p:sp>
+      <p:sp>
+        <p:nvSpPr>
+          <p:cNvPr id="17" name="Picture Placeholder 2"/>
+          <p:cNvSpPr>
+            <a:spLocks noGrp="1" noChangeAspect="1"/>
+          </p:cNvSpPr>
+          <p:nvPr>
+            <p:ph type="pic" idx="1"/>
+          </p:nvPr>
+        </p:nvSpPr>
+        <p:spPr>
+          <a:xfrm>
+            <a:off x="8094831" y="1041400"/>
+            <a:ext cx="3063347" cy="4775200"/>
+          </a:xfrm>
+          <a:prstGeom prst="roundRect">
+            <a:avLst>
+              <a:gd name="adj" fmla="val 0"/>
+            </a:avLst>
+          </a:prstGeom>
+          <a:ln w="57150" cmpd="thickThin">
+            <a:solidFill>
+              <a:schemeClr val="tx1">
+                <a:lumMod val="50000"/>
+                <a:lumOff val="50000"/>
+              </a:schemeClr>
+            </a:solidFill>
+            <a:miter lim="800000"/>
+          </a:ln>
+          <a:effectLst>
+            <a:innerShdw blurRad="57150" dist="38100" dir="14460000">
+              <a:srgbClr val="000000">
+                <a:alpha val="70000"/>
+              </a:srgbClr>
+            </a:innerShdw>
+          </a:effectLst>
+        </p:spPr>
+        <p:txBody>
+          <a:bodyPr anchor="t">
+            <a:normAutofit/>
+          </a:bodyPr>
+          <a:lstStyle>
+            <a:lvl1pPr marL="0" indent="0" algn="ctr">
+              <a:buNone/>
+              <a:defRPr sz="1600"/>
+            </a:lvl1pPr>
+            <a:lvl2pPr marL="457200" indent="0">
+              <a:buNone/>
+              <a:defRPr sz="1600"/>
+            </a:lvl2pPr>
+            <a:lvl3pPr marL="914400" indent="0">
+              <a:buNone/>
+              <a:defRPr sz="1600"/>
+            </a:lvl3pPr>
+            <a:lvl4pPr marL="1371600" indent="0">
+              <a:buNone/>
+              <a:defRPr sz="1600"/>
+            </a:lvl4pPr>
+            <a:lvl5pPr marL="1828800" indent="0">
+              <a:buNone/>
+              <a:defRPr sz="1600"/>
+            </a:lvl5pPr>
+            <a:lvl6pPr marL="2286000" indent="0">
+              <a:buNone/>
+              <a:defRPr sz="1600"/>
+            </a:lvl6pPr>
+            <a:lvl7pPr marL="2743200" indent="0">
+              <a:buNone/>
+              <a:defRPr sz="1600"/>
+            </a:lvl7pPr>
+            <a:lvl8pPr marL="3200400" indent="0">
+              <a:buNone/>
+              <a:defRPr sz="1600"/>
+            </a:lvl8pPr>
+            <a:lvl9pPr marL="3657600" indent="0">
+              <a:buNone/>
+              <a:defRPr sz="1600"/>
+            </a:lvl9pPr>
+          </a:lstStyle>
+          <a:p>
+            <a:r>
+              <a:rPr lang="en-US" smtClean="0"/>
+              <a:t>Click icon to add picture</a:t>
+            </a:r>
+            <a:endParaRPr lang="en-US" dirty="0"/>
+          </a:p>
+        </p:txBody>
+      </p:sp>
+      <p:sp>
+        <p:nvSpPr>
+          <p:cNvPr id="4" name="Text Placeholder 3"/>
+          <p:cNvSpPr>
+            <a:spLocks noGrp="1"/>
+          </p:cNvSpPr>
+          <p:nvPr>
+            <p:ph type="body" sz="half" idx="2"/>
+          </p:nvPr>
+        </p:nvSpPr>
+        <p:spPr>
+          <a:xfrm>
+            <a:off x="1295399" y="3255432"/>
+            <a:ext cx="6241816" cy="1828800"/>
+          </a:xfrm>
+        </p:spPr>
+        <p:txBody>
+          <a:bodyPr anchor="t">
+            <a:normAutofit/>
+          </a:bodyPr>
+          <a:lstStyle>
+            <a:lvl1pPr marL="0" indent="0" algn="ctr">
+              <a:buNone/>
+              <a:defRPr sz="1800"/>
+            </a:lvl1pPr>
+            <a:lvl2pPr marL="457200" indent="0">
+              <a:buNone/>
+              <a:defRPr sz="1200"/>
+            </a:lvl2pPr>
+            <a:lvl3pPr marL="914400" indent="0">
+              <a:buNone/>
+              <a:defRPr sz="1000"/>
+            </a:lvl3pPr>
+            <a:lvl4pPr marL="1371600" indent="0">
+              <a:buNone/>
+              <a:defRPr sz="900"/>
+            </a:lvl4pPr>
+            <a:lvl5pPr marL="1828800" indent="0">
+              <a:buNone/>
+              <a:defRPr sz="900"/>
+            </a:lvl5pPr>
+            <a:lvl6pPr marL="2286000" indent="0">
+              <a:buNone/>
+              <a:defRPr sz="900"/>
+            </a:lvl6pPr>
+            <a:lvl7pPr marL="2743200" indent="0">
+              <a:buNone/>
+              <a:defRPr sz="900"/>
+            </a:lvl7pPr>
+            <a:lvl8pPr marL="3200400" indent="0">
+              <a:buNone/>
+              <a:defRPr sz="900"/>
+            </a:lvl8pPr>
+            <a:lvl9pPr marL="3657600" indent="0">
+              <a:buNone/>
+              <a:defRPr sz="900"/>
+            </a:lvl9pPr>
+          </a:lstStyle>
+          <a:p>
+            <a:pPr lvl="0"/>
+            <a:r>
+              <a:rPr lang="en-US" smtClean="0"/>
+              <a:t>Click to edit Master text styles</a:t>
+            </a:r>
+          </a:p>
+        </p:txBody>
+      </p:sp>
+      <p:sp>
+        <p:nvSpPr>
+          <p:cNvPr id="5" name="Date Placeholder 4"/>
+          <p:cNvSpPr>
+            <a:spLocks noGrp="1"/>
+          </p:cNvSpPr>
+          <p:nvPr>
+            <p:ph type="dt" sz="half" idx="10"/>
+          </p:nvPr>
+        </p:nvSpPr>
+        <p:spPr/>
+        <p:txBody>
+          <a:bodyPr/>
+          <a:lstStyle/>
+          <a:p>
+            <a:fld id="{B61BEF0D-F0BB-DE4B-95CE-6DB70DBA9567}" type="datetimeFigureOut">
+              <a:rPr lang="en-US" dirty="0"/>
+              <a:pPr/>
+              <a:t>10/3/2026</a:t>
+            </a:fld>
+            <a:endParaRPr lang="en-US" dirty="0"/>
+          </a:p>
+        </p:txBody>
+      </p:sp>
+      <p:sp>
+        <p:nvSpPr>
+          <p:cNvPr id="6" name="Footer Placeholder 5"/>
+          <p:cNvSpPr>
+            <a:spLocks noGrp="1"/>
+          </p:cNvSpPr>
+          <p:nvPr>
+            <p:ph type="ftr" sz="quarter" idx="11"/>
+          </p:nvPr>
+        </p:nvSpPr>
+        <p:spPr/>
+        <p:txBody>
+          <a:bodyPr/>
+          <a:lstStyle/>
+          <a:p>
+            <a:endParaRPr lang="en-US" dirty="0"/>
+          </a:p>
+        </p:txBody>
+      </p:sp>
+      <p:sp>
+        <p:nvSpPr>
+          <p:cNvPr id="7" name="Slide Number Placeholder 6"/>
+          <p:cNvSpPr>
+            <a:spLocks noGrp="1"/>
+          </p:cNvSpPr>
+          <p:nvPr>
+            <p:ph type="sldNum" sz="quarter" idx="12"/>
+          </p:nvPr>
+        </p:nvSpPr>
+        <p:spPr/>
+        <p:txBody>
+          <a:bodyPr/>
+          <a:lstStyle/>
+          <a:p>
+            <a:fld id="{D57F1E4F-1CFF-5643-939E-217C01CDF565}" type="slidenum">
+              <a:rPr lang="en-US" dirty="0"/>
+              <a:pPr/>
+              <a:t>‹#›</a:t>
+            </a:fld>
+            <a:endParaRPr lang="en-US" dirty="0"/>
+          </a:p>
+        </p:txBody>
+      </p:sp>
+    </p:spTree>
+    <p:extLst>
+      <p:ext uri="{BB962C8B-B14F-4D97-AF65-F5344CB8AC3E}">
+        <p14:creationId xmlns:p14="http://schemas.microsoft.com/office/powerpoint/2010/main" val="4125158875"/>
+      </p:ext>
+    </p:extLst>
+  </p:cSld>
+  <p:clrMapOvr>
+    <a:masterClrMapping/>
+  </p:clrMapOvr>
+  <p:hf sldNum="0" hdr="0" ftr="0" dt="0"/>
+</p:sldLayout>
+</file>
+
 <file path=ppt/slideMasters/slideMaster1.xml><?xml version="1.0" encoding="utf-8"?>
 <p:sldMaster xmlns:a="http://schemas.openxmlformats.org/drawingml/2006/main" xmlns:r="http://schemas.openxmlformats.org/officeDocument/2006/relationships" xmlns:p="http://schemas.openxmlformats.org/presentationml/2006/main">
   <p:cSld>
     <p:bg>
-      <p:bgRef idx="1001">
+      <p:bgRef idx="1003">
         <a:schemeClr val="bg1"/>
       </p:bgRef>
     </p:bg>
@@ -1274,163 +6267,700 @@
           <a:chExt cx="0" cy="0"/>
         </a:xfrm>
       </p:grpSpPr>
+      <p:grpSp>
+        <p:nvGrpSpPr>
+          <p:cNvPr id="7" name="Group 6"/>
+          <p:cNvGrpSpPr/>
+          <p:nvPr/>
+        </p:nvGrpSpPr>
+        <p:grpSpPr>
+          <a:xfrm>
+            <a:off x="-15736" y="0"/>
+            <a:ext cx="12229962" cy="6856214"/>
+            <a:chOff x="-15736" y="0"/>
+            <a:chExt cx="12229962" cy="6856214"/>
+          </a:xfrm>
+        </p:grpSpPr>
+        <p:pic>
+          <p:nvPicPr>
+            <p:cNvPr id="8" name="Picture 7" descr="HD-PanelContent.png"/>
+            <p:cNvPicPr>
+              <a:picLocks noChangeAspect="1"/>
+            </p:cNvPicPr>
+            <p:nvPr/>
+          </p:nvPicPr>
+          <p:blipFill>
+            <a:blip r:embed="rId21">
+              <a:extLst>
+                <a:ext uri="{28A0092B-C50C-407E-A947-70E740481C1C}">
+                  <a14:useLocalDpi xmlns:a14="http://schemas.microsoft.com/office/drawing/2010/main" val="0"/>
+                </a:ext>
+              </a:extLst>
+            </a:blip>
+            <a:stretch>
+              <a:fillRect/>
+            </a:stretch>
+          </p:blipFill>
+          <p:spPr>
+            <a:xfrm>
+              <a:off x="0" y="0"/>
+              <a:ext cx="12188825" cy="6856214"/>
+            </a:xfrm>
+            <a:prstGeom prst="rect">
+              <a:avLst/>
+            </a:prstGeom>
+          </p:spPr>
+        </p:pic>
+        <p:sp>
+          <p:nvSpPr>
+            <p:cNvPr id="9" name="Rectangle 8"/>
+            <p:cNvSpPr/>
+            <p:nvPr/>
+          </p:nvSpPr>
+          <p:spPr>
+            <a:xfrm>
+              <a:off x="608012" y="609600"/>
+              <a:ext cx="10972800" cy="5638800"/>
+            </a:xfrm>
+            <a:prstGeom prst="rect">
+              <a:avLst/>
+            </a:prstGeom>
+            <a:noFill/>
+            <a:ln w="15875" cap="flat">
+              <a:miter lim="800000"/>
+            </a:ln>
+          </p:spPr>
+          <p:style>
+            <a:lnRef idx="1">
+              <a:schemeClr val="accent1"/>
+            </a:lnRef>
+            <a:fillRef idx="3">
+              <a:schemeClr val="accent1"/>
+            </a:fillRef>
+            <a:effectRef idx="2">
+              <a:schemeClr val="accent1"/>
+            </a:effectRef>
+            <a:fontRef idx="minor">
+              <a:schemeClr val="lt1"/>
+            </a:fontRef>
+          </p:style>
+        </p:sp>
+        <p:pic>
+          <p:nvPicPr>
+            <p:cNvPr id="10" name="Picture 9" descr="HDRibbonContent-UniformTrim.png"/>
+            <p:cNvPicPr>
+              <a:picLocks noChangeAspect="1"/>
+            </p:cNvPicPr>
+            <p:nvPr/>
+          </p:nvPicPr>
+          <p:blipFill rotWithShape="1">
+            <a:blip r:embed="rId22">
+              <a:extLst>
+                <a:ext uri="{28A0092B-C50C-407E-A947-70E740481C1C}">
+                  <a14:useLocalDpi xmlns:a14="http://schemas.microsoft.com/office/drawing/2010/main" val="0"/>
+                </a:ext>
+              </a:extLst>
+            </a:blip>
+            <a:srcRect/>
+            <a:stretch/>
+          </p:blipFill>
+          <p:spPr>
+            <a:xfrm>
+              <a:off x="-15736" y="3153832"/>
+              <a:ext cx="777240" cy="606425"/>
+            </a:xfrm>
+            <a:prstGeom prst="rect">
+              <a:avLst/>
+            </a:prstGeom>
+          </p:spPr>
+        </p:pic>
+        <p:pic>
+          <p:nvPicPr>
+            <p:cNvPr id="11" name="Picture 10" descr="HDRibbonContent-UniformTrim.png"/>
+            <p:cNvPicPr>
+              <a:picLocks noChangeAspect="1"/>
+            </p:cNvPicPr>
+            <p:nvPr/>
+          </p:nvPicPr>
+          <p:blipFill rotWithShape="1">
+            <a:blip r:embed="rId22">
+              <a:extLst>
+                <a:ext uri="{28A0092B-C50C-407E-A947-70E740481C1C}">
+                  <a14:useLocalDpi xmlns:a14="http://schemas.microsoft.com/office/drawing/2010/main" val="0"/>
+                </a:ext>
+              </a:extLst>
+            </a:blip>
+            <a:srcRect/>
+            <a:stretch/>
+          </p:blipFill>
+          <p:spPr>
+            <a:xfrm>
+              <a:off x="11436986" y="3153832"/>
+              <a:ext cx="777240" cy="606425"/>
+            </a:xfrm>
+            <a:prstGeom prst="rect">
+              <a:avLst/>
+            </a:prstGeom>
+          </p:spPr>
+        </p:pic>
+      </p:grpSp>
+      <p:sp>
+        <p:nvSpPr>
+          <p:cNvPr id="2" name="Title Placeholder 1"/>
+          <p:cNvSpPr>
+            <a:spLocks noGrp="1"/>
+          </p:cNvSpPr>
+          <p:nvPr>
+            <p:ph type="title"/>
+          </p:nvPr>
+        </p:nvSpPr>
+        <p:spPr>
+          <a:xfrm>
+            <a:off x="1295402" y="982132"/>
+            <a:ext cx="9601196" cy="1303867"/>
+          </a:xfrm>
+          <a:prstGeom prst="rect">
+            <a:avLst/>
+          </a:prstGeom>
+          <a:effectLst/>
+        </p:spPr>
+        <p:txBody>
+          <a:bodyPr vert="horz" lIns="91440" tIns="45720" rIns="91440" bIns="45720" rtlCol="0" anchor="ctr">
+            <a:normAutofit/>
+          </a:bodyPr>
+          <a:lstStyle/>
+          <a:p>
+            <a:r>
+              <a:rPr lang="en-US" smtClean="0"/>
+              <a:t>Click to edit Master title style</a:t>
+            </a:r>
+            <a:endParaRPr lang="en-US" dirty="0"/>
+          </a:p>
+        </p:txBody>
+      </p:sp>
+      <p:sp>
+        <p:nvSpPr>
+          <p:cNvPr id="3" name="Text Placeholder 2"/>
+          <p:cNvSpPr>
+            <a:spLocks noGrp="1"/>
+          </p:cNvSpPr>
+          <p:nvPr>
+            <p:ph type="body" idx="1"/>
+          </p:nvPr>
+        </p:nvSpPr>
+        <p:spPr>
+          <a:xfrm>
+            <a:off x="1295401" y="2556932"/>
+            <a:ext cx="9601196" cy="3318936"/>
+          </a:xfrm>
+          <a:prstGeom prst="rect">
+            <a:avLst/>
+          </a:prstGeom>
+        </p:spPr>
+        <p:txBody>
+          <a:bodyPr vert="horz" lIns="91440" tIns="45720" rIns="91440" bIns="45720" rtlCol="0" anchor="t">
+            <a:normAutofit/>
+          </a:bodyPr>
+          <a:lstStyle/>
+          <a:p>
+            <a:pPr lvl="0"/>
+            <a:r>
+              <a:rPr lang="en-US" smtClean="0"/>
+              <a:t>Click to edit Master text styles</a:t>
+            </a:r>
+          </a:p>
+          <a:p>
+            <a:pPr lvl="1"/>
+            <a:r>
+              <a:rPr lang="en-US" smtClean="0"/>
+              <a:t>Second level</a:t>
+            </a:r>
+          </a:p>
+          <a:p>
+            <a:pPr lvl="2"/>
+            <a:r>
+              <a:rPr lang="en-US" smtClean="0"/>
+              <a:t>Third level</a:t>
+            </a:r>
+          </a:p>
+          <a:p>
+            <a:pPr lvl="3"/>
+            <a:r>
+              <a:rPr lang="en-US" smtClean="0"/>
+              <a:t>Fourth level</a:t>
+            </a:r>
+          </a:p>
+          <a:p>
+            <a:pPr lvl="4"/>
+            <a:r>
+              <a:rPr lang="en-US" smtClean="0"/>
+              <a:t>Fifth level</a:t>
+            </a:r>
+            <a:endParaRPr lang="en-US" dirty="0"/>
+          </a:p>
+        </p:txBody>
+      </p:sp>
+      <p:sp>
+        <p:nvSpPr>
+          <p:cNvPr id="4" name="Date Placeholder 3"/>
+          <p:cNvSpPr>
+            <a:spLocks noGrp="1"/>
+          </p:cNvSpPr>
+          <p:nvPr>
+            <p:ph type="dt" sz="half" idx="2"/>
+          </p:nvPr>
+        </p:nvSpPr>
+        <p:spPr>
+          <a:xfrm>
+            <a:off x="8677501" y="5969000"/>
+            <a:ext cx="1600200" cy="279400"/>
+          </a:xfrm>
+          <a:prstGeom prst="rect">
+            <a:avLst/>
+          </a:prstGeom>
+        </p:spPr>
+        <p:txBody>
+          <a:bodyPr vert="horz" lIns="91440" tIns="45720" rIns="91440" bIns="45720" rtlCol="0" anchor="ctr"/>
+          <a:lstStyle>
+            <a:lvl1pPr algn="r">
+              <a:defRPr sz="1000" b="0" i="0">
+                <a:solidFill>
+                  <a:schemeClr val="tx1"/>
+                </a:solidFill>
+                <a:effectLst/>
+                <a:latin typeface="+mn-lt"/>
+              </a:defRPr>
+            </a:lvl1pPr>
+          </a:lstStyle>
+          <a:p>
+            <a:fld id="{B61BEF0D-F0BB-DE4B-95CE-6DB70DBA9567}" type="datetimeFigureOut">
+              <a:rPr lang="en-US" dirty="0"/>
+              <a:pPr/>
+              <a:t>10/3/2026</a:t>
+            </a:fld>
+            <a:endParaRPr lang="en-US" dirty="0"/>
+          </a:p>
+        </p:txBody>
+      </p:sp>
+      <p:sp>
+        <p:nvSpPr>
+          <p:cNvPr id="5" name="Footer Placeholder 4"/>
+          <p:cNvSpPr>
+            <a:spLocks noGrp="1"/>
+          </p:cNvSpPr>
+          <p:nvPr>
+            <p:ph type="ftr" sz="quarter" idx="3"/>
+          </p:nvPr>
+        </p:nvSpPr>
+        <p:spPr>
+          <a:xfrm>
+            <a:off x="1295401" y="5969000"/>
+            <a:ext cx="7305900" cy="279400"/>
+          </a:xfrm>
+          <a:prstGeom prst="rect">
+            <a:avLst/>
+          </a:prstGeom>
+        </p:spPr>
+        <p:txBody>
+          <a:bodyPr vert="horz" lIns="91440" tIns="45720" rIns="91440" bIns="45720" rtlCol="0" anchor="ctr"/>
+          <a:lstStyle>
+            <a:lvl1pPr algn="l">
+              <a:defRPr sz="1000" b="0" i="0">
+                <a:solidFill>
+                  <a:schemeClr val="tx1"/>
+                </a:solidFill>
+                <a:effectLst/>
+                <a:latin typeface="+mn-lt"/>
+              </a:defRPr>
+            </a:lvl1pPr>
+          </a:lstStyle>
+          <a:p>
+            <a:endParaRPr lang="en-US" dirty="0"/>
+          </a:p>
+        </p:txBody>
+      </p:sp>
+      <p:sp>
+        <p:nvSpPr>
+          <p:cNvPr id="6" name="Slide Number Placeholder 5"/>
+          <p:cNvSpPr>
+            <a:spLocks noGrp="1"/>
+          </p:cNvSpPr>
+          <p:nvPr>
+            <p:ph type="sldNum" sz="quarter" idx="4"/>
+          </p:nvPr>
+        </p:nvSpPr>
+        <p:spPr>
+          <a:xfrm>
+            <a:off x="10353901" y="5969000"/>
+            <a:ext cx="542697" cy="279400"/>
+          </a:xfrm>
+          <a:prstGeom prst="rect">
+            <a:avLst/>
+          </a:prstGeom>
+        </p:spPr>
+        <p:txBody>
+          <a:bodyPr vert="horz" lIns="91440" tIns="45720" rIns="91440" bIns="45720" rtlCol="0" anchor="ctr"/>
+          <a:lstStyle>
+            <a:lvl1pPr algn="r">
+              <a:defRPr sz="1000" b="0" i="0">
+                <a:solidFill>
+                  <a:schemeClr val="tx1"/>
+                </a:solidFill>
+                <a:effectLst/>
+                <a:latin typeface="+mn-lt"/>
+              </a:defRPr>
+            </a:lvl1pPr>
+          </a:lstStyle>
+          <a:p>
+            <a:fld id="{D57F1E4F-1CFF-5643-939E-217C01CDF565}" type="slidenum">
+              <a:rPr lang="en-US" dirty="0"/>
+              <a:pPr/>
+              <a:t>‹#›</a:t>
+            </a:fld>
+            <a:endParaRPr lang="en-US" dirty="0"/>
+          </a:p>
+        </p:txBody>
+      </p:sp>
     </p:spTree>
+    <p:extLst>
+      <p:ext uri="{BB962C8B-B14F-4D97-AF65-F5344CB8AC3E}">
+        <p14:creationId xmlns:p14="http://schemas.microsoft.com/office/powerpoint/2010/main" val="2014210776"/>
+      </p:ext>
+    </p:extLst>
   </p:cSld>
   <p:clrMap bg1="lt1" tx1="dk1" bg2="lt2" tx2="dk2" accent1="accent1" accent2="accent2" accent3="accent3" accent4="accent4" accent5="accent5" accent6="accent6" hlink="hlink" folHlink="folHlink"/>
   <p:sldLayoutIdLst>
-    <p:sldLayoutId id="2147483649" r:id="rId1"/>
-    <p:sldLayoutId id="2147483650" r:id="rId2"/>
-    <p:sldLayoutId id="2147483651" r:id="rId3"/>
+    <p:sldLayoutId id="2147483653" r:id="rId1"/>
+    <p:sldLayoutId id="2147483654" r:id="rId2"/>
+    <p:sldLayoutId id="2147483655" r:id="rId3"/>
+    <p:sldLayoutId id="2147483656" r:id="rId4"/>
+    <p:sldLayoutId id="2147483657" r:id="rId5"/>
+    <p:sldLayoutId id="2147483658" r:id="rId6"/>
+    <p:sldLayoutId id="2147483659" r:id="rId7"/>
+    <p:sldLayoutId id="2147483660" r:id="rId8"/>
+    <p:sldLayoutId id="2147483661" r:id="rId9"/>
+    <p:sldLayoutId id="2147483662" r:id="rId10"/>
+    <p:sldLayoutId id="2147483663" r:id="rId11"/>
+    <p:sldLayoutId id="2147483664" r:id="rId12"/>
+    <p:sldLayoutId id="2147483665" r:id="rId13"/>
+    <p:sldLayoutId id="2147483666" r:id="rId14"/>
+    <p:sldLayoutId id="2147483667" r:id="rId15"/>
+    <p:sldLayoutId id="2147483668" r:id="rId16"/>
+    <p:sldLayoutId id="2147483669" r:id="rId17"/>
+    <p:sldLayoutId id="2147483670" r:id="rId18"/>
+    <p:sldLayoutId id="2147483671" r:id="rId19"/>
   </p:sldLayoutIdLst>
   <p:hf sldNum="0" hdr="0" ftr="0" dt="0"/>
   <p:txStyles>
     <p:titleStyle>
-      <a:lvl1pPr algn="ctr" defTabSz="914400" rtl="0" eaLnBrk="1" latinLnBrk="0" hangingPunct="1">
+      <a:lvl1pPr algn="ctr" defTabSz="457200" rtl="0" eaLnBrk="1" latinLnBrk="0" hangingPunct="1">
         <a:spcBef>
           <a:spcPct val="0"/>
         </a:spcBef>
         <a:buNone/>
-        <a:defRPr sz="4400" kern="1200">
+        <a:defRPr sz="4400" kern="1200" cap="none">
+          <a:ln w="3175" cmpd="sng">
+            <a:noFill/>
+          </a:ln>
           <a:solidFill>
-            <a:schemeClr val="tx1"/>
+            <a:schemeClr val="tx1">
+              <a:lumMod val="85000"/>
+              <a:lumOff val="15000"/>
+            </a:schemeClr>
           </a:solidFill>
+          <a:effectLst/>
           <a:latin typeface="+mj-lt"/>
           <a:ea typeface="+mj-ea"/>
           <a:cs typeface="+mj-cs"/>
         </a:defRPr>
       </a:lvl1pPr>
+      <a:lvl2pPr eaLnBrk="1" hangingPunct="1">
+        <a:defRPr>
+          <a:solidFill>
+            <a:schemeClr val="tx2"/>
+          </a:solidFill>
+        </a:defRPr>
+      </a:lvl2pPr>
+      <a:lvl3pPr eaLnBrk="1" hangingPunct="1">
+        <a:defRPr>
+          <a:solidFill>
+            <a:schemeClr val="tx2"/>
+          </a:solidFill>
+        </a:defRPr>
+      </a:lvl3pPr>
+      <a:lvl4pPr eaLnBrk="1" hangingPunct="1">
+        <a:defRPr>
+          <a:solidFill>
+            <a:schemeClr val="tx2"/>
+          </a:solidFill>
+        </a:defRPr>
+      </a:lvl4pPr>
+      <a:lvl5pPr eaLnBrk="1" hangingPunct="1">
+        <a:defRPr>
+          <a:solidFill>
+            <a:schemeClr val="tx2"/>
+          </a:solidFill>
+        </a:defRPr>
+      </a:lvl5pPr>
+      <a:lvl6pPr eaLnBrk="1" hangingPunct="1">
+        <a:defRPr>
+          <a:solidFill>
+            <a:schemeClr val="tx2"/>
+          </a:solidFill>
+        </a:defRPr>
+      </a:lvl6pPr>
+      <a:lvl7pPr eaLnBrk="1" hangingPunct="1">
+        <a:defRPr>
+          <a:solidFill>
+            <a:schemeClr val="tx2"/>
+          </a:solidFill>
+        </a:defRPr>
+      </a:lvl7pPr>
+      <a:lvl8pPr eaLnBrk="1" hangingPunct="1">
+        <a:defRPr>
+          <a:solidFill>
+            <a:schemeClr val="tx2"/>
+          </a:solidFill>
+        </a:defRPr>
+      </a:lvl8pPr>
+      <a:lvl9pPr eaLnBrk="1" hangingPunct="1">
+        <a:defRPr>
+          <a:solidFill>
+            <a:schemeClr val="tx2"/>
+          </a:solidFill>
+        </a:defRPr>
+      </a:lvl9pPr>
     </p:titleStyle>
     <p:bodyStyle>
-      <a:lvl1pPr marL="342900" indent="-342900" algn="l" defTabSz="914400" rtl="0" eaLnBrk="1" latinLnBrk="0" hangingPunct="1">
+      <a:lvl1pPr marL="285750" indent="-285750" algn="l" defTabSz="457200" rtl="0" eaLnBrk="1" latinLnBrk="0" hangingPunct="1">
         <a:spcBef>
           <a:spcPct val="20000"/>
         </a:spcBef>
-        <a:buFont typeface="Arial" pitchFamily="34" charset="0"/>
+        <a:spcAft>
+          <a:spcPts val="600"/>
+        </a:spcAft>
+        <a:buClr>
+          <a:schemeClr val="accent1"/>
+        </a:buClr>
+        <a:buSzPct val="115000"/>
+        <a:buFont typeface="Arial"/>
         <a:buChar char="•"/>
-        <a:defRPr sz="3200" kern="1200">
+        <a:defRPr sz="2400" kern="1200" cap="none">
           <a:solidFill>
-            <a:schemeClr val="tx1"/>
+            <a:schemeClr val="tx1">
+              <a:lumMod val="85000"/>
+              <a:lumOff val="15000"/>
+            </a:schemeClr>
           </a:solidFill>
+          <a:effectLst/>
           <a:latin typeface="+mn-lt"/>
           <a:ea typeface="+mn-ea"/>
           <a:cs typeface="+mn-cs"/>
         </a:defRPr>
       </a:lvl1pPr>
-      <a:lvl2pPr marL="742950" indent="-285750" algn="l" defTabSz="914400" rtl="0" eaLnBrk="1" latinLnBrk="0" hangingPunct="1">
+      <a:lvl2pPr marL="742950" indent="-285750" algn="l" defTabSz="457200" rtl="0" eaLnBrk="1" latinLnBrk="0" hangingPunct="1">
         <a:spcBef>
           <a:spcPct val="20000"/>
         </a:spcBef>
-        <a:buFont typeface="Arial" pitchFamily="34" charset="0"/>
-        <a:buChar char="–"/>
-        <a:defRPr sz="2800" kern="1200">
+        <a:spcAft>
+          <a:spcPts val="600"/>
+        </a:spcAft>
+        <a:buClr>
+          <a:schemeClr val="accent1"/>
+        </a:buClr>
+        <a:buSzPct val="115000"/>
+        <a:buFont typeface="Arial"/>
+        <a:buChar char="•"/>
+        <a:defRPr sz="2000" kern="1200" cap="none">
           <a:solidFill>
-            <a:schemeClr val="tx1"/>
+            <a:schemeClr val="tx1">
+              <a:lumMod val="85000"/>
+              <a:lumOff val="15000"/>
+            </a:schemeClr>
           </a:solidFill>
+          <a:effectLst/>
           <a:latin typeface="+mn-lt"/>
           <a:ea typeface="+mn-ea"/>
           <a:cs typeface="+mn-cs"/>
         </a:defRPr>
       </a:lvl2pPr>
-      <a:lvl3pPr marL="1143000" indent="-228600" algn="l" defTabSz="914400" rtl="0" eaLnBrk="1" latinLnBrk="0" hangingPunct="1">
+      <a:lvl3pPr marL="1200150" indent="-285750" algn="l" defTabSz="457200" rtl="0" eaLnBrk="1" latinLnBrk="0" hangingPunct="1">
         <a:spcBef>
           <a:spcPct val="20000"/>
         </a:spcBef>
-        <a:buFont typeface="Arial" pitchFamily="34" charset="0"/>
+        <a:spcAft>
+          <a:spcPts val="600"/>
+        </a:spcAft>
+        <a:buClr>
+          <a:schemeClr val="accent1"/>
+        </a:buClr>
+        <a:buSzPct val="115000"/>
+        <a:buFont typeface="Arial"/>
         <a:buChar char="•"/>
-        <a:defRPr sz="2400" kern="1200">
+        <a:defRPr sz="1800" kern="1200" cap="none">
           <a:solidFill>
-            <a:schemeClr val="tx1"/>
+            <a:schemeClr val="tx1">
+              <a:lumMod val="85000"/>
+              <a:lumOff val="15000"/>
+            </a:schemeClr>
           </a:solidFill>
+          <a:effectLst/>
           <a:latin typeface="+mn-lt"/>
           <a:ea typeface="+mn-ea"/>
           <a:cs typeface="+mn-cs"/>
         </a:defRPr>
       </a:lvl3pPr>
-      <a:lvl4pPr marL="1600200" indent="-228600" algn="l" defTabSz="914400" rtl="0" eaLnBrk="1" latinLnBrk="0" hangingPunct="1">
+      <a:lvl4pPr marL="1543050" indent="-171450" algn="l" defTabSz="457200" rtl="0" eaLnBrk="1" latinLnBrk="0" hangingPunct="1">
         <a:spcBef>
           <a:spcPct val="20000"/>
         </a:spcBef>
-        <a:buFont typeface="Arial" pitchFamily="34" charset="0"/>
-        <a:buChar char="–"/>
-        <a:defRPr sz="2000" kern="1200">
+        <a:spcAft>
+          <a:spcPts val="600"/>
+        </a:spcAft>
+        <a:buClr>
+          <a:schemeClr val="accent1"/>
+        </a:buClr>
+        <a:buSzPct val="115000"/>
+        <a:buFont typeface="Arial"/>
+        <a:buChar char="•"/>
+        <a:defRPr sz="1600" kern="1200" cap="none">
           <a:solidFill>
-            <a:schemeClr val="tx1"/>
+            <a:schemeClr val="tx1">
+              <a:lumMod val="85000"/>
+              <a:lumOff val="15000"/>
+            </a:schemeClr>
           </a:solidFill>
+          <a:effectLst/>
           <a:latin typeface="+mn-lt"/>
           <a:ea typeface="+mn-ea"/>
           <a:cs typeface="+mn-cs"/>
         </a:defRPr>
       </a:lvl4pPr>
-      <a:lvl5pPr marL="2057400" indent="-228600" algn="l" defTabSz="914400" rtl="0" eaLnBrk="1" latinLnBrk="0" hangingPunct="1">
+      <a:lvl5pPr marL="2000250" indent="-171450" algn="l" defTabSz="457200" rtl="0" eaLnBrk="1" latinLnBrk="0" hangingPunct="1">
         <a:spcBef>
           <a:spcPct val="20000"/>
         </a:spcBef>
-        <a:buFont typeface="Arial" pitchFamily="34" charset="0"/>
-        <a:buChar char="»"/>
-        <a:defRPr sz="2000" kern="1200">
+        <a:spcAft>
+          <a:spcPts val="600"/>
+        </a:spcAft>
+        <a:buClr>
+          <a:schemeClr val="accent1"/>
+        </a:buClr>
+        <a:buSzPct val="115000"/>
+        <a:buFont typeface="Arial"/>
+        <a:buChar char="•"/>
+        <a:defRPr sz="1400" kern="1200" cap="none">
           <a:solidFill>
-            <a:schemeClr val="tx1"/>
+            <a:schemeClr val="tx1">
+              <a:lumMod val="85000"/>
+              <a:lumOff val="15000"/>
+            </a:schemeClr>
           </a:solidFill>
+          <a:effectLst/>
           <a:latin typeface="+mn-lt"/>
           <a:ea typeface="+mn-ea"/>
           <a:cs typeface="+mn-cs"/>
         </a:defRPr>
       </a:lvl5pPr>
-      <a:lvl6pPr marL="2514600" indent="-228600" algn="l" defTabSz="914400" rtl="0" eaLnBrk="1" latinLnBrk="0" hangingPunct="1">
+      <a:lvl6pPr marL="2514600" indent="-228600" algn="l" defTabSz="457200" rtl="0" eaLnBrk="1" latinLnBrk="0" hangingPunct="1">
         <a:spcBef>
           <a:spcPct val="20000"/>
         </a:spcBef>
-        <a:buFont typeface="Arial" pitchFamily="34" charset="0"/>
+        <a:spcAft>
+          <a:spcPts val="600"/>
+        </a:spcAft>
+        <a:buClr>
+          <a:schemeClr val="accent1"/>
+        </a:buClr>
+        <a:buSzPct val="115000"/>
+        <a:buFont typeface="Arial"/>
         <a:buChar char="•"/>
-        <a:defRPr sz="2000" kern="1200">
+        <a:defRPr sz="1400" kern="1200" cap="none">
           <a:solidFill>
-            <a:schemeClr val="tx1"/>
+            <a:schemeClr val="tx1">
+              <a:lumMod val="85000"/>
+              <a:lumOff val="15000"/>
+            </a:schemeClr>
           </a:solidFill>
+          <a:effectLst/>
           <a:latin typeface="+mn-lt"/>
           <a:ea typeface="+mn-ea"/>
           <a:cs typeface="+mn-cs"/>
         </a:defRPr>
       </a:lvl6pPr>
-      <a:lvl7pPr marL="2971800" indent="-228600" algn="l" defTabSz="914400" rtl="0" eaLnBrk="1" latinLnBrk="0" hangingPunct="1">
+      <a:lvl7pPr marL="2971800" indent="-228600" algn="l" defTabSz="457200" rtl="0" eaLnBrk="1" latinLnBrk="0" hangingPunct="1">
         <a:spcBef>
           <a:spcPct val="20000"/>
         </a:spcBef>
-        <a:buFont typeface="Arial" pitchFamily="34" charset="0"/>
+        <a:spcAft>
+          <a:spcPts val="600"/>
+        </a:spcAft>
+        <a:buClr>
+          <a:schemeClr val="accent1"/>
+        </a:buClr>
+        <a:buSzPct val="115000"/>
+        <a:buFont typeface="Arial"/>
         <a:buChar char="•"/>
-        <a:defRPr sz="2000" kern="1200">
+        <a:defRPr sz="1400" kern="1200" cap="none">
           <a:solidFill>
-            <a:schemeClr val="tx1"/>
+            <a:schemeClr val="tx1">
+              <a:lumMod val="85000"/>
+              <a:lumOff val="15000"/>
+            </a:schemeClr>
           </a:solidFill>
+          <a:effectLst/>
           <a:latin typeface="+mn-lt"/>
           <a:ea typeface="+mn-ea"/>
           <a:cs typeface="+mn-cs"/>
         </a:defRPr>
       </a:lvl7pPr>
-      <a:lvl8pPr marL="3429000" indent="-228600" algn="l" defTabSz="914400" rtl="0" eaLnBrk="1" latinLnBrk="0" hangingPunct="1">
+      <a:lvl8pPr marL="3429000" indent="-228600" algn="l" defTabSz="457200" rtl="0" eaLnBrk="1" latinLnBrk="0" hangingPunct="1">
         <a:spcBef>
           <a:spcPct val="20000"/>
         </a:spcBef>
-        <a:buFont typeface="Arial" pitchFamily="34" charset="0"/>
+        <a:spcAft>
+          <a:spcPts val="600"/>
+        </a:spcAft>
+        <a:buClr>
+          <a:schemeClr val="accent1"/>
+        </a:buClr>
+        <a:buSzPct val="115000"/>
+        <a:buFont typeface="Arial"/>
         <a:buChar char="•"/>
-        <a:defRPr sz="2000" kern="1200">
+        <a:defRPr sz="1400" kern="1200" cap="none">
           <a:solidFill>
-            <a:schemeClr val="tx1"/>
+            <a:schemeClr val="tx1">
+              <a:lumMod val="85000"/>
+              <a:lumOff val="15000"/>
+            </a:schemeClr>
           </a:solidFill>
+          <a:effectLst/>
           <a:latin typeface="+mn-lt"/>
           <a:ea typeface="+mn-ea"/>
           <a:cs typeface="+mn-cs"/>
         </a:defRPr>
       </a:lvl8pPr>
-      <a:lvl9pPr marL="3886200" indent="-228600" algn="l" defTabSz="914400" rtl="0" eaLnBrk="1" latinLnBrk="0" hangingPunct="1">
+      <a:lvl9pPr marL="3886200" indent="-228600" algn="l" defTabSz="457200" rtl="0" eaLnBrk="1" latinLnBrk="0" hangingPunct="1">
         <a:spcBef>
           <a:spcPct val="20000"/>
         </a:spcBef>
-        <a:buFont typeface="Arial" pitchFamily="34" charset="0"/>
+        <a:spcAft>
+          <a:spcPts val="600"/>
+        </a:spcAft>
+        <a:buClr>
+          <a:schemeClr val="accent1"/>
+        </a:buClr>
+        <a:buSzPct val="115000"/>
+        <a:buFont typeface="Arial"/>
         <a:buChar char="•"/>
-        <a:defRPr sz="2000" kern="1200">
+        <a:defRPr sz="1400" kern="1200" cap="none">
           <a:solidFill>
-            <a:schemeClr val="tx1"/>
+            <a:schemeClr val="tx1">
+              <a:lumMod val="85000"/>
+              <a:lumOff val="15000"/>
+            </a:schemeClr>
           </a:solidFill>
+          <a:effectLst/>
           <a:latin typeface="+mn-lt"/>
           <a:ea typeface="+mn-ea"/>
           <a:cs typeface="+mn-cs"/>
@@ -1441,7 +6971,7 @@
       <a:defPPr>
         <a:defRPr lang="en-US"/>
       </a:defPPr>
-      <a:lvl1pPr marL="0" algn="l" defTabSz="914400" rtl="0" eaLnBrk="1" latinLnBrk="0" hangingPunct="1">
+      <a:lvl1pPr marL="0" algn="l" defTabSz="457200" rtl="0" eaLnBrk="1" latinLnBrk="0" hangingPunct="1">
         <a:defRPr sz="1800" kern="1200">
           <a:solidFill>
             <a:schemeClr val="tx1"/>
@@ -1451,7 +6981,7 @@
           <a:cs typeface="+mn-cs"/>
         </a:defRPr>
       </a:lvl1pPr>
-      <a:lvl2pPr marL="457200" algn="l" defTabSz="914400" rtl="0" eaLnBrk="1" latinLnBrk="0" hangingPunct="1">
+      <a:lvl2pPr marL="457200" algn="l" defTabSz="457200" rtl="0" eaLnBrk="1" latinLnBrk="0" hangingPunct="1">
         <a:defRPr sz="1800" kern="1200">
           <a:solidFill>
             <a:schemeClr val="tx1"/>
@@ -1461,7 +6991,7 @@
           <a:cs typeface="+mn-cs"/>
         </a:defRPr>
       </a:lvl2pPr>
-      <a:lvl3pPr marL="914400" algn="l" defTabSz="914400" rtl="0" eaLnBrk="1" latinLnBrk="0" hangingPunct="1">
+      <a:lvl3pPr marL="914400" algn="l" defTabSz="457200" rtl="0" eaLnBrk="1" latinLnBrk="0" hangingPunct="1">
         <a:defRPr sz="1800" kern="1200">
           <a:solidFill>
             <a:schemeClr val="tx1"/>
@@ -1471,7 +7001,7 @@
           <a:cs typeface="+mn-cs"/>
         </a:defRPr>
       </a:lvl3pPr>
-      <a:lvl4pPr marL="1371600" algn="l" defTabSz="914400" rtl="0" eaLnBrk="1" latinLnBrk="0" hangingPunct="1">
+      <a:lvl4pPr marL="1371600" algn="l" defTabSz="457200" rtl="0" eaLnBrk="1" latinLnBrk="0" hangingPunct="1">
         <a:defRPr sz="1800" kern="1200">
           <a:solidFill>
             <a:schemeClr val="tx1"/>
@@ -1481,7 +7011,7 @@
           <a:cs typeface="+mn-cs"/>
         </a:defRPr>
       </a:lvl4pPr>
-      <a:lvl5pPr marL="1828800" algn="l" defTabSz="914400" rtl="0" eaLnBrk="1" latinLnBrk="0" hangingPunct="1">
+      <a:lvl5pPr marL="1828800" algn="l" defTabSz="457200" rtl="0" eaLnBrk="1" latinLnBrk="0" hangingPunct="1">
         <a:defRPr sz="1800" kern="1200">
           <a:solidFill>
             <a:schemeClr val="tx1"/>
@@ -1491,7 +7021,7 @@
           <a:cs typeface="+mn-cs"/>
         </a:defRPr>
       </a:lvl5pPr>
-      <a:lvl6pPr marL="2286000" algn="l" defTabSz="914400" rtl="0" eaLnBrk="1" latinLnBrk="0" hangingPunct="1">
+      <a:lvl6pPr marL="2286000" algn="l" defTabSz="457200" rtl="0" eaLnBrk="1" latinLnBrk="0" hangingPunct="1">
         <a:defRPr sz="1800" kern="1200">
           <a:solidFill>
             <a:schemeClr val="tx1"/>
@@ -1501,7 +7031,7 @@
           <a:cs typeface="+mn-cs"/>
         </a:defRPr>
       </a:lvl6pPr>
-      <a:lvl7pPr marL="2743200" algn="l" defTabSz="914400" rtl="0" eaLnBrk="1" latinLnBrk="0" hangingPunct="1">
+      <a:lvl7pPr marL="2743200" algn="l" defTabSz="457200" rtl="0" eaLnBrk="1" latinLnBrk="0" hangingPunct="1">
         <a:defRPr sz="1800" kern="1200">
           <a:solidFill>
             <a:schemeClr val="tx1"/>
@@ -1511,7 +7041,7 @@
           <a:cs typeface="+mn-cs"/>
         </a:defRPr>
       </a:lvl7pPr>
-      <a:lvl8pPr marL="3200400" algn="l" defTabSz="914400" rtl="0" eaLnBrk="1" latinLnBrk="0" hangingPunct="1">
+      <a:lvl8pPr marL="3200400" algn="l" defTabSz="457200" rtl="0" eaLnBrk="1" latinLnBrk="0" hangingPunct="1">
         <a:defRPr sz="1800" kern="1200">
           <a:solidFill>
             <a:schemeClr val="tx1"/>
@@ -1521,7 +7051,7 @@
           <a:cs typeface="+mn-cs"/>
         </a:defRPr>
       </a:lvl8pPr>
-      <a:lvl9pPr marL="3657600" algn="l" defTabSz="914400" rtl="0" eaLnBrk="1" latinLnBrk="0" hangingPunct="1">
+      <a:lvl9pPr marL="3657600" algn="l" defTabSz="457200" rtl="0" eaLnBrk="1" latinLnBrk="0" hangingPunct="1">
         <a:defRPr sz="1800" kern="1200">
           <a:solidFill>
             <a:schemeClr val="tx1"/>
@@ -1742,20 +7272,10 @@
                 <a:ea typeface="Host Grotesk" pitchFamily="34" charset="-122"/>
                 <a:cs typeface="Host Grotesk" pitchFamily="34" charset="-120"/>
               </a:rPr>
-              <a:t>Sharaiz Ahmed</a:t>
-            </a:r>
-            <a:endParaRPr lang="en-US" sz="1400" dirty="0"/>
-          </a:p>
-          <a:p>
-            <a:pPr marL="284480" indent="-284480" algn="l">
-              <a:lnSpc>
-                <a:spcPct val="117000"/>
-              </a:lnSpc>
-              <a:buSzPct val="100000"/>
-              <a:buChar char="•"/>
-            </a:pPr>
-            <a:r>
-              <a:rPr lang="en-US" sz="1400" dirty="0">
+              <a:t>Sharaiz </a:t>
+            </a:r>
+            <a:r>
+              <a:rPr lang="en-US" sz="1400" dirty="0" smtClean="0">
                 <a:solidFill>
                   <a:srgbClr val="1E1E1C"/>
                 </a:solidFill>
@@ -1763,7 +7283,50 @@
                 <a:ea typeface="Host Grotesk" pitchFamily="34" charset="-122"/>
                 <a:cs typeface="Host Grotesk" pitchFamily="34" charset="-120"/>
               </a:rPr>
-              <a:t>Abdul Moiz</a:t>
+              <a:t>Ahmed (57288)</a:t>
+            </a:r>
+            <a:endParaRPr lang="en-US" sz="1400" dirty="0"/>
+          </a:p>
+          <a:p>
+            <a:pPr marL="284480" indent="-284480" algn="l">
+              <a:lnSpc>
+                <a:spcPct val="117000"/>
+              </a:lnSpc>
+              <a:buSzPct val="100000"/>
+              <a:buChar char="•"/>
+            </a:pPr>
+            <a:r>
+              <a:rPr lang="en-US" sz="1400" dirty="0">
+                <a:solidFill>
+                  <a:srgbClr val="1E1E1C"/>
+                </a:solidFill>
+                <a:latin typeface="Host Grotesk" pitchFamily="34" charset="0"/>
+                <a:ea typeface="Host Grotesk" pitchFamily="34" charset="-122"/>
+                <a:cs typeface="Host Grotesk" pitchFamily="34" charset="-120"/>
+              </a:rPr>
+              <a:t>Abdul </a:t>
+            </a:r>
+            <a:r>
+              <a:rPr lang="en-US" sz="1400" dirty="0" err="1" smtClean="0">
+                <a:solidFill>
+                  <a:srgbClr val="1E1E1C"/>
+                </a:solidFill>
+                <a:latin typeface="Host Grotesk" pitchFamily="34" charset="0"/>
+                <a:ea typeface="Host Grotesk" pitchFamily="34" charset="-122"/>
+                <a:cs typeface="Host Grotesk" pitchFamily="34" charset="-120"/>
+              </a:rPr>
+              <a:t>Moiz</a:t>
+            </a:r>
+            <a:r>
+              <a:rPr lang="en-US" sz="1400" dirty="0" smtClean="0">
+                <a:solidFill>
+                  <a:srgbClr val="1E1E1C"/>
+                </a:solidFill>
+                <a:latin typeface="Host Grotesk" pitchFamily="34" charset="0"/>
+                <a:ea typeface="Host Grotesk" pitchFamily="34" charset="-122"/>
+                <a:cs typeface="Host Grotesk" pitchFamily="34" charset="-120"/>
+              </a:rPr>
+              <a:t> (54482)</a:t>
             </a:r>
             <a:endParaRPr lang="en-US" sz="1400" dirty="0"/>
           </a:p>
@@ -1831,7 +7394,7 @@
               <a:buNone/>
             </a:pPr>
             <a:r>
-              <a:rPr lang="en-US" sz="1400" b="1" dirty="0">
+              <a:rPr lang="en-US" sz="1400" b="1" dirty="0" smtClean="0">
                 <a:solidFill>
                   <a:srgbClr val="1E1E1C"/>
                 </a:solidFill>
@@ -1839,10 +7402,10 @@
                 <a:ea typeface="Host Grotesk Bold" pitchFamily="34" charset="-122"/>
                 <a:cs typeface="Host Grotesk Bold" pitchFamily="34" charset="-120"/>
               </a:rPr>
-              <a:t>University:</a:t>
-            </a:r>
-            <a:r>
-              <a:rPr lang="en-US" sz="1400" dirty="0">
+              <a:t>Submitted to:</a:t>
+            </a:r>
+            <a:r>
+              <a:rPr lang="en-US" sz="1400" dirty="0" smtClean="0">
                 <a:solidFill>
                   <a:srgbClr val="1E1E1C"/>
                 </a:solidFill>
@@ -1850,7 +7413,40 @@
                 <a:ea typeface="Host Grotesk" pitchFamily="34" charset="-122"/>
                 <a:cs typeface="Host Grotesk" pitchFamily="34" charset="-120"/>
               </a:rPr>
-              <a:t> Riphah International University</a:t>
+              <a:t> Sir </a:t>
+            </a:r>
+            <a:r>
+              <a:rPr lang="en-US" sz="1400" dirty="0" err="1" smtClean="0">
+                <a:solidFill>
+                  <a:srgbClr val="1E1E1C"/>
+                </a:solidFill>
+                <a:latin typeface="Host Grotesk" pitchFamily="34" charset="0"/>
+                <a:ea typeface="Host Grotesk" pitchFamily="34" charset="-122"/>
+                <a:cs typeface="Host Grotesk" pitchFamily="34" charset="-120"/>
+              </a:rPr>
+              <a:t>Mubariz</a:t>
+            </a:r>
+            <a:r>
+              <a:rPr lang="en-US" sz="1400" dirty="0" smtClean="0">
+                <a:solidFill>
+                  <a:srgbClr val="1E1E1C"/>
+                </a:solidFill>
+                <a:latin typeface="Host Grotesk" pitchFamily="34" charset="0"/>
+                <a:ea typeface="Host Grotesk" pitchFamily="34" charset="-122"/>
+                <a:cs typeface="Host Grotesk" pitchFamily="34" charset="-120"/>
+              </a:rPr>
+              <a:t> </a:t>
+            </a:r>
+            <a:r>
+              <a:rPr lang="en-US" sz="1400" dirty="0" err="1" smtClean="0">
+                <a:solidFill>
+                  <a:srgbClr val="1E1E1C"/>
+                </a:solidFill>
+                <a:latin typeface="Host Grotesk" pitchFamily="34" charset="0"/>
+                <a:ea typeface="Host Grotesk" pitchFamily="34" charset="-122"/>
+                <a:cs typeface="Host Grotesk" pitchFamily="34" charset="-120"/>
+              </a:rPr>
+              <a:t>Rehman</a:t>
             </a:r>
             <a:endParaRPr lang="en-US" sz="1400" dirty="0"/>
           </a:p>
@@ -2162,57 +7758,30 @@
           </a:p>
         </p:txBody>
       </p:sp>
-      <p:sp>
-        <p:nvSpPr>
-          <p:cNvPr id="17" name="Rectangle 16">
-            <a:extLst>
-              <a:ext uri="{FF2B5EF4-FFF2-40B4-BE49-F238E27FC236}">
-                <a16:creationId xmlns:a16="http://schemas.microsoft.com/office/drawing/2014/main" id="{C870F18B-0B58-5F94-C9E7-1F7F9A591CA2}"/>
-              </a:ext>
-            </a:extLst>
-          </p:cNvPr>
-          <p:cNvSpPr/>
-          <p:nvPr/>
-        </p:nvSpPr>
-        <p:spPr>
-          <a:xfrm>
-            <a:off x="11119104" y="6620256"/>
-            <a:ext cx="960120" cy="113919"/>
-          </a:xfrm>
-          <a:prstGeom prst="rect">
-            <a:avLst/>
-          </a:prstGeom>
-        </p:spPr>
-        <p:style>
-          <a:lnRef idx="2">
-            <a:schemeClr val="dk1">
-              <a:shade val="15000"/>
-            </a:schemeClr>
-          </a:lnRef>
-          <a:fillRef idx="1">
-            <a:schemeClr val="dk1"/>
-          </a:fillRef>
-          <a:effectRef idx="0">
-            <a:schemeClr val="dk1"/>
-          </a:effectRef>
-          <a:fontRef idx="minor">
-            <a:schemeClr val="lt1"/>
-          </a:fontRef>
-        </p:style>
-        <p:txBody>
-          <a:bodyPr rtlCol="0" anchor="ctr"/>
-          <a:lstStyle/>
-          <a:p>
-            <a:pPr algn="ctr"/>
-            <a:endParaRPr lang="en-PK"/>
-          </a:p>
-        </p:txBody>
-      </p:sp>
     </p:spTree>
   </p:cSld>
   <p:clrMapOvr>
     <a:masterClrMapping/>
   </p:clrMapOvr>
+  <mc:AlternateContent xmlns:mc="http://schemas.openxmlformats.org/markup-compatibility/2006">
+    <mc:Choice xmlns:p14="http://schemas.microsoft.com/office/powerpoint/2010/main" Requires="p14">
+      <p:transition spd="slow" p14:dur="4000">
+        <p14:vortex dir="r"/>
+      </p:transition>
+    </mc:Choice>
+    <mc:Fallback>
+      <p:transition spd="slow">
+        <p:fade/>
+      </p:transition>
+    </mc:Fallback>
+  </mc:AlternateContent>
+  <p:timing>
+    <p:tnLst>
+      <p:par>
+        <p:cTn id="1" dur="indefinite" restart="never" nodeType="tmRoot"/>
+      </p:par>
+    </p:tnLst>
+  </p:timing>
 </p:sld>
 </file>
 
@@ -2283,7 +7852,7 @@
         </p:nvSpPr>
         <p:spPr>
           <a:xfrm>
-            <a:off x="965176" y="1598910"/>
+            <a:off x="991303" y="1816631"/>
             <a:ext cx="10261343" cy="377130"/>
           </a:xfrm>
           <a:prstGeom prst="rect">
@@ -2325,7 +7894,7 @@
         </p:nvSpPr>
         <p:spPr>
           <a:xfrm>
-            <a:off x="965176" y="2153841"/>
+            <a:off x="991303" y="2371562"/>
             <a:ext cx="10261343" cy="1422003"/>
           </a:xfrm>
           <a:prstGeom prst="rect">
@@ -2454,8 +8023,8 @@
         </p:nvSpPr>
         <p:spPr>
           <a:xfrm>
-            <a:off x="965176" y="3952180"/>
-            <a:ext cx="10870928" cy="248841"/>
+            <a:off x="991303" y="4169901"/>
+            <a:ext cx="10146960" cy="248841"/>
           </a:xfrm>
           <a:prstGeom prst="rect">
             <a:avLst/>
@@ -2507,7 +8076,7 @@
         </p:nvSpPr>
         <p:spPr>
           <a:xfrm>
-            <a:off x="965176" y="4359771"/>
+            <a:off x="991303" y="4577492"/>
             <a:ext cx="1583194" cy="954881"/>
           </a:xfrm>
           <a:prstGeom prst="roundRect">
@@ -2532,7 +8101,7 @@
         </p:nvSpPr>
         <p:spPr>
           <a:xfrm>
-            <a:off x="965176" y="4607421"/>
+            <a:off x="991303" y="4825142"/>
             <a:ext cx="1583194" cy="248841"/>
           </a:xfrm>
           <a:prstGeom prst="rect">
@@ -2574,7 +8143,7 @@
         </p:nvSpPr>
         <p:spPr>
           <a:xfrm>
-            <a:off x="2700766" y="4359771"/>
+            <a:off x="2726893" y="4577492"/>
             <a:ext cx="1583194" cy="954881"/>
           </a:xfrm>
           <a:prstGeom prst="roundRect">
@@ -2599,7 +8168,7 @@
         </p:nvSpPr>
         <p:spPr>
           <a:xfrm>
-            <a:off x="2700766" y="4607421"/>
+            <a:off x="2726893" y="4825142"/>
             <a:ext cx="1583194" cy="248841"/>
           </a:xfrm>
           <a:prstGeom prst="rect">
@@ -2641,7 +8210,7 @@
         </p:nvSpPr>
         <p:spPr>
           <a:xfrm>
-            <a:off x="4436356" y="4359771"/>
+            <a:off x="4462483" y="4577492"/>
             <a:ext cx="1583293" cy="954881"/>
           </a:xfrm>
           <a:prstGeom prst="roundRect">
@@ -2666,7 +8235,7 @@
         </p:nvSpPr>
         <p:spPr>
           <a:xfrm>
-            <a:off x="4436356" y="4607421"/>
+            <a:off x="4462483" y="4825142"/>
             <a:ext cx="1583293" cy="248841"/>
           </a:xfrm>
           <a:prstGeom prst="rect">
@@ -2708,7 +8277,7 @@
         </p:nvSpPr>
         <p:spPr>
           <a:xfrm>
-            <a:off x="6172046" y="4359771"/>
+            <a:off x="6198173" y="4577492"/>
             <a:ext cx="1583194" cy="954881"/>
           </a:xfrm>
           <a:prstGeom prst="rect">
@@ -2728,7 +8297,7 @@
         </p:nvSpPr>
         <p:spPr>
           <a:xfrm>
-            <a:off x="6400640" y="4588371"/>
+            <a:off x="6426767" y="4806092"/>
             <a:ext cx="1126005" cy="497681"/>
           </a:xfrm>
           <a:prstGeom prst="rect">
@@ -2739,7 +8308,7 @@
         </p:spPr>
         <p:txBody>
           <a:bodyPr wrap="square" lIns="0" tIns="0" rIns="0" bIns="0" rtlCol="0" anchor="t">
-            <a:normAutofit/>
+            <a:normAutofit lnSpcReduction="10000"/>
           </a:bodyPr>
           <a:lstStyle/>
           <a:p>
@@ -2772,7 +8341,7 @@
         </p:nvSpPr>
         <p:spPr>
           <a:xfrm>
-            <a:off x="7907636" y="4359771"/>
+            <a:off x="7933763" y="4577492"/>
             <a:ext cx="1583194" cy="954881"/>
           </a:xfrm>
           <a:prstGeom prst="rect">
@@ -2792,7 +8361,7 @@
         </p:nvSpPr>
         <p:spPr>
           <a:xfrm>
-            <a:off x="7907636" y="4588371"/>
+            <a:off x="7933763" y="4806092"/>
             <a:ext cx="1583194" cy="248841"/>
           </a:xfrm>
           <a:prstGeom prst="rect">
@@ -2834,7 +8403,7 @@
         </p:nvSpPr>
         <p:spPr>
           <a:xfrm>
-            <a:off x="9643226" y="4359771"/>
+            <a:off x="9669353" y="4577492"/>
             <a:ext cx="1583293" cy="954881"/>
           </a:xfrm>
           <a:prstGeom prst="roundRect">
@@ -2859,7 +8428,7 @@
         </p:nvSpPr>
         <p:spPr>
           <a:xfrm>
-            <a:off x="9643226" y="4607421"/>
+            <a:off x="9669353" y="4825142"/>
             <a:ext cx="1583293" cy="248841"/>
           </a:xfrm>
           <a:prstGeom prst="rect">
@@ -2932,52 +8501,6 @@
               <a:t>10 / 10</a:t>
             </a:r>
             <a:endParaRPr lang="en-US" sz="1750" dirty="0"/>
-          </a:p>
-        </p:txBody>
-      </p:sp>
-      <p:sp>
-        <p:nvSpPr>
-          <p:cNvPr id="19" name="Rectangle 18">
-            <a:extLst>
-              <a:ext uri="{FF2B5EF4-FFF2-40B4-BE49-F238E27FC236}">
-                <a16:creationId xmlns:a16="http://schemas.microsoft.com/office/drawing/2014/main" id="{86A8C8B9-8EB9-40ED-F85D-6D1AF076335B}"/>
-              </a:ext>
-            </a:extLst>
-          </p:cNvPr>
-          <p:cNvSpPr/>
-          <p:nvPr/>
-        </p:nvSpPr>
-        <p:spPr>
-          <a:xfrm>
-            <a:off x="11137622" y="6595630"/>
-            <a:ext cx="906596" cy="139411"/>
-          </a:xfrm>
-          <a:prstGeom prst="rect">
-            <a:avLst/>
-          </a:prstGeom>
-        </p:spPr>
-        <p:style>
-          <a:lnRef idx="2">
-            <a:schemeClr val="dk1">
-              <a:shade val="15000"/>
-            </a:schemeClr>
-          </a:lnRef>
-          <a:fillRef idx="1">
-            <a:schemeClr val="dk1"/>
-          </a:fillRef>
-          <a:effectRef idx="0">
-            <a:schemeClr val="dk1"/>
-          </a:effectRef>
-          <a:fontRef idx="minor">
-            <a:schemeClr val="lt1"/>
-          </a:fontRef>
-        </p:style>
-        <p:txBody>
-          <a:bodyPr rtlCol="0" anchor="ctr"/>
-          <a:lstStyle/>
-          <a:p>
-            <a:pPr algn="ctr"/>
-            <a:endParaRPr lang="en-PK"/>
           </a:p>
         </p:txBody>
       </p:sp>
@@ -2986,6 +8509,168 @@
   <p:clrMapOvr>
     <a:masterClrMapping/>
   </p:clrMapOvr>
+  <mc:AlternateContent xmlns:mc="http://schemas.openxmlformats.org/markup-compatibility/2006">
+    <mc:Choice xmlns:p14="http://schemas.microsoft.com/office/powerpoint/2010/main" Requires="p14">
+      <p:transition spd="slow" p14:dur="1600">
+        <p:blinds dir="vert"/>
+      </p:transition>
+    </mc:Choice>
+    <mc:Fallback>
+      <p:transition spd="slow">
+        <p:blinds dir="vert"/>
+      </p:transition>
+    </mc:Fallback>
+  </mc:AlternateContent>
+  <p:timing>
+    <p:tnLst>
+      <p:par>
+        <p:cTn id="1" dur="indefinite" restart="never" nodeType="tmRoot"/>
+      </p:par>
+    </p:tnLst>
+  </p:timing>
+</p:sld>
+</file>
+
+<file path=ppt/slides/slide11.xml><?xml version="1.0" encoding="utf-8"?>
+<p:sld xmlns:a="http://schemas.openxmlformats.org/drawingml/2006/main" xmlns:r="http://schemas.openxmlformats.org/officeDocument/2006/relationships" xmlns:p="http://schemas.openxmlformats.org/presentationml/2006/main">
+  <p:cSld>
+    <p:spTree>
+      <p:nvGrpSpPr>
+        <p:cNvPr id="1" name=""/>
+        <p:cNvGrpSpPr/>
+        <p:nvPr/>
+      </p:nvGrpSpPr>
+      <p:grpSpPr>
+        <a:xfrm>
+          <a:off x="0" y="0"/>
+          <a:ext cx="0" cy="0"/>
+          <a:chOff x="0" y="0"/>
+          <a:chExt cx="0" cy="0"/>
+        </a:xfrm>
+      </p:grpSpPr>
+      <p:sp>
+        <p:nvSpPr>
+          <p:cNvPr id="18" name="Text 16"/>
+          <p:cNvSpPr/>
+          <p:nvPr/>
+        </p:nvSpPr>
+        <p:spPr>
+          <a:xfrm>
+            <a:off x="10498470" y="123825"/>
+            <a:ext cx="1337733" cy="311150"/>
+          </a:xfrm>
+          <a:prstGeom prst="rect">
+            <a:avLst/>
+          </a:prstGeom>
+          <a:noFill/>
+          <a:ln/>
+        </p:spPr>
+        <p:txBody>
+          <a:bodyPr wrap="none" lIns="0" tIns="0" rIns="0" bIns="0" rtlCol="0" anchor="ctr"/>
+          <a:lstStyle/>
+          <a:p>
+            <a:pPr marL="0" indent="0" algn="l">
+              <a:lnSpc>
+                <a:spcPct val="117000"/>
+              </a:lnSpc>
+              <a:buNone/>
+            </a:pPr>
+            <a:r>
+              <a:rPr lang="en-US" sz="1750" kern="100" spc="35" dirty="0" smtClean="0">
+                <a:solidFill>
+                  <a:srgbClr val="1E1E1C"/>
+                </a:solidFill>
+                <a:latin typeface="Bodoni Moda" pitchFamily="34" charset="0"/>
+                <a:ea typeface="Bodoni Moda" pitchFamily="34" charset="-122"/>
+                <a:cs typeface="Bodoni Moda" pitchFamily="34" charset="-120"/>
+              </a:rPr>
+              <a:t>11 </a:t>
+            </a:r>
+            <a:r>
+              <a:rPr lang="en-US" sz="1750" kern="100" spc="35" dirty="0">
+                <a:solidFill>
+                  <a:srgbClr val="1E1E1C"/>
+                </a:solidFill>
+                <a:latin typeface="Bodoni Moda" pitchFamily="34" charset="0"/>
+                <a:ea typeface="Bodoni Moda" pitchFamily="34" charset="-122"/>
+                <a:cs typeface="Bodoni Moda" pitchFamily="34" charset="-120"/>
+              </a:rPr>
+              <a:t>/ 10</a:t>
+            </a:r>
+            <a:endParaRPr lang="en-US" sz="1750" dirty="0"/>
+          </a:p>
+        </p:txBody>
+      </p:sp>
+      <p:pic>
+        <p:nvPicPr>
+          <p:cNvPr id="1026" name="Picture 2" descr="https://i.pinimg.com/736x/04/e0/9d/04e09d2acf988be7cad32aea56bf6614.jpg"/>
+          <p:cNvPicPr>
+            <a:picLocks noChangeAspect="1" noChangeArrowheads="1"/>
+          </p:cNvPicPr>
+          <p:nvPr/>
+        </p:nvPicPr>
+        <p:blipFill>
+          <a:blip r:embed="rId3">
+            <a:extLst>
+              <a:ext uri="{28A0092B-C50C-407E-A947-70E740481C1C}">
+                <a14:useLocalDpi xmlns:a14="http://schemas.microsoft.com/office/drawing/2010/main" val="0"/>
+              </a:ext>
+            </a:extLst>
+          </a:blip>
+          <a:srcRect/>
+          <a:stretch>
+            <a:fillRect/>
+          </a:stretch>
+        </p:blipFill>
+        <p:spPr bwMode="auto">
+          <a:xfrm>
+            <a:off x="2890066" y="795445"/>
+            <a:ext cx="7010400" cy="5257801"/>
+          </a:xfrm>
+          <a:prstGeom prst="rect">
+            <a:avLst/>
+          </a:prstGeom>
+          <a:noFill/>
+          <a:extLst>
+            <a:ext uri="{909E8E84-426E-40DD-AFC4-6F175D3DCCD1}">
+              <a14:hiddenFill xmlns:a14="http://schemas.microsoft.com/office/drawing/2010/main">
+                <a:solidFill>
+                  <a:srgbClr val="FFFFFF"/>
+                </a:solidFill>
+              </a14:hiddenFill>
+            </a:ext>
+          </a:extLst>
+        </p:spPr>
+      </p:pic>
+    </p:spTree>
+    <p:extLst>
+      <p:ext uri="{BB962C8B-B14F-4D97-AF65-F5344CB8AC3E}">
+        <p14:creationId xmlns:p14="http://schemas.microsoft.com/office/powerpoint/2010/main" val="3639743776"/>
+      </p:ext>
+    </p:extLst>
+  </p:cSld>
+  <p:clrMapOvr>
+    <a:masterClrMapping/>
+  </p:clrMapOvr>
+  <mc:AlternateContent xmlns:mc="http://schemas.openxmlformats.org/markup-compatibility/2006">
+    <mc:Choice xmlns:p15="http://schemas.microsoft.com/office/powerpoint/2012/main" Requires="p15">
+      <p:transition xmlns:p14="http://schemas.microsoft.com/office/powerpoint/2010/main" spd="slow" p14:dur="6000">
+        <p15:prstTrans prst="curtains"/>
+      </p:transition>
+    </mc:Choice>
+    <mc:Fallback>
+      <p:transition spd="slow">
+        <p:fade/>
+      </p:transition>
+    </mc:Fallback>
+  </mc:AlternateContent>
+  <p:timing>
+    <p:tnLst>
+      <p:par>
+        <p:cTn id="1" dur="indefinite" restart="never" nodeType="tmRoot"/>
+      </p:par>
+    </p:tnLst>
+  </p:timing>
 </p:sld>
 </file>
 
@@ -3014,7 +8699,7 @@
         </p:nvSpPr>
         <p:spPr>
           <a:xfrm>
-            <a:off x="965176" y="965200"/>
+            <a:off x="1060972" y="947782"/>
             <a:ext cx="4328111" cy="474960"/>
           </a:xfrm>
           <a:prstGeom prst="rect">
@@ -3056,7 +8741,7 @@
         </p:nvSpPr>
         <p:spPr>
           <a:xfrm>
-            <a:off x="965176" y="2678013"/>
+            <a:off x="1339645" y="2564798"/>
             <a:ext cx="4328111" cy="377130"/>
           </a:xfrm>
           <a:prstGeom prst="rect">
@@ -3098,7 +8783,7 @@
         </p:nvSpPr>
         <p:spPr>
           <a:xfrm>
-            <a:off x="965176" y="3232944"/>
+            <a:off x="1339645" y="3119729"/>
             <a:ext cx="4328111" cy="1422003"/>
           </a:xfrm>
           <a:prstGeom prst="rect">
@@ -3227,7 +8912,7 @@
         </p:nvSpPr>
         <p:spPr>
           <a:xfrm>
-            <a:off x="7680728" y="1667669"/>
+            <a:off x="7393339" y="1702505"/>
             <a:ext cx="355591" cy="633412"/>
           </a:xfrm>
           <a:prstGeom prst="roundRect">
@@ -3249,7 +8934,7 @@
         </p:nvSpPr>
         <p:spPr>
           <a:xfrm>
-            <a:off x="7858524" y="1846858"/>
+            <a:off x="7571135" y="1881694"/>
             <a:ext cx="159143" cy="274935"/>
           </a:xfrm>
           <a:prstGeom prst="rect">
@@ -3291,7 +8976,7 @@
         </p:nvSpPr>
         <p:spPr>
           <a:xfrm>
-            <a:off x="8214115" y="1845469"/>
+            <a:off x="7926726" y="1880305"/>
             <a:ext cx="2834609" cy="277813"/>
           </a:xfrm>
           <a:prstGeom prst="rect">
@@ -3333,7 +9018,7 @@
         </p:nvSpPr>
         <p:spPr>
           <a:xfrm>
-            <a:off x="8125217" y="2296319"/>
+            <a:off x="7837828" y="2331155"/>
             <a:ext cx="3012404" cy="9525"/>
           </a:xfrm>
           <a:prstGeom prst="roundRect">
@@ -3355,7 +9040,7 @@
         </p:nvSpPr>
         <p:spPr>
           <a:xfrm>
-            <a:off x="7680728" y="2389981"/>
+            <a:off x="7393339" y="2424817"/>
             <a:ext cx="709099" cy="633412"/>
           </a:xfrm>
           <a:prstGeom prst="roundRect">
@@ -3377,7 +9062,7 @@
         </p:nvSpPr>
         <p:spPr>
           <a:xfrm>
-            <a:off x="7910315" y="2569170"/>
+            <a:off x="7622926" y="2604006"/>
             <a:ext cx="249926" cy="274935"/>
           </a:xfrm>
           <a:prstGeom prst="rect">
@@ -3419,7 +9104,7 @@
         </p:nvSpPr>
         <p:spPr>
           <a:xfrm>
-            <a:off x="8567622" y="2567781"/>
+            <a:off x="8280233" y="2602617"/>
             <a:ext cx="2481101" cy="277813"/>
           </a:xfrm>
           <a:prstGeom prst="rect">
@@ -3461,7 +9146,7 @@
         </p:nvSpPr>
         <p:spPr>
           <a:xfrm>
-            <a:off x="8478725" y="3018631"/>
+            <a:off x="8191336" y="3053467"/>
             <a:ext cx="2658897" cy="9525"/>
           </a:xfrm>
           <a:prstGeom prst="roundRect">
@@ -3483,7 +9168,7 @@
         </p:nvSpPr>
         <p:spPr>
           <a:xfrm>
-            <a:off x="7680728" y="3112294"/>
+            <a:off x="7393339" y="3147130"/>
             <a:ext cx="1063698" cy="633412"/>
           </a:xfrm>
           <a:prstGeom prst="roundRect">
@@ -3505,7 +9190,7 @@
         </p:nvSpPr>
         <p:spPr>
           <a:xfrm>
-            <a:off x="8087614" y="3291483"/>
+            <a:off x="7800225" y="3326319"/>
             <a:ext cx="249926" cy="274935"/>
           </a:xfrm>
           <a:prstGeom prst="rect">
@@ -3547,7 +9232,7 @@
         </p:nvSpPr>
         <p:spPr>
           <a:xfrm>
-            <a:off x="8922221" y="3290094"/>
+            <a:off x="8634832" y="3324930"/>
             <a:ext cx="2126502" cy="277813"/>
           </a:xfrm>
           <a:prstGeom prst="rect">
@@ -3589,7 +9274,7 @@
         </p:nvSpPr>
         <p:spPr>
           <a:xfrm>
-            <a:off x="8833324" y="3740944"/>
+            <a:off x="8545935" y="3775780"/>
             <a:ext cx="2304298" cy="9525"/>
           </a:xfrm>
           <a:prstGeom prst="roundRect">
@@ -3611,7 +9296,7 @@
         </p:nvSpPr>
         <p:spPr>
           <a:xfrm>
-            <a:off x="7680728" y="3834606"/>
+            <a:off x="7393339" y="3869442"/>
             <a:ext cx="1418297" cy="633412"/>
           </a:xfrm>
           <a:prstGeom prst="roundRect">
@@ -3633,7 +9318,7 @@
         </p:nvSpPr>
         <p:spPr>
           <a:xfrm>
-            <a:off x="8264914" y="4013795"/>
+            <a:off x="7977525" y="4048631"/>
             <a:ext cx="249926" cy="274935"/>
           </a:xfrm>
           <a:prstGeom prst="rect">
@@ -3675,7 +9360,7 @@
         </p:nvSpPr>
         <p:spPr>
           <a:xfrm>
-            <a:off x="9276820" y="4012406"/>
+            <a:off x="8989431" y="4047242"/>
             <a:ext cx="1771903" cy="277813"/>
           </a:xfrm>
           <a:prstGeom prst="rect">
@@ -3717,7 +9402,7 @@
         </p:nvSpPr>
         <p:spPr>
           <a:xfrm>
-            <a:off x="9187922" y="4463256"/>
+            <a:off x="8900533" y="4498092"/>
             <a:ext cx="1949699" cy="9525"/>
           </a:xfrm>
           <a:prstGeom prst="roundRect">
@@ -3739,7 +9424,7 @@
         </p:nvSpPr>
         <p:spPr>
           <a:xfrm>
-            <a:off x="7680728" y="4556919"/>
+            <a:off x="7393339" y="4591755"/>
             <a:ext cx="1772895" cy="633412"/>
           </a:xfrm>
           <a:prstGeom prst="roundRect">
@@ -3761,7 +9446,7 @@
         </p:nvSpPr>
         <p:spPr>
           <a:xfrm>
-            <a:off x="8442213" y="4736108"/>
+            <a:off x="8154824" y="4770944"/>
             <a:ext cx="249926" cy="274935"/>
           </a:xfrm>
           <a:prstGeom prst="rect">
@@ -3803,7 +9488,7 @@
         </p:nvSpPr>
         <p:spPr>
           <a:xfrm>
-            <a:off x="9631419" y="4734719"/>
+            <a:off x="9344030" y="4769555"/>
             <a:ext cx="1417304" cy="277813"/>
           </a:xfrm>
           <a:prstGeom prst="rect">
@@ -3876,52 +9561,6 @@
               <a:t>02 / 10</a:t>
             </a:r>
             <a:endParaRPr lang="en-US" sz="1750" dirty="0"/>
-          </a:p>
-        </p:txBody>
-      </p:sp>
-      <p:sp>
-        <p:nvSpPr>
-          <p:cNvPr id="25" name="Rectangle 24">
-            <a:extLst>
-              <a:ext uri="{FF2B5EF4-FFF2-40B4-BE49-F238E27FC236}">
-                <a16:creationId xmlns:a16="http://schemas.microsoft.com/office/drawing/2014/main" id="{516B4B6A-CC41-E23B-A9D6-81198F184C43}"/>
-              </a:ext>
-            </a:extLst>
-          </p:cNvPr>
-          <p:cNvSpPr/>
-          <p:nvPr/>
-        </p:nvSpPr>
-        <p:spPr>
-          <a:xfrm>
-            <a:off x="11137622" y="6595630"/>
-            <a:ext cx="906596" cy="139411"/>
-          </a:xfrm>
-          <a:prstGeom prst="rect">
-            <a:avLst/>
-          </a:prstGeom>
-        </p:spPr>
-        <p:style>
-          <a:lnRef idx="2">
-            <a:schemeClr val="dk1">
-              <a:shade val="15000"/>
-            </a:schemeClr>
-          </a:lnRef>
-          <a:fillRef idx="1">
-            <a:schemeClr val="dk1"/>
-          </a:fillRef>
-          <a:effectRef idx="0">
-            <a:schemeClr val="dk1"/>
-          </a:effectRef>
-          <a:fontRef idx="minor">
-            <a:schemeClr val="lt1"/>
-          </a:fontRef>
-        </p:style>
-        <p:txBody>
-          <a:bodyPr rtlCol="0" anchor="ctr"/>
-          <a:lstStyle/>
-          <a:p>
-            <a:pPr algn="ctr"/>
-            <a:endParaRPr lang="en-PK"/>
           </a:p>
         </p:txBody>
       </p:sp>
@@ -3930,6 +9569,25 @@
   <p:clrMapOvr>
     <a:masterClrMapping/>
   </p:clrMapOvr>
+  <mc:AlternateContent xmlns:mc="http://schemas.openxmlformats.org/markup-compatibility/2006">
+    <mc:Choice xmlns:p15="http://schemas.microsoft.com/office/powerpoint/2012/main" Requires="p15">
+      <p:transition xmlns:p14="http://schemas.microsoft.com/office/powerpoint/2010/main" spd="slow" p14:dur="2000">
+        <p15:prstTrans prst="drape"/>
+      </p:transition>
+    </mc:Choice>
+    <mc:Fallback>
+      <p:transition spd="slow">
+        <p:fade/>
+      </p:transition>
+    </mc:Fallback>
+  </mc:AlternateContent>
+  <p:timing>
+    <p:tnLst>
+      <p:par>
+        <p:cTn id="1" dur="indefinite" restart="never" nodeType="tmRoot"/>
+      </p:par>
+    </p:tnLst>
+  </p:timing>
 </p:sld>
 </file>
 
@@ -4203,7 +9861,7 @@
         </p:spPr>
         <p:txBody>
           <a:bodyPr wrap="square" lIns="0" tIns="0" rIns="0" bIns="0" rtlCol="0" anchor="t">
-            <a:normAutofit/>
+            <a:normAutofit lnSpcReduction="10000"/>
           </a:bodyPr>
           <a:lstStyle/>
           <a:p>
@@ -4457,58 +10115,31 @@
           </a:solidFill>
           <a:ln/>
         </p:spPr>
-      </p:sp>
-      <p:sp>
-        <p:nvSpPr>
-          <p:cNvPr id="13" name="Rectangle 12">
-            <a:extLst>
-              <a:ext uri="{FF2B5EF4-FFF2-40B4-BE49-F238E27FC236}">
-                <a16:creationId xmlns:a16="http://schemas.microsoft.com/office/drawing/2014/main" id="{41881BAF-E846-9C17-FEF0-90A5E50E48EF}"/>
-              </a:ext>
-            </a:extLst>
-          </p:cNvPr>
-          <p:cNvSpPr/>
-          <p:nvPr/>
-        </p:nvSpPr>
-        <p:spPr>
-          <a:xfrm>
-            <a:off x="11137622" y="6614102"/>
-            <a:ext cx="906596" cy="139411"/>
-          </a:xfrm>
-          <a:prstGeom prst="rect">
-            <a:avLst/>
-          </a:prstGeom>
-        </p:spPr>
-        <p:style>
-          <a:lnRef idx="2">
-            <a:schemeClr val="dk1">
-              <a:shade val="15000"/>
-            </a:schemeClr>
-          </a:lnRef>
-          <a:fillRef idx="1">
-            <a:schemeClr val="dk1"/>
-          </a:fillRef>
-          <a:effectRef idx="0">
-            <a:schemeClr val="dk1"/>
-          </a:effectRef>
-          <a:fontRef idx="minor">
-            <a:schemeClr val="lt1"/>
-          </a:fontRef>
-        </p:style>
-        <p:txBody>
-          <a:bodyPr rtlCol="0" anchor="ctr"/>
-          <a:lstStyle/>
-          <a:p>
-            <a:pPr algn="ctr"/>
-            <a:endParaRPr lang="en-PK"/>
-          </a:p>
-        </p:txBody>
       </p:sp>
     </p:spTree>
   </p:cSld>
   <p:clrMapOvr>
     <a:masterClrMapping/>
   </p:clrMapOvr>
+  <mc:AlternateContent xmlns:mc="http://schemas.openxmlformats.org/markup-compatibility/2006">
+    <mc:Choice xmlns:p14="http://schemas.microsoft.com/office/powerpoint/2010/main" Requires="p14">
+      <p:transition spd="slow" p14:dur="3000">
+        <p14:shred/>
+      </p:transition>
+    </mc:Choice>
+    <mc:Fallback>
+      <p:transition spd="slow">
+        <p:fade/>
+      </p:transition>
+    </mc:Fallback>
+  </mc:AlternateContent>
+  <p:timing>
+    <p:tnLst>
+      <p:par>
+        <p:cTn id="1" dur="indefinite" restart="never" nodeType="tmRoot"/>
+      </p:par>
+    </p:tnLst>
+  </p:timing>
 </p:sld>
 </file>
 
@@ -4537,7 +10168,7 @@
         </p:nvSpPr>
         <p:spPr>
           <a:xfrm>
-            <a:off x="965176" y="1830387"/>
+            <a:off x="851960" y="933396"/>
             <a:ext cx="4165496" cy="474960"/>
           </a:xfrm>
           <a:prstGeom prst="rect">
@@ -4579,7 +10210,7 @@
         </p:nvSpPr>
         <p:spPr>
           <a:xfrm>
-            <a:off x="965176" y="2464098"/>
+            <a:off x="808415" y="2420554"/>
             <a:ext cx="4165496" cy="377130"/>
           </a:xfrm>
           <a:prstGeom prst="rect">
@@ -4621,7 +10252,7 @@
         </p:nvSpPr>
         <p:spPr>
           <a:xfrm>
-            <a:off x="965176" y="3019028"/>
+            <a:off x="895506" y="3001610"/>
             <a:ext cx="4165496" cy="2008584"/>
           </a:xfrm>
           <a:prstGeom prst="rect">
@@ -4792,7 +10423,7 @@
         </p:nvSpPr>
         <p:spPr>
           <a:xfrm>
-            <a:off x="6095848" y="1077416"/>
+            <a:off x="5172739" y="1042580"/>
             <a:ext cx="6095848" cy="401241"/>
           </a:xfrm>
           <a:prstGeom prst="rect">
@@ -4812,7 +10443,7 @@
         </p:nvSpPr>
         <p:spPr>
           <a:xfrm>
-            <a:off x="6095848" y="1153616"/>
+            <a:off x="5172739" y="1118780"/>
             <a:ext cx="6095848" cy="248841"/>
           </a:xfrm>
           <a:prstGeom prst="rect">
@@ -4854,7 +10485,7 @@
         </p:nvSpPr>
         <p:spPr>
           <a:xfrm>
-            <a:off x="6095848" y="1478657"/>
+            <a:off x="5172739" y="1443821"/>
             <a:ext cx="6095848" cy="213320"/>
           </a:xfrm>
           <a:prstGeom prst="rect">
@@ -4896,7 +10527,7 @@
         </p:nvSpPr>
         <p:spPr>
           <a:xfrm>
-            <a:off x="6095848" y="1691977"/>
+            <a:off x="5172739" y="1657141"/>
             <a:ext cx="6095848" cy="401241"/>
           </a:xfrm>
           <a:prstGeom prst="rect">
@@ -4916,7 +10547,7 @@
         </p:nvSpPr>
         <p:spPr>
           <a:xfrm>
-            <a:off x="6095848" y="1768177"/>
+            <a:off x="5172739" y="1733341"/>
             <a:ext cx="6095848" cy="248841"/>
           </a:xfrm>
           <a:prstGeom prst="rect">
@@ -4958,7 +10589,7 @@
         </p:nvSpPr>
         <p:spPr>
           <a:xfrm>
-            <a:off x="6095848" y="2093218"/>
+            <a:off x="5172739" y="2058382"/>
             <a:ext cx="6095848" cy="213320"/>
           </a:xfrm>
           <a:prstGeom prst="rect">
@@ -5000,7 +10631,7 @@
         </p:nvSpPr>
         <p:spPr>
           <a:xfrm>
-            <a:off x="6095848" y="2306538"/>
+            <a:off x="5172739" y="2271702"/>
             <a:ext cx="6095848" cy="401241"/>
           </a:xfrm>
           <a:prstGeom prst="rect">
@@ -5020,7 +10651,7 @@
         </p:nvSpPr>
         <p:spPr>
           <a:xfrm>
-            <a:off x="6095848" y="2382738"/>
+            <a:off x="5172739" y="2347902"/>
             <a:ext cx="6095848" cy="248841"/>
           </a:xfrm>
           <a:prstGeom prst="rect">
@@ -5062,7 +10693,7 @@
         </p:nvSpPr>
         <p:spPr>
           <a:xfrm>
-            <a:off x="6095848" y="2707779"/>
+            <a:off x="5172739" y="2672943"/>
             <a:ext cx="6095848" cy="213320"/>
           </a:xfrm>
           <a:prstGeom prst="rect">
@@ -5104,7 +10735,7 @@
         </p:nvSpPr>
         <p:spPr>
           <a:xfrm>
-            <a:off x="6095848" y="2921099"/>
+            <a:off x="5172739" y="2886263"/>
             <a:ext cx="6095848" cy="401241"/>
           </a:xfrm>
           <a:prstGeom prst="rect">
@@ -5124,7 +10755,7 @@
         </p:nvSpPr>
         <p:spPr>
           <a:xfrm>
-            <a:off x="6095848" y="2997299"/>
+            <a:off x="5172739" y="2962463"/>
             <a:ext cx="6095848" cy="248841"/>
           </a:xfrm>
           <a:prstGeom prst="rect">
@@ -5166,7 +10797,7 @@
         </p:nvSpPr>
         <p:spPr>
           <a:xfrm>
-            <a:off x="6095848" y="3322340"/>
+            <a:off x="5172739" y="3287504"/>
             <a:ext cx="6095848" cy="213320"/>
           </a:xfrm>
           <a:prstGeom prst="rect">
@@ -5208,7 +10839,7 @@
         </p:nvSpPr>
         <p:spPr>
           <a:xfrm>
-            <a:off x="6095848" y="3535660"/>
+            <a:off x="5172739" y="3500824"/>
             <a:ext cx="6095848" cy="401241"/>
           </a:xfrm>
           <a:prstGeom prst="rect">
@@ -5228,7 +10859,7 @@
         </p:nvSpPr>
         <p:spPr>
           <a:xfrm>
-            <a:off x="6095848" y="3611860"/>
+            <a:off x="5172739" y="3577024"/>
             <a:ext cx="6095848" cy="248841"/>
           </a:xfrm>
           <a:prstGeom prst="rect">
@@ -5270,7 +10901,7 @@
         </p:nvSpPr>
         <p:spPr>
           <a:xfrm>
-            <a:off x="6095848" y="3936901"/>
+            <a:off x="5172739" y="3902065"/>
             <a:ext cx="6095848" cy="213320"/>
           </a:xfrm>
           <a:prstGeom prst="rect">
@@ -5312,7 +10943,7 @@
         </p:nvSpPr>
         <p:spPr>
           <a:xfrm>
-            <a:off x="6095848" y="4150221"/>
+            <a:off x="5172739" y="4115385"/>
             <a:ext cx="6095848" cy="401241"/>
           </a:xfrm>
           <a:prstGeom prst="rect">
@@ -5332,7 +10963,7 @@
         </p:nvSpPr>
         <p:spPr>
           <a:xfrm>
-            <a:off x="6095848" y="4226421"/>
+            <a:off x="5172739" y="4191585"/>
             <a:ext cx="6095848" cy="248841"/>
           </a:xfrm>
           <a:prstGeom prst="rect">
@@ -5374,7 +11005,7 @@
         </p:nvSpPr>
         <p:spPr>
           <a:xfrm>
-            <a:off x="6095848" y="4551462"/>
+            <a:off x="5172739" y="4516626"/>
             <a:ext cx="6095848" cy="213320"/>
           </a:xfrm>
           <a:prstGeom prst="rect">
@@ -5416,7 +11047,7 @@
         </p:nvSpPr>
         <p:spPr>
           <a:xfrm>
-            <a:off x="6095848" y="4764782"/>
+            <a:off x="5172739" y="4729946"/>
             <a:ext cx="6095848" cy="401241"/>
           </a:xfrm>
           <a:prstGeom prst="rect">
@@ -5436,7 +11067,7 @@
         </p:nvSpPr>
         <p:spPr>
           <a:xfrm>
-            <a:off x="6095848" y="4840982"/>
+            <a:off x="5172739" y="4806146"/>
             <a:ext cx="6095848" cy="248841"/>
           </a:xfrm>
           <a:prstGeom prst="rect">
@@ -5478,7 +11109,7 @@
         </p:nvSpPr>
         <p:spPr>
           <a:xfrm>
-            <a:off x="6095848" y="5166023"/>
+            <a:off x="5172739" y="5131187"/>
             <a:ext cx="6095848" cy="213320"/>
           </a:xfrm>
           <a:prstGeom prst="rect">
@@ -5520,7 +11151,7 @@
         </p:nvSpPr>
         <p:spPr>
           <a:xfrm>
-            <a:off x="6095848" y="5379343"/>
+            <a:off x="5172739" y="5344507"/>
             <a:ext cx="6095848" cy="401241"/>
           </a:xfrm>
           <a:prstGeom prst="rect">
@@ -5540,7 +11171,7 @@
         </p:nvSpPr>
         <p:spPr>
           <a:xfrm>
-            <a:off x="6095848" y="5455543"/>
+            <a:off x="5172739" y="5420707"/>
             <a:ext cx="6095848" cy="248841"/>
           </a:xfrm>
           <a:prstGeom prst="rect">
@@ -5613,52 +11244,6 @@
               <a:t>04 / 10</a:t>
             </a:r>
             <a:endParaRPr lang="en-US" sz="1750" dirty="0"/>
-          </a:p>
-        </p:txBody>
-      </p:sp>
-      <p:sp>
-        <p:nvSpPr>
-          <p:cNvPr id="29" name="Rectangle 28">
-            <a:extLst>
-              <a:ext uri="{FF2B5EF4-FFF2-40B4-BE49-F238E27FC236}">
-                <a16:creationId xmlns:a16="http://schemas.microsoft.com/office/drawing/2014/main" id="{251C754F-37BC-3DAD-F2E3-4C3853EA3567}"/>
-              </a:ext>
-            </a:extLst>
-          </p:cNvPr>
-          <p:cNvSpPr/>
-          <p:nvPr/>
-        </p:nvSpPr>
-        <p:spPr>
-          <a:xfrm>
-            <a:off x="11137622" y="6595630"/>
-            <a:ext cx="906596" cy="139411"/>
-          </a:xfrm>
-          <a:prstGeom prst="rect">
-            <a:avLst/>
-          </a:prstGeom>
-        </p:spPr>
-        <p:style>
-          <a:lnRef idx="2">
-            <a:schemeClr val="dk1">
-              <a:shade val="15000"/>
-            </a:schemeClr>
-          </a:lnRef>
-          <a:fillRef idx="1">
-            <a:schemeClr val="dk1"/>
-          </a:fillRef>
-          <a:effectRef idx="0">
-            <a:schemeClr val="dk1"/>
-          </a:effectRef>
-          <a:fontRef idx="minor">
-            <a:schemeClr val="lt1"/>
-          </a:fontRef>
-        </p:style>
-        <p:txBody>
-          <a:bodyPr rtlCol="0" anchor="ctr"/>
-          <a:lstStyle/>
-          <a:p>
-            <a:pPr algn="ctr"/>
-            <a:endParaRPr lang="en-PK"/>
           </a:p>
         </p:txBody>
       </p:sp>
@@ -5667,6 +11252,25 @@
   <p:clrMapOvr>
     <a:masterClrMapping/>
   </p:clrMapOvr>
+  <mc:AlternateContent xmlns:mc="http://schemas.openxmlformats.org/markup-compatibility/2006">
+    <mc:Choice xmlns:p15="http://schemas.microsoft.com/office/powerpoint/2012/main" Requires="p15">
+      <p:transition xmlns:p14="http://schemas.microsoft.com/office/powerpoint/2010/main" spd="slow" p14:dur="2000">
+        <p15:prstTrans prst="fallOver"/>
+      </p:transition>
+    </mc:Choice>
+    <mc:Fallback>
+      <p:transition spd="slow">
+        <p:fade/>
+      </p:transition>
+    </mc:Fallback>
+  </mc:AlternateContent>
+  <p:timing>
+    <p:tnLst>
+      <p:par>
+        <p:cTn id="1" dur="indefinite" restart="never" nodeType="tmRoot"/>
+      </p:par>
+    </p:tnLst>
+  </p:timing>
 </p:sld>
 </file>
 
@@ -5695,7 +11299,7 @@
         </p:nvSpPr>
         <p:spPr>
           <a:xfrm>
-            <a:off x="965176" y="965200"/>
+            <a:off x="1017430" y="799732"/>
             <a:ext cx="10261343" cy="474960"/>
           </a:xfrm>
           <a:prstGeom prst="rect">
@@ -5737,7 +11341,7 @@
         </p:nvSpPr>
         <p:spPr>
           <a:xfrm>
-            <a:off x="965176" y="1598910"/>
+            <a:off x="1069680" y="1546656"/>
             <a:ext cx="10261343" cy="377130"/>
           </a:xfrm>
           <a:prstGeom prst="rect">
@@ -5779,7 +11383,7 @@
         </p:nvSpPr>
         <p:spPr>
           <a:xfrm>
-            <a:off x="965176" y="2153841"/>
+            <a:off x="1069680" y="2101587"/>
             <a:ext cx="10261343" cy="1715294"/>
           </a:xfrm>
           <a:prstGeom prst="rect">
@@ -5937,7 +11541,7 @@
         </p:blipFill>
         <p:spPr>
           <a:xfrm>
-            <a:off x="965176" y="4027884"/>
+            <a:off x="1287399" y="3966921"/>
             <a:ext cx="444489" cy="444500"/>
           </a:xfrm>
           <a:prstGeom prst="rect">
@@ -5953,7 +11557,7 @@
         </p:nvSpPr>
         <p:spPr>
           <a:xfrm>
-            <a:off x="965176" y="4631134"/>
+            <a:off x="1287399" y="4570171"/>
             <a:ext cx="3267985" cy="277813"/>
           </a:xfrm>
           <a:prstGeom prst="rect">
@@ -6003,7 +11607,7 @@
         </p:blipFill>
         <p:spPr>
           <a:xfrm>
-            <a:off x="4537954" y="4027884"/>
+            <a:off x="4860177" y="3966921"/>
             <a:ext cx="444489" cy="444500"/>
           </a:xfrm>
           <a:prstGeom prst="rect">
@@ -6019,7 +11623,7 @@
         </p:nvSpPr>
         <p:spPr>
           <a:xfrm>
-            <a:off x="4537954" y="4631134"/>
+            <a:off x="4860177" y="4570171"/>
             <a:ext cx="3115688" cy="277813"/>
           </a:xfrm>
           <a:prstGeom prst="rect">
@@ -6069,7 +11673,7 @@
         </p:blipFill>
         <p:spPr>
           <a:xfrm>
-            <a:off x="7958434" y="4027884"/>
+            <a:off x="8280657" y="3966921"/>
             <a:ext cx="444489" cy="444500"/>
           </a:xfrm>
           <a:prstGeom prst="rect">
@@ -6085,7 +11689,7 @@
         </p:nvSpPr>
         <p:spPr>
           <a:xfrm>
-            <a:off x="7958434" y="4631134"/>
+            <a:off x="8280657" y="4570171"/>
             <a:ext cx="3268085" cy="277813"/>
           </a:xfrm>
           <a:prstGeom prst="rect">
@@ -6135,7 +11739,7 @@
         </p:blipFill>
         <p:spPr>
           <a:xfrm>
-            <a:off x="965176" y="5213747"/>
+            <a:off x="1287399" y="5152784"/>
             <a:ext cx="444489" cy="444500"/>
           </a:xfrm>
           <a:prstGeom prst="rect">
@@ -6151,7 +11755,7 @@
         </p:nvSpPr>
         <p:spPr>
           <a:xfrm>
-            <a:off x="965176" y="5816997"/>
+            <a:off x="1287399" y="5756034"/>
             <a:ext cx="3267985" cy="277813"/>
           </a:xfrm>
           <a:prstGeom prst="rect">
@@ -6201,7 +11805,7 @@
         </p:blipFill>
         <p:spPr>
           <a:xfrm>
-            <a:off x="4537954" y="5213747"/>
+            <a:off x="4860177" y="5152784"/>
             <a:ext cx="444489" cy="444500"/>
           </a:xfrm>
           <a:prstGeom prst="rect">
@@ -6217,7 +11821,7 @@
         </p:nvSpPr>
         <p:spPr>
           <a:xfrm>
-            <a:off x="4537954" y="5816997"/>
+            <a:off x="4860177" y="5756034"/>
             <a:ext cx="3115688" cy="277813"/>
           </a:xfrm>
           <a:prstGeom prst="rect">
@@ -6267,7 +11871,7 @@
         </p:blipFill>
         <p:spPr>
           <a:xfrm>
-            <a:off x="7958434" y="5213747"/>
+            <a:off x="8280657" y="5152784"/>
             <a:ext cx="444489" cy="444500"/>
           </a:xfrm>
           <a:prstGeom prst="rect">
@@ -6283,7 +11887,7 @@
         </p:nvSpPr>
         <p:spPr>
           <a:xfrm>
-            <a:off x="7958434" y="5816997"/>
+            <a:off x="8280657" y="5756034"/>
             <a:ext cx="3268085" cy="277813"/>
           </a:xfrm>
           <a:prstGeom prst="rect">
@@ -6356,52 +11960,6 @@
               <a:t>05 / 10</a:t>
             </a:r>
             <a:endParaRPr lang="en-US" sz="1750" dirty="0"/>
-          </a:p>
-        </p:txBody>
-      </p:sp>
-      <p:sp>
-        <p:nvSpPr>
-          <p:cNvPr id="18" name="Rectangle 17">
-            <a:extLst>
-              <a:ext uri="{FF2B5EF4-FFF2-40B4-BE49-F238E27FC236}">
-                <a16:creationId xmlns:a16="http://schemas.microsoft.com/office/drawing/2014/main" id="{D853E21B-D5CB-EEF9-500C-05D4074C9B1A}"/>
-              </a:ext>
-            </a:extLst>
-          </p:cNvPr>
-          <p:cNvSpPr/>
-          <p:nvPr/>
-        </p:nvSpPr>
-        <p:spPr>
-          <a:xfrm>
-            <a:off x="11137622" y="6595630"/>
-            <a:ext cx="906596" cy="139411"/>
-          </a:xfrm>
-          <a:prstGeom prst="rect">
-            <a:avLst/>
-          </a:prstGeom>
-        </p:spPr>
-        <p:style>
-          <a:lnRef idx="2">
-            <a:schemeClr val="dk1">
-              <a:shade val="15000"/>
-            </a:schemeClr>
-          </a:lnRef>
-          <a:fillRef idx="1">
-            <a:schemeClr val="dk1"/>
-          </a:fillRef>
-          <a:effectRef idx="0">
-            <a:schemeClr val="dk1"/>
-          </a:effectRef>
-          <a:fontRef idx="minor">
-            <a:schemeClr val="lt1"/>
-          </a:fontRef>
-        </p:style>
-        <p:txBody>
-          <a:bodyPr rtlCol="0" anchor="ctr"/>
-          <a:lstStyle/>
-          <a:p>
-            <a:pPr algn="ctr"/>
-            <a:endParaRPr lang="en-PK"/>
           </a:p>
         </p:txBody>
       </p:sp>
@@ -6410,6 +11968,25 @@
   <p:clrMapOvr>
     <a:masterClrMapping/>
   </p:clrMapOvr>
+  <mc:AlternateContent xmlns:mc="http://schemas.openxmlformats.org/markup-compatibility/2006">
+    <mc:Choice xmlns:p15="http://schemas.microsoft.com/office/powerpoint/2012/main" Requires="p15">
+      <p:transition xmlns:p14="http://schemas.microsoft.com/office/powerpoint/2010/main" spd="slow" p14:dur="1250">
+        <p15:prstTrans prst="peelOff"/>
+      </p:transition>
+    </mc:Choice>
+    <mc:Fallback>
+      <p:transition spd="slow">
+        <p:fade/>
+      </p:transition>
+    </mc:Fallback>
+  </mc:AlternateContent>
+  <p:timing>
+    <p:tnLst>
+      <p:par>
+        <p:cTn id="1" dur="indefinite" restart="never" nodeType="tmRoot"/>
+      </p:par>
+    </p:tnLst>
+  </p:timing>
 </p:sld>
 </file>
 
@@ -6474,14 +12051,14 @@
       </p:sp>
       <p:sp>
         <p:nvSpPr>
-          <p:cNvPr id="3" name="Text 1"/>
+          <p:cNvPr id="4" name="Text 2"/>
           <p:cNvSpPr/>
           <p:nvPr/>
         </p:nvSpPr>
         <p:spPr>
           <a:xfrm>
-            <a:off x="965176" y="1598910"/>
-            <a:ext cx="10261343" cy="377130"/>
+            <a:off x="947758" y="2023211"/>
+            <a:ext cx="2336742" cy="349250"/>
           </a:xfrm>
           <a:prstGeom prst="rect">
             <a:avLst/>
@@ -6495,54 +12072,12 @@
           <a:p>
             <a:pPr marL="0" indent="0" algn="l">
               <a:lnSpc>
-                <a:spcPct val="92000"/>
-              </a:lnSpc>
-              <a:buNone/>
-            </a:pPr>
-            <a:r>
-              <a:rPr lang="en-US" sz="2700" kern="100" spc="-40" dirty="0">
-                <a:solidFill>
-                  <a:srgbClr val="111111"/>
-                </a:solidFill>
-                <a:latin typeface="Host Grotesk Medium" pitchFamily="34" charset="0"/>
-                <a:ea typeface="Host Grotesk Medium" pitchFamily="34" charset="-122"/>
-                <a:cs typeface="Host Grotesk Medium" pitchFamily="34" charset="-120"/>
-              </a:rPr>
-              <a:t>Main Features</a:t>
-            </a:r>
-            <a:endParaRPr lang="en-US" sz="2700" dirty="0"/>
-          </a:p>
-        </p:txBody>
-      </p:sp>
-      <p:sp>
-        <p:nvSpPr>
-          <p:cNvPr id="4" name="Text 2"/>
-          <p:cNvSpPr/>
-          <p:nvPr/>
-        </p:nvSpPr>
-        <p:spPr>
-          <a:xfrm>
-            <a:off x="965176" y="2153841"/>
-            <a:ext cx="2336742" cy="349250"/>
-          </a:xfrm>
-          <a:prstGeom prst="rect">
-            <a:avLst/>
-          </a:prstGeom>
-          <a:noFill/>
-          <a:ln/>
-        </p:spPr>
-        <p:txBody>
-          <a:bodyPr wrap="none" lIns="0" tIns="0" rIns="0" bIns="0" rtlCol="0" anchor="t"/>
-          <a:lstStyle/>
-          <a:p>
-            <a:pPr marL="0" indent="0" algn="l">
-              <a:lnSpc>
                 <a:spcPct val="104000"/>
               </a:lnSpc>
               <a:buNone/>
             </a:pPr>
             <a:r>
-              <a:rPr lang="en-US" sz="2200" dirty="0">
+              <a:rPr lang="en-US" sz="2000" dirty="0">
                 <a:solidFill>
                   <a:srgbClr val="111111"/>
                 </a:solidFill>
@@ -6552,7 +12087,7 @@
               </a:rPr>
               <a:t>Admin</a:t>
             </a:r>
-            <a:endParaRPr lang="en-US" sz="2200" dirty="0"/>
+            <a:endParaRPr lang="en-US" sz="2000" dirty="0"/>
           </a:p>
         </p:txBody>
       </p:sp>
@@ -6564,7 +12099,7 @@
         </p:nvSpPr>
         <p:spPr>
           <a:xfrm>
-            <a:off x="965176" y="2630091"/>
+            <a:off x="947758" y="2499461"/>
             <a:ext cx="2336742" cy="1084263"/>
           </a:xfrm>
           <a:prstGeom prst="rect">
@@ -6651,7 +12186,7 @@
         </p:nvSpPr>
         <p:spPr>
           <a:xfrm>
-            <a:off x="3606710" y="2153841"/>
+            <a:off x="3589292" y="2023211"/>
             <a:ext cx="2336742" cy="349250"/>
           </a:xfrm>
           <a:prstGeom prst="rect">
@@ -6671,7 +12206,7 @@
               <a:buNone/>
             </a:pPr>
             <a:r>
-              <a:rPr lang="en-US" sz="2200" dirty="0">
+              <a:rPr lang="en-US" sz="2000" dirty="0">
                 <a:solidFill>
                   <a:srgbClr val="111111"/>
                 </a:solidFill>
@@ -6681,7 +12216,7 @@
               </a:rPr>
               <a:t>Voter</a:t>
             </a:r>
-            <a:endParaRPr lang="en-US" sz="2200" dirty="0"/>
+            <a:endParaRPr lang="en-US" sz="2000" dirty="0"/>
           </a:p>
         </p:txBody>
       </p:sp>
@@ -6693,7 +12228,7 @@
         </p:nvSpPr>
         <p:spPr>
           <a:xfrm>
-            <a:off x="3606710" y="2630091"/>
+            <a:off x="3589292" y="2499461"/>
             <a:ext cx="2336742" cy="542131"/>
           </a:xfrm>
           <a:prstGeom prst="rect">
@@ -6759,7 +12294,7 @@
         </p:nvSpPr>
         <p:spPr>
           <a:xfrm>
-            <a:off x="6248244" y="2153841"/>
+            <a:off x="6230826" y="2023211"/>
             <a:ext cx="2336742" cy="349250"/>
           </a:xfrm>
           <a:prstGeom prst="rect">
@@ -6779,7 +12314,7 @@
               <a:buNone/>
             </a:pPr>
             <a:r>
-              <a:rPr lang="en-US" sz="2200" dirty="0">
+              <a:rPr lang="en-US" sz="2000" dirty="0">
                 <a:solidFill>
                   <a:srgbClr val="111111"/>
                 </a:solidFill>
@@ -6789,7 +12324,7 @@
               </a:rPr>
               <a:t>Blockchain</a:t>
             </a:r>
-            <a:endParaRPr lang="en-US" sz="2200" dirty="0"/>
+            <a:endParaRPr lang="en-US" sz="2000" dirty="0"/>
           </a:p>
         </p:txBody>
       </p:sp>
@@ -6801,8 +12336,8 @@
         </p:nvSpPr>
         <p:spPr>
           <a:xfrm>
-            <a:off x="6248244" y="2630091"/>
-            <a:ext cx="2336742" cy="1084263"/>
+            <a:off x="6230826" y="2499461"/>
+            <a:ext cx="2336742" cy="1619693"/>
           </a:xfrm>
           <a:prstGeom prst="rect">
             <a:avLst/>
@@ -6824,7 +12359,7 @@
               <a:buChar char="•"/>
             </a:pPr>
             <a:r>
-              <a:rPr lang="en-US" sz="1400" dirty="0">
+              <a:rPr lang="en-US" sz="1200" dirty="0">
                 <a:solidFill>
                   <a:srgbClr val="1E1E1C"/>
                 </a:solidFill>
@@ -6834,7 +12369,7 @@
               </a:rPr>
               <a:t>Record votes</a:t>
             </a:r>
-            <a:endParaRPr lang="en-US" sz="1400" dirty="0"/>
+            <a:endParaRPr lang="en-US" sz="1200" dirty="0"/>
           </a:p>
           <a:p>
             <a:pPr marL="284480" indent="-284480" algn="l">
@@ -6845,7 +12380,7 @@
               <a:buChar char="•"/>
             </a:pPr>
             <a:r>
-              <a:rPr lang="en-US" sz="1400" dirty="0">
+              <a:rPr lang="en-US" sz="1200" dirty="0">
                 <a:solidFill>
                   <a:srgbClr val="1E1E1C"/>
                 </a:solidFill>
@@ -6855,7 +12390,7 @@
               </a:rPr>
               <a:t>Prevent repeated voting</a:t>
             </a:r>
-            <a:endParaRPr lang="en-US" sz="1400" dirty="0"/>
+            <a:endParaRPr lang="en-US" sz="1200" dirty="0"/>
           </a:p>
           <a:p>
             <a:pPr marL="284480" indent="-284480" algn="l">
@@ -6866,7 +12401,7 @@
               <a:buChar char="•"/>
             </a:pPr>
             <a:r>
-              <a:rPr lang="en-US" sz="1400" dirty="0">
+              <a:rPr lang="en-US" sz="1200" dirty="0">
                 <a:solidFill>
                   <a:srgbClr val="1E1E1C"/>
                 </a:solidFill>
@@ -6876,7 +12411,7 @@
               </a:rPr>
               <a:t>Store the voting transaction</a:t>
             </a:r>
-            <a:endParaRPr lang="en-US" sz="1400" dirty="0"/>
+            <a:endParaRPr lang="en-US" sz="1200" dirty="0"/>
           </a:p>
         </p:txBody>
       </p:sp>
@@ -6888,7 +12423,7 @@
         </p:nvSpPr>
         <p:spPr>
           <a:xfrm>
-            <a:off x="8889778" y="2153841"/>
+            <a:off x="8872360" y="2023211"/>
             <a:ext cx="2336742" cy="349250"/>
           </a:xfrm>
           <a:prstGeom prst="rect">
@@ -6908,7 +12443,7 @@
               <a:buNone/>
             </a:pPr>
             <a:r>
-              <a:rPr lang="en-US" sz="2200" dirty="0">
+              <a:rPr lang="en-US" sz="2000" dirty="0">
                 <a:solidFill>
                   <a:srgbClr val="111111"/>
                 </a:solidFill>
@@ -6918,7 +12453,7 @@
               </a:rPr>
               <a:t>Results</a:t>
             </a:r>
-            <a:endParaRPr lang="en-US" sz="2200" dirty="0"/>
+            <a:endParaRPr lang="en-US" sz="2000" dirty="0"/>
           </a:p>
         </p:txBody>
       </p:sp>
@@ -6930,8 +12465,8 @@
         </p:nvSpPr>
         <p:spPr>
           <a:xfrm>
-            <a:off x="8889778" y="2630091"/>
-            <a:ext cx="2336742" cy="497681"/>
+            <a:off x="8872360" y="2499461"/>
+            <a:ext cx="2336742" cy="687876"/>
           </a:xfrm>
           <a:prstGeom prst="rect">
             <a:avLst/>
@@ -6941,7 +12476,7 @@
         </p:spPr>
         <p:txBody>
           <a:bodyPr wrap="square" lIns="0" tIns="0" rIns="0" bIns="0" rtlCol="0" anchor="t">
-            <a:normAutofit/>
+            <a:noAutofit/>
           </a:bodyPr>
           <a:lstStyle/>
           <a:p>
@@ -7196,7 +12731,7 @@
         </p:spPr>
         <p:txBody>
           <a:bodyPr wrap="square" lIns="0" tIns="0" rIns="0" bIns="0" rtlCol="0" anchor="t">
-            <a:normAutofit/>
+            <a:normAutofit lnSpcReduction="10000"/>
           </a:bodyPr>
           <a:lstStyle/>
           <a:p>
@@ -7406,58 +12941,31 @@
           </a:solidFill>
           <a:ln/>
         </p:spPr>
-      </p:sp>
-      <p:sp>
-        <p:nvSpPr>
-          <p:cNvPr id="24" name="Rectangle 23">
-            <a:extLst>
-              <a:ext uri="{FF2B5EF4-FFF2-40B4-BE49-F238E27FC236}">
-                <a16:creationId xmlns:a16="http://schemas.microsoft.com/office/drawing/2014/main" id="{0FC93431-8C10-3D1C-9734-AF2979F5F027}"/>
-              </a:ext>
-            </a:extLst>
-          </p:cNvPr>
-          <p:cNvSpPr/>
-          <p:nvPr/>
-        </p:nvSpPr>
-        <p:spPr>
-          <a:xfrm>
-            <a:off x="11137622" y="6595630"/>
-            <a:ext cx="906596" cy="139411"/>
-          </a:xfrm>
-          <a:prstGeom prst="rect">
-            <a:avLst/>
-          </a:prstGeom>
-        </p:spPr>
-        <p:style>
-          <a:lnRef idx="2">
-            <a:schemeClr val="dk1">
-              <a:shade val="15000"/>
-            </a:schemeClr>
-          </a:lnRef>
-          <a:fillRef idx="1">
-            <a:schemeClr val="dk1"/>
-          </a:fillRef>
-          <a:effectRef idx="0">
-            <a:schemeClr val="dk1"/>
-          </a:effectRef>
-          <a:fontRef idx="minor">
-            <a:schemeClr val="lt1"/>
-          </a:fontRef>
-        </p:style>
-        <p:txBody>
-          <a:bodyPr rtlCol="0" anchor="ctr"/>
-          <a:lstStyle/>
-          <a:p>
-            <a:pPr algn="ctr"/>
-            <a:endParaRPr lang="en-PK"/>
-          </a:p>
-        </p:txBody>
       </p:sp>
     </p:spTree>
   </p:cSld>
   <p:clrMapOvr>
     <a:masterClrMapping/>
   </p:clrMapOvr>
+  <mc:AlternateContent xmlns:mc="http://schemas.openxmlformats.org/markup-compatibility/2006">
+    <mc:Choice xmlns:p15="http://schemas.microsoft.com/office/powerpoint/2012/main" Requires="p15">
+      <p:transition xmlns:p14="http://schemas.microsoft.com/office/powerpoint/2010/main" spd="slow" p14:dur="1250">
+        <p15:prstTrans prst="pageCurlDouble"/>
+      </p:transition>
+    </mc:Choice>
+    <mc:Fallback>
+      <p:transition spd="slow">
+        <p:fade/>
+      </p:transition>
+    </mc:Fallback>
+  </mc:AlternateContent>
+  <p:timing>
+    <p:tnLst>
+      <p:par>
+        <p:cTn id="1" dur="indefinite" restart="never" nodeType="tmRoot"/>
+      </p:par>
+    </p:tnLst>
+  </p:timing>
 </p:sld>
 </file>
 
@@ -7588,14 +13096,14 @@
                 <a:gridCol w="1364422">
                   <a:extLst>
                     <a:ext uri="{9D8B030D-6E8A-4147-A177-3AD203B41FA5}">
-                      <a16:colId xmlns:a16="http://schemas.microsoft.com/office/drawing/2014/main" val="20000"/>
+                      <a16:colId xmlns:a16="http://schemas.microsoft.com/office/drawing/2014/main" xmlns="" val="20000"/>
                     </a:ext>
                   </a:extLst>
                 </a:gridCol>
                 <a:gridCol w="2648678">
                   <a:extLst>
                     <a:ext uri="{9D8B030D-6E8A-4147-A177-3AD203B41FA5}">
-                      <a16:colId xmlns:a16="http://schemas.microsoft.com/office/drawing/2014/main" val="20001"/>
+                      <a16:colId xmlns:a16="http://schemas.microsoft.com/office/drawing/2014/main" xmlns="" val="20001"/>
                     </a:ext>
                   </a:extLst>
                 </a:gridCol>
@@ -7733,7 +13241,7 @@
                 </a:tc>
                 <a:extLst>
                   <a:ext uri="{0D108BD9-81ED-4DB2-BD59-A6C34878D82A}">
-                    <a16:rowId xmlns:a16="http://schemas.microsoft.com/office/drawing/2014/main" val="10000"/>
+                    <a16:rowId xmlns:a16="http://schemas.microsoft.com/office/drawing/2014/main" xmlns="" val="10000"/>
                   </a:ext>
                 </a:extLst>
               </a:tr>
@@ -7870,7 +13378,7 @@
                 </a:tc>
                 <a:extLst>
                   <a:ext uri="{0D108BD9-81ED-4DB2-BD59-A6C34878D82A}">
-                    <a16:rowId xmlns:a16="http://schemas.microsoft.com/office/drawing/2014/main" val="10001"/>
+                    <a16:rowId xmlns:a16="http://schemas.microsoft.com/office/drawing/2014/main" xmlns="" val="10001"/>
                   </a:ext>
                 </a:extLst>
               </a:tr>
@@ -8007,7 +13515,7 @@
                 </a:tc>
                 <a:extLst>
                   <a:ext uri="{0D108BD9-81ED-4DB2-BD59-A6C34878D82A}">
-                    <a16:rowId xmlns:a16="http://schemas.microsoft.com/office/drawing/2014/main" val="10002"/>
+                    <a16:rowId xmlns:a16="http://schemas.microsoft.com/office/drawing/2014/main" xmlns="" val="10002"/>
                   </a:ext>
                 </a:extLst>
               </a:tr>
@@ -8144,7 +13652,7 @@
                 </a:tc>
                 <a:extLst>
                   <a:ext uri="{0D108BD9-81ED-4DB2-BD59-A6C34878D82A}">
-                    <a16:rowId xmlns:a16="http://schemas.microsoft.com/office/drawing/2014/main" val="10003"/>
+                    <a16:rowId xmlns:a16="http://schemas.microsoft.com/office/drawing/2014/main" xmlns="" val="10003"/>
                   </a:ext>
                 </a:extLst>
               </a:tr>
@@ -8281,7 +13789,7 @@
                 </a:tc>
                 <a:extLst>
                   <a:ext uri="{0D108BD9-81ED-4DB2-BD59-A6C34878D82A}">
-                    <a16:rowId xmlns:a16="http://schemas.microsoft.com/office/drawing/2014/main" val="10004"/>
+                    <a16:rowId xmlns:a16="http://schemas.microsoft.com/office/drawing/2014/main" xmlns="" val="10004"/>
                   </a:ext>
                 </a:extLst>
               </a:tr>
@@ -8418,7 +13926,7 @@
                 </a:tc>
                 <a:extLst>
                   <a:ext uri="{0D108BD9-81ED-4DB2-BD59-A6C34878D82A}">
-                    <a16:rowId xmlns:a16="http://schemas.microsoft.com/office/drawing/2014/main" val="10005"/>
+                    <a16:rowId xmlns:a16="http://schemas.microsoft.com/office/drawing/2014/main" xmlns="" val="10005"/>
                   </a:ext>
                 </a:extLst>
               </a:tr>
@@ -8555,7 +14063,7 @@
                 </a:tc>
                 <a:extLst>
                   <a:ext uri="{0D108BD9-81ED-4DB2-BD59-A6C34878D82A}">
-                    <a16:rowId xmlns:a16="http://schemas.microsoft.com/office/drawing/2014/main" val="10006"/>
+                    <a16:rowId xmlns:a16="http://schemas.microsoft.com/office/drawing/2014/main" xmlns="" val="10006"/>
                   </a:ext>
                 </a:extLst>
               </a:tr>
@@ -8692,7 +14200,7 @@
                 </a:tc>
                 <a:extLst>
                   <a:ext uri="{0D108BD9-81ED-4DB2-BD59-A6C34878D82A}">
-                    <a16:rowId xmlns:a16="http://schemas.microsoft.com/office/drawing/2014/main" val="10007"/>
+                    <a16:rowId xmlns:a16="http://schemas.microsoft.com/office/drawing/2014/main" xmlns="" val="10007"/>
                   </a:ext>
                 </a:extLst>
               </a:tr>
@@ -9368,57 +14876,30 @@
           </a:p>
         </p:txBody>
       </p:sp>
-      <p:sp>
-        <p:nvSpPr>
-          <p:cNvPr id="25" name="Rectangle 24">
-            <a:extLst>
-              <a:ext uri="{FF2B5EF4-FFF2-40B4-BE49-F238E27FC236}">
-                <a16:creationId xmlns:a16="http://schemas.microsoft.com/office/drawing/2014/main" id="{7EDB66C6-74CC-175B-ED12-4F8888C4AEB1}"/>
-              </a:ext>
-            </a:extLst>
-          </p:cNvPr>
-          <p:cNvSpPr/>
-          <p:nvPr/>
-        </p:nvSpPr>
-        <p:spPr>
-          <a:xfrm>
-            <a:off x="11137622" y="6595630"/>
-            <a:ext cx="906596" cy="139411"/>
-          </a:xfrm>
-          <a:prstGeom prst="rect">
-            <a:avLst/>
-          </a:prstGeom>
-        </p:spPr>
-        <p:style>
-          <a:lnRef idx="2">
-            <a:schemeClr val="dk1">
-              <a:shade val="15000"/>
-            </a:schemeClr>
-          </a:lnRef>
-          <a:fillRef idx="1">
-            <a:schemeClr val="dk1"/>
-          </a:fillRef>
-          <a:effectRef idx="0">
-            <a:schemeClr val="dk1"/>
-          </a:effectRef>
-          <a:fontRef idx="minor">
-            <a:schemeClr val="lt1"/>
-          </a:fontRef>
-        </p:style>
-        <p:txBody>
-          <a:bodyPr rtlCol="0" anchor="ctr"/>
-          <a:lstStyle/>
-          <a:p>
-            <a:pPr algn="ctr"/>
-            <a:endParaRPr lang="en-PK"/>
-          </a:p>
-        </p:txBody>
-      </p:sp>
     </p:spTree>
   </p:cSld>
   <p:clrMapOvr>
     <a:masterClrMapping/>
   </p:clrMapOvr>
+  <mc:AlternateContent xmlns:mc="http://schemas.openxmlformats.org/markup-compatibility/2006">
+    <mc:Choice xmlns:p15="http://schemas.microsoft.com/office/powerpoint/2012/main" Requires="p15">
+      <p:transition xmlns:p14="http://schemas.microsoft.com/office/powerpoint/2010/main" spd="slow" p14:dur="2000">
+        <p15:prstTrans prst="crush"/>
+      </p:transition>
+    </mc:Choice>
+    <mc:Fallback>
+      <p:transition spd="slow">
+        <p:fade/>
+      </p:transition>
+    </mc:Fallback>
+  </mc:AlternateContent>
+  <p:timing>
+    <p:tnLst>
+      <p:par>
+        <p:cTn id="1" dur="indefinite" restart="never" nodeType="tmRoot"/>
+      </p:par>
+    </p:tnLst>
+  </p:timing>
 </p:sld>
 </file>
 
@@ -9813,57 +15294,30 @@
           </a:p>
         </p:txBody>
       </p:sp>
-      <p:sp>
-        <p:nvSpPr>
-          <p:cNvPr id="7" name="Rectangle 6">
-            <a:extLst>
-              <a:ext uri="{FF2B5EF4-FFF2-40B4-BE49-F238E27FC236}">
-                <a16:creationId xmlns:a16="http://schemas.microsoft.com/office/drawing/2014/main" id="{09977990-78E0-2BF4-9334-442158AB7113}"/>
-              </a:ext>
-            </a:extLst>
-          </p:cNvPr>
-          <p:cNvSpPr/>
-          <p:nvPr/>
-        </p:nvSpPr>
-        <p:spPr>
-          <a:xfrm>
-            <a:off x="11137622" y="6595630"/>
-            <a:ext cx="906596" cy="139411"/>
-          </a:xfrm>
-          <a:prstGeom prst="rect">
-            <a:avLst/>
-          </a:prstGeom>
-        </p:spPr>
-        <p:style>
-          <a:lnRef idx="2">
-            <a:schemeClr val="dk1">
-              <a:shade val="15000"/>
-            </a:schemeClr>
-          </a:lnRef>
-          <a:fillRef idx="1">
-            <a:schemeClr val="dk1"/>
-          </a:fillRef>
-          <a:effectRef idx="0">
-            <a:schemeClr val="dk1"/>
-          </a:effectRef>
-          <a:fontRef idx="minor">
-            <a:schemeClr val="lt1"/>
-          </a:fontRef>
-        </p:style>
-        <p:txBody>
-          <a:bodyPr rtlCol="0" anchor="ctr"/>
-          <a:lstStyle/>
-          <a:p>
-            <a:pPr algn="ctr"/>
-            <a:endParaRPr lang="en-PK"/>
-          </a:p>
-        </p:txBody>
-      </p:sp>
     </p:spTree>
   </p:cSld>
   <p:clrMapOvr>
     <a:masterClrMapping/>
   </p:clrMapOvr>
+  <mc:AlternateContent xmlns:mc="http://schemas.openxmlformats.org/markup-compatibility/2006">
+    <mc:Choice xmlns:p15="http://schemas.microsoft.com/office/powerpoint/2012/main" Requires="p15">
+      <p:transition xmlns:p14="http://schemas.microsoft.com/office/powerpoint/2010/main" spd="slow" p14:dur="1250">
+        <p15:prstTrans prst="airplane"/>
+      </p:transition>
+    </mc:Choice>
+    <mc:Fallback>
+      <p:transition spd="slow">
+        <p:fade/>
+      </p:transition>
+    </mc:Fallback>
+  </mc:AlternateContent>
+  <p:timing>
+    <p:tnLst>
+      <p:par>
+        <p:cTn id="1" dur="indefinite" restart="never" nodeType="tmRoot"/>
+      </p:par>
+    </p:tnLst>
+  </p:timing>
 </p:sld>
 </file>
 
@@ -9934,7 +15388,7 @@
         </p:nvSpPr>
         <p:spPr>
           <a:xfrm>
-            <a:off x="965176" y="1617960"/>
+            <a:off x="982594" y="1687632"/>
             <a:ext cx="4902077" cy="377130"/>
           </a:xfrm>
           <a:prstGeom prst="rect">
@@ -9976,7 +15430,7 @@
         </p:nvSpPr>
         <p:spPr>
           <a:xfrm>
-            <a:off x="965176" y="2172891"/>
+            <a:off x="982594" y="2242563"/>
             <a:ext cx="4902077" cy="1422003"/>
           </a:xfrm>
           <a:prstGeom prst="rect">
@@ -10105,7 +15559,7 @@
         </p:nvSpPr>
         <p:spPr>
           <a:xfrm>
-            <a:off x="6324442" y="1617960"/>
+            <a:off x="6341860" y="1687632"/>
             <a:ext cx="4902077" cy="377130"/>
           </a:xfrm>
           <a:prstGeom prst="rect">
@@ -10147,7 +15601,7 @@
         </p:nvSpPr>
         <p:spPr>
           <a:xfrm>
-            <a:off x="6324442" y="2172891"/>
+            <a:off x="6341860" y="2242563"/>
             <a:ext cx="4902077" cy="1128713"/>
           </a:xfrm>
           <a:prstGeom prst="rect">
@@ -10255,8 +15709,8 @@
         </p:nvSpPr>
         <p:spPr>
           <a:xfrm>
-            <a:off x="126997" y="3962400"/>
-            <a:ext cx="8000800" cy="195560"/>
+            <a:off x="814973" y="3953697"/>
+            <a:ext cx="6178015" cy="343607"/>
           </a:xfrm>
           <a:prstGeom prst="rect">
             <a:avLst/>
@@ -10275,7 +15729,7 @@
               <a:buNone/>
             </a:pPr>
             <a:r>
-              <a:rPr lang="en-US" sz="1100" kern="100" spc="88" dirty="0">
+              <a:rPr lang="en-US" sz="1400" kern="100" spc="88" dirty="0">
                 <a:solidFill>
                   <a:srgbClr val="4F4F4B"/>
                 </a:solidFill>
@@ -10285,7 +15739,7 @@
               </a:rPr>
               <a:t>INSIDE</a:t>
             </a:r>
-            <a:endParaRPr lang="en-US" sz="1100" dirty="0"/>
+            <a:endParaRPr lang="en-US" sz="1400" dirty="0"/>
           </a:p>
         </p:txBody>
       </p:sp>
@@ -10297,8 +15751,8 @@
         </p:nvSpPr>
         <p:spPr>
           <a:xfrm>
-            <a:off x="126997" y="4316710"/>
-            <a:ext cx="7797605" cy="497681"/>
+            <a:off x="754015" y="4273165"/>
+            <a:ext cx="7144661" cy="1887514"/>
           </a:xfrm>
           <a:prstGeom prst="rect">
             <a:avLst/>
@@ -10312,11 +15766,12 @@
           </a:bodyPr>
           <a:lstStyle/>
           <a:p>
-            <a:pPr marL="0" indent="0" algn="l">
+            <a:pPr marL="285750" indent="-285750" algn="l">
               <a:lnSpc>
                 <a:spcPct val="117000"/>
               </a:lnSpc>
-              <a:buNone/>
+              <a:buFont typeface="Arial" panose="020B0604020202020204" pitchFamily="34" charset="0"/>
+              <a:buChar char="•"/>
             </a:pPr>
             <a:r>
               <a:rPr lang="en-US" sz="1400" dirty="0">
@@ -10327,7 +15782,106 @@
                 <a:ea typeface="Host Grotesk" pitchFamily="34" charset="-122"/>
                 <a:cs typeface="Host Grotesk" pitchFamily="34" charset="-120"/>
               </a:rPr>
-              <a:t>University Election · Class Election · Societies Election · Blockchain Demonstration · Smart Contract Learning</a:t>
+              <a:t>University Election </a:t>
+            </a:r>
+            <a:endParaRPr lang="en-US" sz="1400" dirty="0" smtClean="0">
+              <a:solidFill>
+                <a:srgbClr val="1E1E1C"/>
+              </a:solidFill>
+              <a:latin typeface="Host Grotesk" pitchFamily="34" charset="0"/>
+              <a:ea typeface="Host Grotesk" pitchFamily="34" charset="-122"/>
+              <a:cs typeface="Host Grotesk" pitchFamily="34" charset="-120"/>
+            </a:endParaRPr>
+          </a:p>
+          <a:p>
+            <a:pPr marL="285750" indent="-285750" algn="l">
+              <a:lnSpc>
+                <a:spcPct val="117000"/>
+              </a:lnSpc>
+              <a:buFont typeface="Arial" panose="020B0604020202020204" pitchFamily="34" charset="0"/>
+              <a:buChar char="•"/>
+            </a:pPr>
+            <a:r>
+              <a:rPr lang="en-US" sz="1400" dirty="0" smtClean="0">
+                <a:solidFill>
+                  <a:srgbClr val="1E1E1C"/>
+                </a:solidFill>
+                <a:latin typeface="Host Grotesk" pitchFamily="34" charset="0"/>
+                <a:ea typeface="Host Grotesk" pitchFamily="34" charset="-122"/>
+                <a:cs typeface="Host Grotesk" pitchFamily="34" charset="-120"/>
+              </a:rPr>
+              <a:t>Class Election</a:t>
+            </a:r>
+          </a:p>
+          <a:p>
+            <a:pPr marL="285750" indent="-285750" algn="l">
+              <a:lnSpc>
+                <a:spcPct val="117000"/>
+              </a:lnSpc>
+              <a:buFont typeface="Arial" panose="020B0604020202020204" pitchFamily="34" charset="0"/>
+              <a:buChar char="•"/>
+            </a:pPr>
+            <a:r>
+              <a:rPr lang="en-US" sz="1400" dirty="0" smtClean="0">
+                <a:solidFill>
+                  <a:srgbClr val="1E1E1C"/>
+                </a:solidFill>
+                <a:latin typeface="Host Grotesk" pitchFamily="34" charset="0"/>
+                <a:ea typeface="Host Grotesk" pitchFamily="34" charset="-122"/>
+                <a:cs typeface="Host Grotesk" pitchFamily="34" charset="-120"/>
+              </a:rPr>
+              <a:t>Societies Election</a:t>
+            </a:r>
+          </a:p>
+          <a:p>
+            <a:pPr marL="285750" indent="-285750" algn="l">
+              <a:lnSpc>
+                <a:spcPct val="117000"/>
+              </a:lnSpc>
+              <a:buFont typeface="Arial" panose="020B0604020202020204" pitchFamily="34" charset="0"/>
+              <a:buChar char="•"/>
+            </a:pPr>
+            <a:r>
+              <a:rPr lang="en-US" sz="1400" dirty="0" smtClean="0">
+                <a:solidFill>
+                  <a:srgbClr val="1E1E1C"/>
+                </a:solidFill>
+                <a:latin typeface="Host Grotesk" pitchFamily="34" charset="0"/>
+                <a:ea typeface="Host Grotesk" pitchFamily="34" charset="-122"/>
+                <a:cs typeface="Host Grotesk" pitchFamily="34" charset="-120"/>
+              </a:rPr>
+              <a:t>Blockchain Demonstration</a:t>
+            </a:r>
+          </a:p>
+          <a:p>
+            <a:pPr marL="285750" indent="-285750" algn="l">
+              <a:lnSpc>
+                <a:spcPct val="117000"/>
+              </a:lnSpc>
+              <a:buFont typeface="Arial" panose="020B0604020202020204" pitchFamily="34" charset="0"/>
+              <a:buChar char="•"/>
+            </a:pPr>
+            <a:r>
+              <a:rPr lang="en-US" sz="1400" dirty="0" smtClean="0">
+                <a:solidFill>
+                  <a:srgbClr val="1E1E1C"/>
+                </a:solidFill>
+                <a:latin typeface="Host Grotesk" pitchFamily="34" charset="0"/>
+                <a:ea typeface="Host Grotesk" pitchFamily="34" charset="-122"/>
+                <a:cs typeface="Host Grotesk" pitchFamily="34" charset="-120"/>
+              </a:rPr>
+              <a:t>Smart </a:t>
+            </a:r>
+            <a:r>
+              <a:rPr lang="en-US" sz="1400" dirty="0">
+                <a:solidFill>
+                  <a:srgbClr val="1E1E1C"/>
+                </a:solidFill>
+                <a:latin typeface="Host Grotesk" pitchFamily="34" charset="0"/>
+                <a:ea typeface="Host Grotesk" pitchFamily="34" charset="-122"/>
+                <a:cs typeface="Host Grotesk" pitchFamily="34" charset="-120"/>
+              </a:rPr>
+              <a:t>Contract Learning</a:t>
             </a:r>
             <a:endParaRPr lang="en-US" sz="1400" dirty="0"/>
           </a:p>
@@ -10341,8 +15895,8 @@
         </p:nvSpPr>
         <p:spPr>
           <a:xfrm>
-            <a:off x="8330992" y="3962400"/>
-            <a:ext cx="3860703" cy="195560"/>
+            <a:off x="8296157" y="3918861"/>
+            <a:ext cx="2057348" cy="380431"/>
           </a:xfrm>
           <a:prstGeom prst="rect">
             <a:avLst/>
@@ -10361,7 +15915,7 @@
               <a:buNone/>
             </a:pPr>
             <a:r>
-              <a:rPr lang="en-US" sz="1100" kern="100" spc="88" dirty="0">
+              <a:rPr lang="en-US" sz="1400" kern="100" spc="88" dirty="0">
                 <a:solidFill>
                   <a:srgbClr val="4F4F4B"/>
                 </a:solidFill>
@@ -10371,7 +15925,7 @@
               </a:rPr>
               <a:t>OUTSIDE</a:t>
             </a:r>
-            <a:endParaRPr lang="en-US" sz="1100" dirty="0"/>
+            <a:endParaRPr lang="en-US" sz="1400" dirty="0"/>
           </a:p>
         </p:txBody>
       </p:sp>
@@ -10383,8 +15937,8 @@
         </p:nvSpPr>
         <p:spPr>
           <a:xfrm>
-            <a:off x="8330992" y="4316710"/>
-            <a:ext cx="3860703" cy="248841"/>
+            <a:off x="8243904" y="4299292"/>
+            <a:ext cx="3051111" cy="1274193"/>
           </a:xfrm>
           <a:prstGeom prst="rect">
             <a:avLst/>
@@ -10396,11 +15950,12 @@
           <a:bodyPr wrap="none" lIns="0" tIns="0" rIns="0" bIns="0" rtlCol="0" anchor="t"/>
           <a:lstStyle/>
           <a:p>
-            <a:pPr marL="0" indent="0" algn="l">
+            <a:pPr marL="285750" indent="-285750" algn="l">
               <a:lnSpc>
                 <a:spcPct val="117000"/>
               </a:lnSpc>
-              <a:buNone/>
+              <a:buFont typeface="Arial" panose="020B0604020202020204" pitchFamily="34" charset="0"/>
+              <a:buChar char="•"/>
             </a:pPr>
             <a:r>
               <a:rPr lang="en-US" sz="1400" dirty="0">
@@ -10411,7 +15966,46 @@
                 <a:ea typeface="Host Grotesk" pitchFamily="34" charset="-122"/>
                 <a:cs typeface="Host Grotesk" pitchFamily="34" charset="-120"/>
               </a:rPr>
-              <a:t>National Elections · Government Elections</a:t>
+              <a:t>National Elections </a:t>
+            </a:r>
+            <a:endParaRPr lang="en-US" sz="1400" dirty="0" smtClean="0">
+              <a:solidFill>
+                <a:srgbClr val="1E1E1C"/>
+              </a:solidFill>
+              <a:latin typeface="Host Grotesk" pitchFamily="34" charset="0"/>
+              <a:ea typeface="Host Grotesk" pitchFamily="34" charset="-122"/>
+              <a:cs typeface="Host Grotesk" pitchFamily="34" charset="-120"/>
+            </a:endParaRPr>
+          </a:p>
+          <a:p>
+            <a:pPr marL="285750" indent="-285750" algn="l">
+              <a:lnSpc>
+                <a:spcPct val="117000"/>
+              </a:lnSpc>
+              <a:buFont typeface="Arial" panose="020B0604020202020204" pitchFamily="34" charset="0"/>
+              <a:buChar char="•"/>
+            </a:pPr>
+            <a:r>
+              <a:rPr lang="en-US" sz="1400" dirty="0" smtClean="0">
+                <a:solidFill>
+                  <a:srgbClr val="1E1E1C"/>
+                </a:solidFill>
+                <a:latin typeface="Host Grotesk" pitchFamily="34" charset="0"/>
+                <a:ea typeface="Host Grotesk" pitchFamily="34" charset="-122"/>
+                <a:cs typeface="Host Grotesk" pitchFamily="34" charset="-120"/>
+              </a:rPr>
+              <a:t>Government </a:t>
+            </a:r>
+            <a:r>
+              <a:rPr lang="en-US" sz="1400" dirty="0">
+                <a:solidFill>
+                  <a:srgbClr val="1E1E1C"/>
+                </a:solidFill>
+                <a:latin typeface="Host Grotesk" pitchFamily="34" charset="0"/>
+                <a:ea typeface="Host Grotesk" pitchFamily="34" charset="-122"/>
+                <a:cs typeface="Host Grotesk" pitchFamily="34" charset="-120"/>
+              </a:rPr>
+              <a:t>Elections</a:t>
             </a:r>
             <a:endParaRPr lang="en-US" sz="1400" dirty="0"/>
           </a:p>
@@ -10467,7 +16061,7 @@
         </p:nvSpPr>
         <p:spPr>
           <a:xfrm>
-            <a:off x="8121447" y="3886200"/>
+            <a:off x="8138865" y="3294024"/>
             <a:ext cx="12700" cy="2971800"/>
           </a:xfrm>
           <a:prstGeom prst="rect">
@@ -10478,65 +16072,38 @@
           </a:solidFill>
           <a:ln/>
         </p:spPr>
-      </p:sp>
-      <p:sp>
-        <p:nvSpPr>
-          <p:cNvPr id="13" name="Rectangle 12">
-            <a:extLst>
-              <a:ext uri="{FF2B5EF4-FFF2-40B4-BE49-F238E27FC236}">
-                <a16:creationId xmlns:a16="http://schemas.microsoft.com/office/drawing/2014/main" id="{9AE12E53-33BE-61B3-150E-9B3BB4ECB952}"/>
-              </a:ext>
-            </a:extLst>
-          </p:cNvPr>
-          <p:cNvSpPr/>
-          <p:nvPr/>
-        </p:nvSpPr>
-        <p:spPr>
-          <a:xfrm>
-            <a:off x="11137622" y="6595630"/>
-            <a:ext cx="906596" cy="139411"/>
-          </a:xfrm>
-          <a:prstGeom prst="rect">
-            <a:avLst/>
-          </a:prstGeom>
-        </p:spPr>
-        <p:style>
-          <a:lnRef idx="2">
-            <a:schemeClr val="dk1">
-              <a:shade val="15000"/>
-            </a:schemeClr>
-          </a:lnRef>
-          <a:fillRef idx="1">
-            <a:schemeClr val="dk1"/>
-          </a:fillRef>
-          <a:effectRef idx="0">
-            <a:schemeClr val="dk1"/>
-          </a:effectRef>
-          <a:fontRef idx="minor">
-            <a:schemeClr val="lt1"/>
-          </a:fontRef>
-        </p:style>
-        <p:txBody>
-          <a:bodyPr rtlCol="0" anchor="ctr"/>
-          <a:lstStyle/>
-          <a:p>
-            <a:pPr algn="ctr"/>
-            <a:endParaRPr lang="en-PK"/>
-          </a:p>
-        </p:txBody>
       </p:sp>
     </p:spTree>
   </p:cSld>
   <p:clrMapOvr>
     <a:masterClrMapping/>
   </p:clrMapOvr>
+  <mc:AlternateContent xmlns:mc="http://schemas.openxmlformats.org/markup-compatibility/2006">
+    <mc:Choice xmlns:p15="http://schemas.microsoft.com/office/powerpoint/2012/main" Requires="p15">
+      <p:transition xmlns:p14="http://schemas.microsoft.com/office/powerpoint/2010/main" spd="slow" p14:dur="2000">
+        <p15:prstTrans prst="fracture"/>
+      </p:transition>
+    </mc:Choice>
+    <mc:Fallback>
+      <p:transition spd="slow">
+        <p:fade/>
+      </p:transition>
+    </mc:Fallback>
+  </mc:AlternateContent>
+  <p:timing>
+    <p:tnLst>
+      <p:par>
+        <p:cTn id="1" dur="indefinite" restart="never" nodeType="tmRoot"/>
+      </p:par>
+    </p:tnLst>
+  </p:timing>
 </p:sld>
 </file>
 
 <file path=ppt/theme/theme1.xml><?xml version="1.0" encoding="utf-8"?>
-<a:theme xmlns:a="http://schemas.openxmlformats.org/drawingml/2006/main" name="Office Theme">
+<a:theme xmlns:a="http://schemas.openxmlformats.org/drawingml/2006/main" name="Organic">
   <a:themeElements>
-    <a:clrScheme name="Office">
+    <a:clrScheme name="Organic">
       <a:dk1>
         <a:sysClr val="windowText" lastClr="000000"/>
       </a:dk1>
@@ -10544,44 +16111,79 @@
         <a:sysClr val="window" lastClr="FFFFFF"/>
       </a:lt1>
       <a:dk2>
-        <a:srgbClr val="44546A"/>
+        <a:srgbClr val="212121"/>
       </a:dk2>
       <a:lt2>
-        <a:srgbClr val="E7E6E6"/>
+        <a:srgbClr val="DADADA"/>
       </a:lt2>
       <a:accent1>
-        <a:srgbClr val="4472C4"/>
+        <a:srgbClr val="83992A"/>
       </a:accent1>
       <a:accent2>
-        <a:srgbClr val="ED7D31"/>
+        <a:srgbClr val="3C9770"/>
       </a:accent2>
       <a:accent3>
-        <a:srgbClr val="A5A5A5"/>
+        <a:srgbClr val="44709D"/>
       </a:accent3>
       <a:accent4>
-        <a:srgbClr val="FFC000"/>
+        <a:srgbClr val="A23C33"/>
       </a:accent4>
       <a:accent5>
-        <a:srgbClr val="5B9BD5"/>
+        <a:srgbClr val="D97828"/>
       </a:accent5>
       <a:accent6>
-        <a:srgbClr val="70AD47"/>
+        <a:srgbClr val="DEB340"/>
       </a:accent6>
       <a:hlink>
-        <a:srgbClr val="0563C1"/>
+        <a:srgbClr val="A8BF4D"/>
       </a:hlink>
       <a:folHlink>
-        <a:srgbClr val="954F72"/>
+        <a:srgbClr val="B4CA80"/>
       </a:folHlink>
     </a:clrScheme>
-    <a:fontScheme name="Office">
+    <a:fontScheme name="Organic">
       <a:majorFont>
-        <a:latin typeface="Calibri Light" panose="020F0302020204030204"/>
+        <a:latin typeface="Garamond" panose="02020404030301010803"/>
         <a:ea typeface=""/>
         <a:cs typeface=""/>
-        <a:font script="Jpan" typeface="游ゴシック Light"/>
-        <a:font script="Hang" typeface="맑은 고딕"/>
-        <a:font script="Hans" typeface="等线 Light"/>
+        <a:font script="Jpan" typeface="ＭＳ Ｐゴシック"/>
+        <a:font script="Hang" typeface="돋움"/>
+        <a:font script="Hans" typeface="方正舒体"/>
+        <a:font script="Hant" typeface="微軟正黑體"/>
+        <a:font script="Arab" typeface="Arial"/>
+        <a:font script="Hebr" typeface="Arial"/>
+        <a:font script="Thai" typeface="Cordia New"/>
+        <a:font script="Ethi" typeface="Nyala"/>
+        <a:font script="Beng" typeface="Vrinda"/>
+        <a:font script="Gujr" typeface="Shruti"/>
+        <a:font script="Khmr" typeface="DaunPenh"/>
+        <a:font script="Knda" typeface="Tunga"/>
+        <a:font script="Guru" typeface="Raavi"/>
+        <a:font script="Cans" typeface="Euphemia"/>
+        <a:font script="Cher" typeface="Plantagenet Cherokee"/>
+        <a:font script="Yiii" typeface="Microsoft Yi Baiti"/>
+        <a:font script="Tibt" typeface="Microsoft Himalaya"/>
+        <a:font script="Thaa" typeface="MV Boli"/>
+        <a:font script="Deva" typeface="Mangal"/>
+        <a:font script="Telu" typeface="Gautami"/>
+        <a:font script="Taml" typeface="Latha"/>
+        <a:font script="Syrc" typeface="Estrangelo Edessa"/>
+        <a:font script="Orya" typeface="Kalinga"/>
+        <a:font script="Mlym" typeface="Kartika"/>
+        <a:font script="Laoo" typeface="DokChampa"/>
+        <a:font script="Sinh" typeface="Iskoola Pota"/>
+        <a:font script="Mong" typeface="Mongolian Baiti"/>
+        <a:font script="Viet" typeface="Arial"/>
+        <a:font script="Uigh" typeface="Microsoft Uighur"/>
+        <a:font script="Geor" typeface="Sylfaen"/>
+      </a:majorFont>
+      <a:minorFont>
+        <a:latin typeface="Garamond" panose="02020404030301010803"/>
+        <a:ea typeface=""/>
+        <a:cs typeface=""/>
+        <a:font script="Jpan" typeface="ＭＳ Ｐ明朝"/>
+        <a:font script="Hang" typeface="바탕"/>
+        <a:font script="Hans" typeface="方正舒体"/>
         <a:font script="Hant" typeface="新細明體"/>
         <a:font script="Arab" typeface="Times New Roman"/>
         <a:font script="Hebr" typeface="Times New Roman"/>
@@ -10609,78 +16211,9 @@
         <a:font script="Viet" typeface="Times New Roman"/>
         <a:font script="Uigh" typeface="Microsoft Uighur"/>
         <a:font script="Geor" typeface="Sylfaen"/>
-        <a:font script="Armn" typeface="Arial"/>
-        <a:font script="Bugi" typeface="Leelawadee UI"/>
-        <a:font script="Bopo" typeface="Microsoft JhengHei"/>
-        <a:font script="Java" typeface="Javanese Text"/>
-        <a:font script="Lisu" typeface="Segoe UI"/>
-        <a:font script="Mymr" typeface="Myanmar Text"/>
-        <a:font script="Nkoo" typeface="Ebrima"/>
-        <a:font script="Olck" typeface="Nirmala UI"/>
-        <a:font script="Osma" typeface="Ebrima"/>
-        <a:font script="Phag" typeface="Phagspa"/>
-        <a:font script="Syrn" typeface="Estrangelo Edessa"/>
-        <a:font script="Syrj" typeface="Estrangelo Edessa"/>
-        <a:font script="Syre" typeface="Estrangelo Edessa"/>
-        <a:font script="Sora" typeface="Nirmala UI"/>
-        <a:font script="Tale" typeface="Microsoft Tai Le"/>
-        <a:font script="Talu" typeface="Microsoft New Tai Lue"/>
-        <a:font script="Tfng" typeface="Ebrima"/>
-      </a:majorFont>
-      <a:minorFont>
-        <a:latin typeface="Calibri" panose="020F0502020204030204"/>
-        <a:ea typeface=""/>
-        <a:cs typeface=""/>
-        <a:font script="Jpan" typeface="游ゴシック"/>
-        <a:font script="Hang" typeface="맑은 고딕"/>
-        <a:font script="Hans" typeface="等线"/>
-        <a:font script="Hant" typeface="新細明體"/>
-        <a:font script="Arab" typeface="Arial"/>
-        <a:font script="Hebr" typeface="Arial"/>
-        <a:font script="Thai" typeface="Cordia New"/>
-        <a:font script="Ethi" typeface="Nyala"/>
-        <a:font script="Beng" typeface="Vrinda"/>
-        <a:font script="Gujr" typeface="Shruti"/>
-        <a:font script="Khmr" typeface="DaunPenh"/>
-        <a:font script="Knda" typeface="Tunga"/>
-        <a:font script="Guru" typeface="Raavi"/>
-        <a:font script="Cans" typeface="Euphemia"/>
-        <a:font script="Cher" typeface="Plantagenet Cherokee"/>
-        <a:font script="Yiii" typeface="Microsoft Yi Baiti"/>
-        <a:font script="Tibt" typeface="Microsoft Himalaya"/>
-        <a:font script="Thaa" typeface="MV Boli"/>
-        <a:font script="Deva" typeface="Mangal"/>
-        <a:font script="Telu" typeface="Gautami"/>
-        <a:font script="Taml" typeface="Latha"/>
-        <a:font script="Syrc" typeface="Estrangelo Edessa"/>
-        <a:font script="Orya" typeface="Kalinga"/>
-        <a:font script="Mlym" typeface="Kartika"/>
-        <a:font script="Laoo" typeface="DokChampa"/>
-        <a:font script="Sinh" typeface="Iskoola Pota"/>
-        <a:font script="Mong" typeface="Mongolian Baiti"/>
-        <a:font script="Viet" typeface="Arial"/>
-        <a:font script="Uigh" typeface="Microsoft Uighur"/>
-        <a:font script="Geor" typeface="Sylfaen"/>
-        <a:font script="Armn" typeface="Arial"/>
-        <a:font script="Bugi" typeface="Leelawadee UI"/>
-        <a:font script="Bopo" typeface="Microsoft JhengHei"/>
-        <a:font script="Java" typeface="Javanese Text"/>
-        <a:font script="Lisu" typeface="Segoe UI"/>
-        <a:font script="Mymr" typeface="Myanmar Text"/>
-        <a:font script="Nkoo" typeface="Ebrima"/>
-        <a:font script="Olck" typeface="Nirmala UI"/>
-        <a:font script="Osma" typeface="Ebrima"/>
-        <a:font script="Phag" typeface="Phagspa"/>
-        <a:font script="Syrn" typeface="Estrangelo Edessa"/>
-        <a:font script="Syrj" typeface="Estrangelo Edessa"/>
-        <a:font script="Syre" typeface="Estrangelo Edessa"/>
-        <a:font script="Sora" typeface="Nirmala UI"/>
-        <a:font script="Tale" typeface="Microsoft Tai Le"/>
-        <a:font script="Talu" typeface="Microsoft New Tai Lue"/>
-        <a:font script="Tfng" typeface="Ebrima"/>
       </a:minorFont>
     </a:fontScheme>
-    <a:fmtScheme name="Office">
+    <a:fmtScheme name="Organic">
       <a:fillStyleLst>
         <a:solidFill>
           <a:schemeClr val="phClr"/>
@@ -10689,76 +16222,54 @@
           <a:gsLst>
             <a:gs pos="0">
               <a:schemeClr val="phClr">
+                <a:tint val="60000"/>
                 <a:lumMod val="110000"/>
-                <a:satMod val="105000"/>
-                <a:tint val="67000"/>
-              </a:schemeClr>
-            </a:gs>
-            <a:gs pos="50000">
-              <a:schemeClr val="phClr">
-                <a:lumMod val="105000"/>
-                <a:satMod val="103000"/>
-                <a:tint val="73000"/>
               </a:schemeClr>
             </a:gs>
             <a:gs pos="100000">
               <a:schemeClr val="phClr">
-                <a:lumMod val="105000"/>
-                <a:satMod val="109000"/>
-                <a:tint val="81000"/>
+                <a:tint val="82000"/>
               </a:schemeClr>
             </a:gs>
           </a:gsLst>
           <a:lin ang="5400000" scaled="0"/>
         </a:gradFill>
-        <a:gradFill rotWithShape="1">
-          <a:gsLst>
-            <a:gs pos="0">
+        <a:blipFill>
+          <a:blip xmlns:r="http://schemas.openxmlformats.org/officeDocument/2006/relationships" r:embed="rId1">
+            <a:duotone>
               <a:schemeClr val="phClr">
-                <a:satMod val="103000"/>
-                <a:lumMod val="102000"/>
+                <a:shade val="74000"/>
+                <a:satMod val="130000"/>
+                <a:lumMod val="90000"/>
+              </a:schemeClr>
+              <a:schemeClr val="phClr">
                 <a:tint val="94000"/>
+                <a:satMod val="120000"/>
+                <a:lumMod val="104000"/>
               </a:schemeClr>
-            </a:gs>
-            <a:gs pos="50000">
-              <a:schemeClr val="phClr">
-                <a:satMod val="110000"/>
-                <a:lumMod val="100000"/>
-                <a:shade val="100000"/>
-              </a:schemeClr>
-            </a:gs>
-            <a:gs pos="100000">
-              <a:schemeClr val="phClr">
-                <a:lumMod val="99000"/>
-                <a:satMod val="120000"/>
-                <a:shade val="78000"/>
-              </a:schemeClr>
-            </a:gs>
-          </a:gsLst>
-          <a:lin ang="5400000" scaled="0"/>
-        </a:gradFill>
+            </a:duotone>
+          </a:blip>
+          <a:tile tx="0" ty="0" sx="100000" sy="100000" flip="none" algn="tl"/>
+        </a:blipFill>
       </a:fillStyleLst>
       <a:lnStyleLst>
-        <a:ln w="6350" cap="flat" cmpd="sng" algn="ctr">
+        <a:ln w="9525" cap="flat" cmpd="sng" algn="ctr">
           <a:solidFill>
             <a:schemeClr val="phClr"/>
           </a:solidFill>
           <a:prstDash val="solid"/>
-          <a:miter lim="800000"/>
         </a:ln>
-        <a:ln w="12700" cap="flat" cmpd="sng" algn="ctr">
+        <a:ln w="15875" cap="flat" cmpd="sng" algn="ctr">
           <a:solidFill>
             <a:schemeClr val="phClr"/>
           </a:solidFill>
           <a:prstDash val="solid"/>
-          <a:miter lim="800000"/>
         </a:ln>
-        <a:ln w="19050" cap="flat" cmpd="sng" algn="ctr">
+        <a:ln w="25400" cap="flat" cmpd="sng" algn="ctr">
           <a:solidFill>
             <a:schemeClr val="phClr"/>
           </a:solidFill>
           <a:prstDash val="solid"/>
-          <a:miter lim="800000"/>
         </a:ln>
       </a:lnStyleLst>
       <a:effectStyleLst>
@@ -10766,13 +16277,19 @@
           <a:effectLst/>
         </a:effectStyle>
         <a:effectStyle>
-          <a:effectLst/>
+          <a:effectLst>
+            <a:innerShdw blurRad="25400" dist="12700" dir="13500000">
+              <a:srgbClr val="000000">
+                <a:alpha val="45000"/>
+              </a:srgbClr>
+            </a:innerShdw>
+          </a:effectLst>
         </a:effectStyle>
         <a:effectStyle>
           <a:effectLst>
-            <a:outerShdw blurRad="57150" dist="19050" dir="5400000" algn="ctr" rotWithShape="0">
+            <a:outerShdw blurRad="38100" dist="25400" dir="5400000" rotWithShape="0">
               <a:srgbClr val="000000">
-                <a:alpha val="63000"/>
+                <a:alpha val="60000"/>
               </a:srgbClr>
             </a:outerShdw>
           </a:effectLst>
@@ -10782,39 +16299,27 @@
         <a:solidFill>
           <a:schemeClr val="phClr"/>
         </a:solidFill>
-        <a:solidFill>
-          <a:schemeClr val="phClr">
-            <a:tint val="95000"/>
-            <a:satMod val="170000"/>
-          </a:schemeClr>
-        </a:solidFill>
         <a:gradFill rotWithShape="1">
           <a:gsLst>
             <a:gs pos="0">
               <a:schemeClr val="phClr">
-                <a:tint val="93000"/>
-                <a:satMod val="150000"/>
-                <a:shade val="98000"/>
-                <a:lumMod val="102000"/>
-              </a:schemeClr>
-            </a:gs>
-            <a:gs pos="50000">
-              <a:schemeClr val="phClr">
-                <a:tint val="98000"/>
-                <a:satMod val="130000"/>
-                <a:shade val="90000"/>
-                <a:lumMod val="103000"/>
+                <a:tint val="90000"/>
+                <a:lumMod val="110000"/>
               </a:schemeClr>
             </a:gs>
             <a:gs pos="100000">
               <a:schemeClr val="phClr">
-                <a:shade val="63000"/>
-                <a:satMod val="120000"/>
+                <a:shade val="88000"/>
+                <a:lumMod val="98000"/>
               </a:schemeClr>
             </a:gs>
           </a:gsLst>
           <a:lin ang="5400000" scaled="0"/>
         </a:gradFill>
+        <a:blipFill>
+          <a:blip xmlns:r="http://schemas.openxmlformats.org/officeDocument/2006/relationships" r:embed="rId2"/>
+          <a:stretch/>
+        </a:blipFill>
       </a:bgFillStyleLst>
     </a:fmtScheme>
   </a:themeElements>
@@ -10822,7 +16327,7 @@
   <a:extraClrSchemeLst/>
   <a:extLst>
     <a:ext uri="{05A4C25C-085E-4340-85A3-A5531E510DB2}">
-      <thm15:themeFamily xmlns:thm15="http://schemas.microsoft.com/office/thememl/2012/main" name="Office Theme" id="{62F939B6-93AF-4DB8-9C6B-D6C7DFDC589F}" vid="{4A3C46E8-61CC-4603-A589-7422A47A8E4A}"/>
+      <thm15:themeFamily xmlns:thm15="http://schemas.microsoft.com/office/thememl/2012/main" name="Organic" id="{28CDC826-8792-45C0-861B-85EB3ADEDA33}" vid="{7DAC20F1-423D-49E2-BD0B-50532748BAD0}"/>
     </a:ext>
   </a:extLst>
 </a:theme>

--- a/Documentation/Blockchain-Based-Voting-System.pptx
+++ b/Documentation/Blockchain-Based-Voting-System.pptx
@@ -28,21 +28,21 @@
       <p:regular r:id="rId14"/>
     </p:embeddedFont>
     <p:embeddedFont>
+      <p:font typeface="Garamond" panose="02020404030301010803" pitchFamily="18" charset="0"/>
+      <p:regular r:id="rId15"/>
+      <p:bold r:id="rId16"/>
+      <p:italic r:id="rId17"/>
+    </p:embeddedFont>
+    <p:embeddedFont>
+      <p:font typeface="Host Grotesk" panose="020B0604020202020204" charset="0"/>
+      <p:regular r:id="rId18"/>
+    </p:embeddedFont>
+    <p:embeddedFont>
       <p:font typeface="Bodoni Moda" panose="020B0604020202020204" charset="0"/>
-      <p:regular r:id="rId15"/>
+      <p:regular r:id="rId19"/>
     </p:embeddedFont>
     <p:embeddedFont>
       <p:font typeface="Host Grotesk Bold" panose="020B0604020202020204" charset="0"/>
-      <p:regular r:id="rId16"/>
-    </p:embeddedFont>
-    <p:embeddedFont>
-      <p:font typeface="Garamond" panose="02020404030301010803" pitchFamily="18" charset="0"/>
-      <p:regular r:id="rId17"/>
-      <p:bold r:id="rId18"/>
-      <p:italic r:id="rId19"/>
-    </p:embeddedFont>
-    <p:embeddedFont>
-      <p:font typeface="Host Grotesk" panose="020B0604020202020204" charset="0"/>
       <p:regular r:id="rId20"/>
     </p:embeddedFont>
   </p:embeddedFontLst>
@@ -1527,7 +1527,7 @@
             <a:fld id="{B61BEF0D-F0BB-DE4B-95CE-6DB70DBA9567}" type="datetimeFigureOut">
               <a:rPr lang="en-US" dirty="0"/>
               <a:pPr/>
-              <a:t>10/3/2026</a:t>
+              <a:t>10/24/2026</a:t>
             </a:fld>
             <a:endParaRPr lang="en-US" dirty="0"/>
           </a:p>
@@ -1854,7 +1854,7 @@
             <a:fld id="{B61BEF0D-F0BB-DE4B-95CE-6DB70DBA9567}" type="datetimeFigureOut">
               <a:rPr lang="en-US" dirty="0"/>
               <a:pPr/>
-              <a:t>10/3/2026</a:t>
+              <a:t>10/24/2026</a:t>
             </a:fld>
             <a:endParaRPr lang="en-US" dirty="0"/>
           </a:p>
@@ -2105,7 +2105,7 @@
             <a:fld id="{B61BEF0D-F0BB-DE4B-95CE-6DB70DBA9567}" type="datetimeFigureOut">
               <a:rPr lang="en-US" dirty="0"/>
               <a:pPr/>
-              <a:t>10/3/2026</a:t>
+              <a:t>10/24/2026</a:t>
             </a:fld>
             <a:endParaRPr lang="en-US" dirty="0"/>
           </a:p>
@@ -2447,7 +2447,7 @@
             <a:fld id="{B61BEF0D-F0BB-DE4B-95CE-6DB70DBA9567}" type="datetimeFigureOut">
               <a:rPr lang="en-US" dirty="0"/>
               <a:pPr/>
-              <a:t>10/3/2026</a:t>
+              <a:t>10/24/2026</a:t>
             </a:fld>
             <a:endParaRPr lang="en-US" dirty="0"/>
           </a:p>
@@ -2797,7 +2797,7 @@
             <a:fld id="{B61BEF0D-F0BB-DE4B-95CE-6DB70DBA9567}" type="datetimeFigureOut">
               <a:rPr lang="en-US" dirty="0"/>
               <a:pPr/>
-              <a:t>10/3/2026</a:t>
+              <a:t>10/24/2026</a:t>
             </a:fld>
             <a:endParaRPr lang="en-US" dirty="0"/>
           </a:p>
@@ -3174,7 +3174,7 @@
             <a:fld id="{B61BEF0D-F0BB-DE4B-95CE-6DB70DBA9567}" type="datetimeFigureOut">
               <a:rPr lang="en-US" dirty="0"/>
               <a:pPr/>
-              <a:t>10/3/2026</a:t>
+              <a:t>10/24/2026</a:t>
             </a:fld>
             <a:endParaRPr lang="en-US" dirty="0"/>
           </a:p>
@@ -3647,7 +3647,7 @@
             <a:fld id="{B61BEF0D-F0BB-DE4B-95CE-6DB70DBA9567}" type="datetimeFigureOut">
               <a:rPr lang="en-US" dirty="0"/>
               <a:pPr/>
-              <a:t>10/3/2026</a:t>
+              <a:t>10/24/2026</a:t>
             </a:fld>
             <a:endParaRPr lang="en-US" dirty="0"/>
           </a:p>
@@ -3855,7 +3855,7 @@
             <a:fld id="{B61BEF0D-F0BB-DE4B-95CE-6DB70DBA9567}" type="datetimeFigureOut">
               <a:rPr lang="en-US" dirty="0"/>
               <a:pPr/>
-              <a:t>10/3/2026</a:t>
+              <a:t>10/24/2026</a:t>
             </a:fld>
             <a:endParaRPr lang="en-US" dirty="0"/>
           </a:p>
@@ -4069,7 +4069,7 @@
             <a:fld id="{B61BEF0D-F0BB-DE4B-95CE-6DB70DBA9567}" type="datetimeFigureOut">
               <a:rPr lang="en-US" dirty="0"/>
               <a:pPr/>
-              <a:t>10/3/2026</a:t>
+              <a:t>10/24/2026</a:t>
             </a:fld>
             <a:endParaRPr lang="en-US" dirty="0"/>
           </a:p>
@@ -4379,7 +4379,7 @@
           <a:p>
             <a:fld id="{52647F38-B617-4D2F-AE0A-013F0C4D2C57}" type="datetimeFigureOut">
               <a:rPr lang="en-US" dirty="0"/>
-              <a:t>10/3/2026</a:t>
+              <a:t>10/24/2026</a:t>
             </a:fld>
             <a:endParaRPr lang="en-US" dirty="0"/>
           </a:p>
@@ -4629,7 +4629,7 @@
             <a:fld id="{B61BEF0D-F0BB-DE4B-95CE-6DB70DBA9567}" type="datetimeFigureOut">
               <a:rPr lang="en-US" dirty="0"/>
               <a:pPr/>
-              <a:t>10/3/2026</a:t>
+              <a:t>10/24/2026</a:t>
             </a:fld>
             <a:endParaRPr lang="en-US" dirty="0"/>
           </a:p>
@@ -4929,7 +4929,7 @@
           <a:p>
             <a:fld id="{05BFA754-D5C3-4E66-96A6-867B257F58DC}" type="datetimeFigureOut">
               <a:rPr lang="en-US" dirty="0"/>
-              <a:t>10/3/2026</a:t>
+              <a:t>10/24/2026</a:t>
             </a:fld>
             <a:endParaRPr lang="en-US" dirty="0"/>
           </a:p>
@@ -5325,7 +5325,7 @@
             <a:fld id="{B61BEF0D-F0BB-DE4B-95CE-6DB70DBA9567}" type="datetimeFigureOut">
               <a:rPr lang="en-US" dirty="0"/>
               <a:pPr/>
-              <a:t>10/3/2026</a:t>
+              <a:t>10/24/2026</a:t>
             </a:fld>
             <a:endParaRPr lang="en-US" dirty="0"/>
           </a:p>
@@ -5477,7 +5477,7 @@
             <a:fld id="{B61BEF0D-F0BB-DE4B-95CE-6DB70DBA9567}" type="datetimeFigureOut">
               <a:rPr lang="en-US" dirty="0"/>
               <a:pPr/>
-              <a:t>10/3/2026</a:t>
+              <a:t>10/24/2026</a:t>
             </a:fld>
             <a:endParaRPr lang="en-US" dirty="0"/>
           </a:p>
@@ -5606,7 +5606,7 @@
             <a:fld id="{B61BEF0D-F0BB-DE4B-95CE-6DB70DBA9567}" type="datetimeFigureOut">
               <a:rPr lang="en-US" dirty="0"/>
               <a:pPr/>
-              <a:t>10/3/2026</a:t>
+              <a:t>10/24/2026</a:t>
             </a:fld>
             <a:endParaRPr lang="en-US" dirty="0"/>
           </a:p>
@@ -5864,7 +5864,7 @@
             <a:fld id="{B61BEF0D-F0BB-DE4B-95CE-6DB70DBA9567}" type="datetimeFigureOut">
               <a:rPr lang="en-US" dirty="0"/>
               <a:pPr/>
-              <a:t>10/3/2026</a:t>
+              <a:t>10/24/2026</a:t>
             </a:fld>
             <a:endParaRPr lang="en-US" dirty="0"/>
           </a:p>
@@ -6182,7 +6182,7 @@
             <a:fld id="{B61BEF0D-F0BB-DE4B-95CE-6DB70DBA9567}" type="datetimeFigureOut">
               <a:rPr lang="en-US" dirty="0"/>
               <a:pPr/>
-              <a:t>10/3/2026</a:t>
+              <a:t>10/24/2026</a:t>
             </a:fld>
             <a:endParaRPr lang="en-US" dirty="0"/>
           </a:p>
@@ -6536,7 +6536,7 @@
             <a:fld id="{B61BEF0D-F0BB-DE4B-95CE-6DB70DBA9567}" type="datetimeFigureOut">
               <a:rPr lang="en-US" dirty="0"/>
               <a:pPr/>
-              <a:t>10/3/2026</a:t>
+              <a:t>10/24/2026</a:t>
             </a:fld>
             <a:endParaRPr lang="en-US" dirty="0"/>
           </a:p>
@@ -7241,8 +7241,8 @@
         </p:nvSpPr>
         <p:spPr>
           <a:xfrm>
-            <a:off x="965176" y="4498578"/>
-            <a:ext cx="4328111" cy="542131"/>
+            <a:off x="965176" y="4339829"/>
+            <a:ext cx="4328111" cy="859629"/>
           </a:xfrm>
           <a:prstGeom prst="rect">
             <a:avLst/>
@@ -7326,7 +7326,63 @@
                 <a:ea typeface="Host Grotesk" pitchFamily="34" charset="-122"/>
                 <a:cs typeface="Host Grotesk" pitchFamily="34" charset="-120"/>
               </a:rPr>
-              <a:t> (54482)</a:t>
+              <a:t> (54482</a:t>
+            </a:r>
+            <a:r>
+              <a:rPr lang="en-US" sz="1400" dirty="0" smtClean="0">
+                <a:solidFill>
+                  <a:srgbClr val="1E1E1C"/>
+                </a:solidFill>
+                <a:latin typeface="Host Grotesk" pitchFamily="34" charset="0"/>
+                <a:ea typeface="Host Grotesk" pitchFamily="34" charset="-122"/>
+                <a:cs typeface="Host Grotesk" pitchFamily="34" charset="-120"/>
+              </a:rPr>
+              <a:t>)</a:t>
+            </a:r>
+          </a:p>
+          <a:p>
+            <a:pPr marL="284480" indent="-284480" algn="l">
+              <a:lnSpc>
+                <a:spcPct val="117000"/>
+              </a:lnSpc>
+              <a:buSzPct val="100000"/>
+              <a:buChar char="•"/>
+            </a:pPr>
+            <a:r>
+              <a:rPr lang="en-US" sz="1400" dirty="0" err="1" smtClean="0">
+                <a:solidFill>
+                  <a:srgbClr val="1E1E1C"/>
+                </a:solidFill>
+                <a:latin typeface="Host Grotesk" pitchFamily="34" charset="0"/>
+              </a:rPr>
+              <a:t>Nouman</a:t>
+            </a:r>
+            <a:r>
+              <a:rPr lang="en-US" sz="1400" dirty="0" smtClean="0">
+                <a:solidFill>
+                  <a:srgbClr val="1E1E1C"/>
+                </a:solidFill>
+                <a:latin typeface="Host Grotesk" pitchFamily="34" charset="0"/>
+              </a:rPr>
+              <a:t> </a:t>
+            </a:r>
+            <a:r>
+              <a:rPr lang="en-US" sz="1400" dirty="0" err="1" smtClean="0">
+                <a:solidFill>
+                  <a:srgbClr val="1E1E1C"/>
+                </a:solidFill>
+                <a:latin typeface="Host Grotesk" pitchFamily="34" charset="0"/>
+              </a:rPr>
+              <a:t>Mohsin</a:t>
+            </a:r>
+            <a:r>
+              <a:rPr lang="en-US" sz="1400" smtClean="0">
+                <a:solidFill>
+                  <a:srgbClr val="1E1E1C"/>
+                </a:solidFill>
+                <a:latin typeface="Host Grotesk" pitchFamily="34" charset="0"/>
+              </a:rPr>
+              <a:t> (52963)</a:t>
             </a:r>
             <a:endParaRPr lang="en-US" sz="1400" dirty="0"/>
           </a:p>
@@ -7763,13 +7819,13 @@
   <p:clrMapOvr>
     <a:masterClrMapping/>
   </p:clrMapOvr>
-  <mc:AlternateContent xmlns:mc="http://schemas.openxmlformats.org/markup-compatibility/2006">
-    <mc:Choice xmlns:p14="http://schemas.microsoft.com/office/powerpoint/2010/main" Requires="p14">
+  <mc:AlternateContent xmlns:mc="http://schemas.openxmlformats.org/markup-compatibility/2006" xmlns:p14="http://schemas.microsoft.com/office/powerpoint/2010/main">
+    <mc:Choice Requires="p14">
       <p:transition spd="slow" p14:dur="4000">
         <p14:vortex dir="r"/>
       </p:transition>
     </mc:Choice>
-    <mc:Fallback>
+    <mc:Fallback xmlns="">
       <p:transition spd="slow">
         <p:fade/>
       </p:transition>
@@ -8509,13 +8565,13 @@
   <p:clrMapOvr>
     <a:masterClrMapping/>
   </p:clrMapOvr>
-  <mc:AlternateContent xmlns:mc="http://schemas.openxmlformats.org/markup-compatibility/2006">
-    <mc:Choice xmlns:p14="http://schemas.microsoft.com/office/powerpoint/2010/main" Requires="p14">
+  <mc:AlternateContent xmlns:mc="http://schemas.openxmlformats.org/markup-compatibility/2006" xmlns:p14="http://schemas.microsoft.com/office/powerpoint/2010/main">
+    <mc:Choice Requires="p14">
       <p:transition spd="slow" p14:dur="1600">
         <p:blinds dir="vert"/>
       </p:transition>
     </mc:Choice>
-    <mc:Fallback>
+    <mc:Fallback xmlns="">
       <p:transition spd="slow">
         <p:blinds dir="vert"/>
       </p:transition>
@@ -8652,13 +8708,13 @@
   <p:clrMapOvr>
     <a:masterClrMapping/>
   </p:clrMapOvr>
-  <mc:AlternateContent xmlns:mc="http://schemas.openxmlformats.org/markup-compatibility/2006">
-    <mc:Choice xmlns:p15="http://schemas.microsoft.com/office/powerpoint/2012/main" Requires="p15">
+  <mc:AlternateContent xmlns:mc="http://schemas.openxmlformats.org/markup-compatibility/2006" xmlns:p15="http://schemas.microsoft.com/office/powerpoint/2012/main">
+    <mc:Choice Requires="p15">
       <p:transition xmlns:p14="http://schemas.microsoft.com/office/powerpoint/2010/main" spd="slow" p14:dur="6000">
         <p15:prstTrans prst="curtains"/>
       </p:transition>
     </mc:Choice>
-    <mc:Fallback>
+    <mc:Fallback xmlns="">
       <p:transition spd="slow">
         <p:fade/>
       </p:transition>
@@ -9569,13 +9625,13 @@
   <p:clrMapOvr>
     <a:masterClrMapping/>
   </p:clrMapOvr>
-  <mc:AlternateContent xmlns:mc="http://schemas.openxmlformats.org/markup-compatibility/2006">
-    <mc:Choice xmlns:p15="http://schemas.microsoft.com/office/powerpoint/2012/main" Requires="p15">
+  <mc:AlternateContent xmlns:mc="http://schemas.openxmlformats.org/markup-compatibility/2006" xmlns:p15="http://schemas.microsoft.com/office/powerpoint/2012/main">
+    <mc:Choice Requires="p15">
       <p:transition xmlns:p14="http://schemas.microsoft.com/office/powerpoint/2010/main" spd="slow" p14:dur="2000">
         <p15:prstTrans prst="drape"/>
       </p:transition>
     </mc:Choice>
-    <mc:Fallback>
+    <mc:Fallback xmlns="">
       <p:transition spd="slow">
         <p:fade/>
       </p:transition>
@@ -10121,13 +10177,13 @@
   <p:clrMapOvr>
     <a:masterClrMapping/>
   </p:clrMapOvr>
-  <mc:AlternateContent xmlns:mc="http://schemas.openxmlformats.org/markup-compatibility/2006">
-    <mc:Choice xmlns:p14="http://schemas.microsoft.com/office/powerpoint/2010/main" Requires="p14">
+  <mc:AlternateContent xmlns:mc="http://schemas.openxmlformats.org/markup-compatibility/2006" xmlns:p14="http://schemas.microsoft.com/office/powerpoint/2010/main">
+    <mc:Choice Requires="p14">
       <p:transition spd="slow" p14:dur="3000">
         <p14:shred/>
       </p:transition>
     </mc:Choice>
-    <mc:Fallback>
+    <mc:Fallback xmlns="">
       <p:transition spd="slow">
         <p:fade/>
       </p:transition>
@@ -11252,13 +11308,13 @@
   <p:clrMapOvr>
     <a:masterClrMapping/>
   </p:clrMapOvr>
-  <mc:AlternateContent xmlns:mc="http://schemas.openxmlformats.org/markup-compatibility/2006">
-    <mc:Choice xmlns:p15="http://schemas.microsoft.com/office/powerpoint/2012/main" Requires="p15">
+  <mc:AlternateContent xmlns:mc="http://schemas.openxmlformats.org/markup-compatibility/2006" xmlns:p15="http://schemas.microsoft.com/office/powerpoint/2012/main">
+    <mc:Choice Requires="p15">
       <p:transition xmlns:p14="http://schemas.microsoft.com/office/powerpoint/2010/main" spd="slow" p14:dur="2000">
         <p15:prstTrans prst="fallOver"/>
       </p:transition>
     </mc:Choice>
-    <mc:Fallback>
+    <mc:Fallback xmlns="">
       <p:transition spd="slow">
         <p:fade/>
       </p:transition>
@@ -11968,13 +12024,13 @@
   <p:clrMapOvr>
     <a:masterClrMapping/>
   </p:clrMapOvr>
-  <mc:AlternateContent xmlns:mc="http://schemas.openxmlformats.org/markup-compatibility/2006">
-    <mc:Choice xmlns:p15="http://schemas.microsoft.com/office/powerpoint/2012/main" Requires="p15">
+  <mc:AlternateContent xmlns:mc="http://schemas.openxmlformats.org/markup-compatibility/2006" xmlns:p15="http://schemas.microsoft.com/office/powerpoint/2012/main">
+    <mc:Choice Requires="p15">
       <p:transition xmlns:p14="http://schemas.microsoft.com/office/powerpoint/2010/main" spd="slow" p14:dur="1250">
         <p15:prstTrans prst="peelOff"/>
       </p:transition>
     </mc:Choice>
-    <mc:Fallback>
+    <mc:Fallback xmlns="">
       <p:transition spd="slow">
         <p:fade/>
       </p:transition>
@@ -12947,13 +13003,13 @@
   <p:clrMapOvr>
     <a:masterClrMapping/>
   </p:clrMapOvr>
-  <mc:AlternateContent xmlns:mc="http://schemas.openxmlformats.org/markup-compatibility/2006">
-    <mc:Choice xmlns:p15="http://schemas.microsoft.com/office/powerpoint/2012/main" Requires="p15">
+  <mc:AlternateContent xmlns:mc="http://schemas.openxmlformats.org/markup-compatibility/2006" xmlns:p15="http://schemas.microsoft.com/office/powerpoint/2012/main">
+    <mc:Choice Requires="p15">
       <p:transition xmlns:p14="http://schemas.microsoft.com/office/powerpoint/2010/main" spd="slow" p14:dur="1250">
         <p15:prstTrans prst="pageCurlDouble"/>
       </p:transition>
     </mc:Choice>
-    <mc:Fallback>
+    <mc:Fallback xmlns="">
       <p:transition spd="slow">
         <p:fade/>
       </p:transition>
@@ -13096,14 +13152,14 @@
                 <a:gridCol w="1364422">
                   <a:extLst>
                     <a:ext uri="{9D8B030D-6E8A-4147-A177-3AD203B41FA5}">
-                      <a16:colId xmlns:a16="http://schemas.microsoft.com/office/drawing/2014/main" xmlns="" val="20000"/>
+                      <a16:colId xmlns="" xmlns:a16="http://schemas.microsoft.com/office/drawing/2014/main" val="20000"/>
                     </a:ext>
                   </a:extLst>
                 </a:gridCol>
                 <a:gridCol w="2648678">
                   <a:extLst>
                     <a:ext uri="{9D8B030D-6E8A-4147-A177-3AD203B41FA5}">
-                      <a16:colId xmlns:a16="http://schemas.microsoft.com/office/drawing/2014/main" xmlns="" val="20001"/>
+                      <a16:colId xmlns="" xmlns:a16="http://schemas.microsoft.com/office/drawing/2014/main" val="20001"/>
                     </a:ext>
                   </a:extLst>
                 </a:gridCol>
@@ -13241,7 +13297,7 @@
                 </a:tc>
                 <a:extLst>
                   <a:ext uri="{0D108BD9-81ED-4DB2-BD59-A6C34878D82A}">
-                    <a16:rowId xmlns:a16="http://schemas.microsoft.com/office/drawing/2014/main" xmlns="" val="10000"/>
+                    <a16:rowId xmlns="" xmlns:a16="http://schemas.microsoft.com/office/drawing/2014/main" val="10000"/>
                   </a:ext>
                 </a:extLst>
               </a:tr>
@@ -13378,7 +13434,7 @@
                 </a:tc>
                 <a:extLst>
                   <a:ext uri="{0D108BD9-81ED-4DB2-BD59-A6C34878D82A}">
-                    <a16:rowId xmlns:a16="http://schemas.microsoft.com/office/drawing/2014/main" xmlns="" val="10001"/>
+                    <a16:rowId xmlns="" xmlns:a16="http://schemas.microsoft.com/office/drawing/2014/main" val="10001"/>
                   </a:ext>
                 </a:extLst>
               </a:tr>
@@ -13515,7 +13571,7 @@
                 </a:tc>
                 <a:extLst>
                   <a:ext uri="{0D108BD9-81ED-4DB2-BD59-A6C34878D82A}">
-                    <a16:rowId xmlns:a16="http://schemas.microsoft.com/office/drawing/2014/main" xmlns="" val="10002"/>
+                    <a16:rowId xmlns="" xmlns:a16="http://schemas.microsoft.com/office/drawing/2014/main" val="10002"/>
                   </a:ext>
                 </a:extLst>
               </a:tr>
@@ -13652,7 +13708,7 @@
                 </a:tc>
                 <a:extLst>
                   <a:ext uri="{0D108BD9-81ED-4DB2-BD59-A6C34878D82A}">
-                    <a16:rowId xmlns:a16="http://schemas.microsoft.com/office/drawing/2014/main" xmlns="" val="10003"/>
+                    <a16:rowId xmlns="" xmlns:a16="http://schemas.microsoft.com/office/drawing/2014/main" val="10003"/>
                   </a:ext>
                 </a:extLst>
               </a:tr>
@@ -13789,7 +13845,7 @@
                 </a:tc>
                 <a:extLst>
                   <a:ext uri="{0D108BD9-81ED-4DB2-BD59-A6C34878D82A}">
-                    <a16:rowId xmlns:a16="http://schemas.microsoft.com/office/drawing/2014/main" xmlns="" val="10004"/>
+                    <a16:rowId xmlns="" xmlns:a16="http://schemas.microsoft.com/office/drawing/2014/main" val="10004"/>
                   </a:ext>
                 </a:extLst>
               </a:tr>
@@ -13926,7 +13982,7 @@
                 </a:tc>
                 <a:extLst>
                   <a:ext uri="{0D108BD9-81ED-4DB2-BD59-A6C34878D82A}">
-                    <a16:rowId xmlns:a16="http://schemas.microsoft.com/office/drawing/2014/main" xmlns="" val="10005"/>
+                    <a16:rowId xmlns="" xmlns:a16="http://schemas.microsoft.com/office/drawing/2014/main" val="10005"/>
                   </a:ext>
                 </a:extLst>
               </a:tr>
@@ -14063,7 +14119,7 @@
                 </a:tc>
                 <a:extLst>
                   <a:ext uri="{0D108BD9-81ED-4DB2-BD59-A6C34878D82A}">
-                    <a16:rowId xmlns:a16="http://schemas.microsoft.com/office/drawing/2014/main" xmlns="" val="10006"/>
+                    <a16:rowId xmlns="" xmlns:a16="http://schemas.microsoft.com/office/drawing/2014/main" val="10006"/>
                   </a:ext>
                 </a:extLst>
               </a:tr>
@@ -14200,7 +14256,7 @@
                 </a:tc>
                 <a:extLst>
                   <a:ext uri="{0D108BD9-81ED-4DB2-BD59-A6C34878D82A}">
-                    <a16:rowId xmlns:a16="http://schemas.microsoft.com/office/drawing/2014/main" xmlns="" val="10007"/>
+                    <a16:rowId xmlns="" xmlns:a16="http://schemas.microsoft.com/office/drawing/2014/main" val="10007"/>
                   </a:ext>
                 </a:extLst>
               </a:tr>
@@ -14881,13 +14937,13 @@
   <p:clrMapOvr>
     <a:masterClrMapping/>
   </p:clrMapOvr>
-  <mc:AlternateContent xmlns:mc="http://schemas.openxmlformats.org/markup-compatibility/2006">
-    <mc:Choice xmlns:p15="http://schemas.microsoft.com/office/powerpoint/2012/main" Requires="p15">
+  <mc:AlternateContent xmlns:mc="http://schemas.openxmlformats.org/markup-compatibility/2006" xmlns:p15="http://schemas.microsoft.com/office/powerpoint/2012/main">
+    <mc:Choice Requires="p15">
       <p:transition xmlns:p14="http://schemas.microsoft.com/office/powerpoint/2010/main" spd="slow" p14:dur="2000">
         <p15:prstTrans prst="crush"/>
       </p:transition>
     </mc:Choice>
-    <mc:Fallback>
+    <mc:Fallback xmlns="">
       <p:transition spd="slow">
         <p:fade/>
       </p:transition>
@@ -15299,13 +15355,13 @@
   <p:clrMapOvr>
     <a:masterClrMapping/>
   </p:clrMapOvr>
-  <mc:AlternateContent xmlns:mc="http://schemas.openxmlformats.org/markup-compatibility/2006">
-    <mc:Choice xmlns:p15="http://schemas.microsoft.com/office/powerpoint/2012/main" Requires="p15">
+  <mc:AlternateContent xmlns:mc="http://schemas.openxmlformats.org/markup-compatibility/2006" xmlns:p15="http://schemas.microsoft.com/office/powerpoint/2012/main">
+    <mc:Choice Requires="p15">
       <p:transition xmlns:p14="http://schemas.microsoft.com/office/powerpoint/2010/main" spd="slow" p14:dur="1250">
         <p15:prstTrans prst="airplane"/>
       </p:transition>
     </mc:Choice>
-    <mc:Fallback>
+    <mc:Fallback xmlns="">
       <p:transition spd="slow">
         <p:fade/>
       </p:transition>
@@ -16078,13 +16134,13 @@
   <p:clrMapOvr>
     <a:masterClrMapping/>
   </p:clrMapOvr>
-  <mc:AlternateContent xmlns:mc="http://schemas.openxmlformats.org/markup-compatibility/2006">
-    <mc:Choice xmlns:p15="http://schemas.microsoft.com/office/powerpoint/2012/main" Requires="p15">
+  <mc:AlternateContent xmlns:mc="http://schemas.openxmlformats.org/markup-compatibility/2006" xmlns:p15="http://schemas.microsoft.com/office/powerpoint/2012/main">
+    <mc:Choice Requires="p15">
       <p:transition xmlns:p14="http://schemas.microsoft.com/office/powerpoint/2010/main" spd="slow" p14:dur="2000">
         <p15:prstTrans prst="fracture"/>
       </p:transition>
     </mc:Choice>
-    <mc:Fallback>
+    <mc:Fallback xmlns="">
       <p:transition spd="slow">
         <p:fade/>
       </p:transition>
